--- a/output/presentations/BeeWise-Lab3-Review-DRAFT.pptx
+++ b/output/presentations/BeeWise-Lab3-Review-DRAFT.pptx
@@ -2,25 +2,25 @@
 <file path=ppt/presentation.xml><?xml version="1.0" encoding="utf-8"?>
 <p:presentation xmlns:p="http://schemas.openxmlformats.org/presentationml/2006/main">
   <p:sldMasterIdLst>
-    <p:sldMasterId xmlns:r="http://schemas.openxmlformats.org/officeDocument/2006/relationships" id="2147483648" r:id="Re6272eda8d604631"/>
+    <p:sldMasterId xmlns:r="http://schemas.openxmlformats.org/officeDocument/2006/relationships" id="2147483648" r:id="R255ee656df67410a"/>
   </p:sldMasterIdLst>
   <p:notesMasterIdLst>
-    <p:notesMasterId xmlns:r="http://schemas.openxmlformats.org/officeDocument/2006/relationships" r:id="Re7e2cdabc2894bf2"/>
+    <p:notesMasterId xmlns:r="http://schemas.openxmlformats.org/officeDocument/2006/relationships" r:id="Rbc5a57a1425d4da1"/>
   </p:notesMasterIdLst>
   <p:sldIdLst>
-    <p:sldId xmlns:r="http://schemas.openxmlformats.org/officeDocument/2006/relationships" id="256" r:id="Rcdb77b15f7d145a3"/>
-    <p:sldId xmlns:r="http://schemas.openxmlformats.org/officeDocument/2006/relationships" id="257" r:id="Red4fb20453a144b6"/>
-    <p:sldId xmlns:r="http://schemas.openxmlformats.org/officeDocument/2006/relationships" id="258" r:id="R8b5227a456094ef0"/>
-    <p:sldId xmlns:r="http://schemas.openxmlformats.org/officeDocument/2006/relationships" id="259" r:id="R64e948679af74258"/>
-    <p:sldId xmlns:r="http://schemas.openxmlformats.org/officeDocument/2006/relationships" id="260" r:id="R93b351f846ee42f1"/>
-    <p:sldId xmlns:r="http://schemas.openxmlformats.org/officeDocument/2006/relationships" id="261" r:id="R009931076ed241bf"/>
-    <p:sldId xmlns:r="http://schemas.openxmlformats.org/officeDocument/2006/relationships" id="262" r:id="Re3e7c5d438204c61"/>
-    <p:sldId xmlns:r="http://schemas.openxmlformats.org/officeDocument/2006/relationships" id="263" r:id="R494166573cbe4907"/>
-    <p:sldId xmlns:r="http://schemas.openxmlformats.org/officeDocument/2006/relationships" id="264" r:id="Rd5a6316a23a74602"/>
-    <p:sldId xmlns:r="http://schemas.openxmlformats.org/officeDocument/2006/relationships" id="265" r:id="R44646112e5f542ec"/>
-    <p:sldId xmlns:r="http://schemas.openxmlformats.org/officeDocument/2006/relationships" id="266" r:id="R9cbc29eb61ed487c"/>
-    <p:sldId xmlns:r="http://schemas.openxmlformats.org/officeDocument/2006/relationships" id="267" r:id="R4af1c076326d440a"/>
-    <p:sldId xmlns:r="http://schemas.openxmlformats.org/officeDocument/2006/relationships" id="268" r:id="R239c92f26bd4420e"/>
+    <p:sldId xmlns:r="http://schemas.openxmlformats.org/officeDocument/2006/relationships" id="256" r:id="R9de9a177059645ff"/>
+    <p:sldId xmlns:r="http://schemas.openxmlformats.org/officeDocument/2006/relationships" id="257" r:id="R7710deb5d4a84887"/>
+    <p:sldId xmlns:r="http://schemas.openxmlformats.org/officeDocument/2006/relationships" id="258" r:id="R057d963c0e884a77"/>
+    <p:sldId xmlns:r="http://schemas.openxmlformats.org/officeDocument/2006/relationships" id="259" r:id="Rc9d9c22d0a27461d"/>
+    <p:sldId xmlns:r="http://schemas.openxmlformats.org/officeDocument/2006/relationships" id="260" r:id="Rd7695017477146d1"/>
+    <p:sldId xmlns:r="http://schemas.openxmlformats.org/officeDocument/2006/relationships" id="261" r:id="R009794a0251d4d83"/>
+    <p:sldId xmlns:r="http://schemas.openxmlformats.org/officeDocument/2006/relationships" id="262" r:id="R6da5c892622f47bc"/>
+    <p:sldId xmlns:r="http://schemas.openxmlformats.org/officeDocument/2006/relationships" id="263" r:id="R27c3a0be3c184f35"/>
+    <p:sldId xmlns:r="http://schemas.openxmlformats.org/officeDocument/2006/relationships" id="264" r:id="R41b48094b24f43c8"/>
+    <p:sldId xmlns:r="http://schemas.openxmlformats.org/officeDocument/2006/relationships" id="265" r:id="Rc70372707ce64605"/>
+    <p:sldId xmlns:r="http://schemas.openxmlformats.org/officeDocument/2006/relationships" id="266" r:id="R27d4cb4104d446a9"/>
+    <p:sldId xmlns:r="http://schemas.openxmlformats.org/officeDocument/2006/relationships" id="267" r:id="R7e1d2403e7894b1b"/>
+    <p:sldId xmlns:r="http://schemas.openxmlformats.org/officeDocument/2006/relationships" id="268" r:id="R43ea856f86e346f2"/>
   </p:sldIdLst>
   <p:sldSz cx="12192000" cy="6858000"/>
   <p:notesSz cx="6858000" cy="9144000"/>
@@ -3685,12 +3685,12 @@
   </p:cSld>
   <p:clrMap bg1="lt1" tx1="dk1" bg2="lt2" tx2="dk2" accent1="accent1" accent2="accent2" accent3="accent3" accent4="accent4" accent5="accent5" accent6="accent6" hlink="hlink" folHlink="folHlink"/>
   <p:sldLayoutIdLst>
-    <p:sldLayoutId xmlns:r="http://schemas.openxmlformats.org/officeDocument/2006/relationships" id="2147483649" r:id="R22fd047c9e224cb6"/>
-    <p:sldLayoutId xmlns:r="http://schemas.openxmlformats.org/officeDocument/2006/relationships" id="2147483650" r:id="Recaafbb965274c72"/>
-    <p:sldLayoutId xmlns:r="http://schemas.openxmlformats.org/officeDocument/2006/relationships" id="2147483651" r:id="R2430954f00124142"/>
-    <p:sldLayoutId xmlns:r="http://schemas.openxmlformats.org/officeDocument/2006/relationships" id="2147483652" r:id="R31536e844a2b4f9e"/>
-    <p:sldLayoutId xmlns:r="http://schemas.openxmlformats.org/officeDocument/2006/relationships" id="2147483653" r:id="R85dbc81950ad4209"/>
-    <p:sldLayoutId xmlns:r="http://schemas.openxmlformats.org/officeDocument/2006/relationships" id="2147483654" r:id="Re53db9eb6fa4497d"/>
+    <p:sldLayoutId xmlns:r="http://schemas.openxmlformats.org/officeDocument/2006/relationships" id="2147483649" r:id="R5f1b234927ac4a69"/>
+    <p:sldLayoutId xmlns:r="http://schemas.openxmlformats.org/officeDocument/2006/relationships" id="2147483650" r:id="R0c36fdb55de4476c"/>
+    <p:sldLayoutId xmlns:r="http://schemas.openxmlformats.org/officeDocument/2006/relationships" id="2147483651" r:id="Re85eb06620844bd8"/>
+    <p:sldLayoutId xmlns:r="http://schemas.openxmlformats.org/officeDocument/2006/relationships" id="2147483652" r:id="Rcc72314faa2a4579"/>
+    <p:sldLayoutId xmlns:r="http://schemas.openxmlformats.org/officeDocument/2006/relationships" id="2147483653" r:id="R4a2c4774b33b4e20"/>
+    <p:sldLayoutId xmlns:r="http://schemas.openxmlformats.org/officeDocument/2006/relationships" id="2147483654" r:id="R8bbbe5061c9145c6"/>
   </p:sldLayoutIdLst>
   <p:txStyles>
     <p:titleStyle>
@@ -4311,6 +4311,7 @@
               </a:defRPr>
             </a:defPPr>
             <a:lvl1pPr>
+              <a:buNone/>
               <a:defRPr sz="2025" b="1">
                 <a:solidFill>
                   <a:srgbClr val="FFC500"/>
@@ -4321,6 +4322,7 @@
               </a:defRPr>
             </a:lvl1pPr>
             <a:lvl2pPr>
+              <a:buNone/>
               <a:defRPr sz="2025" b="1">
                 <a:solidFill>
                   <a:srgbClr val="FFC500"/>
@@ -4331,6 +4333,7 @@
               </a:defRPr>
             </a:lvl2pPr>
             <a:lvl3pPr>
+              <a:buNone/>
               <a:defRPr sz="2025" b="1">
                 <a:solidFill>
                   <a:srgbClr val="FFC500"/>
@@ -4341,6 +4344,7 @@
               </a:defRPr>
             </a:lvl3pPr>
             <a:lvl4pPr>
+              <a:buNone/>
               <a:defRPr sz="2025" b="1">
                 <a:solidFill>
                   <a:srgbClr val="FFC500"/>
@@ -4351,6 +4355,7 @@
               </a:defRPr>
             </a:lvl4pPr>
             <a:lvl5pPr>
+              <a:buNone/>
               <a:defRPr sz="2025" b="1">
                 <a:solidFill>
                   <a:srgbClr val="FFC500"/>
@@ -4361,6 +4366,7 @@
               </a:defRPr>
             </a:lvl5pPr>
             <a:lvl6pPr>
+              <a:buNone/>
               <a:defRPr sz="2025" b="1">
                 <a:solidFill>
                   <a:srgbClr val="FFC500"/>
@@ -4371,6 +4377,7 @@
               </a:defRPr>
             </a:lvl6pPr>
             <a:lvl7pPr>
+              <a:buNone/>
               <a:defRPr sz="2025" b="1">
                 <a:solidFill>
                   <a:srgbClr val="FFC500"/>
@@ -4381,6 +4388,7 @@
               </a:defRPr>
             </a:lvl7pPr>
             <a:lvl8pPr>
+              <a:buNone/>
               <a:defRPr sz="2025" b="1">
                 <a:solidFill>
                   <a:srgbClr val="FFC500"/>
@@ -4391,6 +4399,7 @@
               </a:defRPr>
             </a:lvl8pPr>
             <a:lvl9pPr>
+              <a:buNone/>
               <a:defRPr sz="2025" b="1">
                 <a:solidFill>
                   <a:srgbClr val="FFC500"/>
@@ -4403,6 +4412,7 @@
           </a:lstStyle>
           <a:p xmlns:a="http://schemas.openxmlformats.org/drawingml/2006/main">
             <a:pPr>
+              <a:buNone/>
               <a:defRPr sz="2025" b="1">
                 <a:solidFill>
                   <a:srgbClr val="FFC500"/>
@@ -4470,6 +4480,7 @@
               </a:defRPr>
             </a:defPPr>
             <a:lvl1pPr>
+              <a:buNone/>
               <a:defRPr sz="4350" b="1">
                 <a:solidFill>
                   <a:srgbClr val="FFFFFF"/>
@@ -4480,6 +4491,7 @@
               </a:defRPr>
             </a:lvl1pPr>
             <a:lvl2pPr>
+              <a:buNone/>
               <a:defRPr sz="4350" b="1">
                 <a:solidFill>
                   <a:srgbClr val="FFFFFF"/>
@@ -4490,6 +4502,7 @@
               </a:defRPr>
             </a:lvl2pPr>
             <a:lvl3pPr>
+              <a:buNone/>
               <a:defRPr sz="4350" b="1">
                 <a:solidFill>
                   <a:srgbClr val="FFFFFF"/>
@@ -4500,6 +4513,7 @@
               </a:defRPr>
             </a:lvl3pPr>
             <a:lvl4pPr>
+              <a:buNone/>
               <a:defRPr sz="4350" b="1">
                 <a:solidFill>
                   <a:srgbClr val="FFFFFF"/>
@@ -4510,6 +4524,7 @@
               </a:defRPr>
             </a:lvl4pPr>
             <a:lvl5pPr>
+              <a:buNone/>
               <a:defRPr sz="4350" b="1">
                 <a:solidFill>
                   <a:srgbClr val="FFFFFF"/>
@@ -4520,6 +4535,7 @@
               </a:defRPr>
             </a:lvl5pPr>
             <a:lvl6pPr>
+              <a:buNone/>
               <a:defRPr sz="4350" b="1">
                 <a:solidFill>
                   <a:srgbClr val="FFFFFF"/>
@@ -4530,6 +4546,7 @@
               </a:defRPr>
             </a:lvl6pPr>
             <a:lvl7pPr>
+              <a:buNone/>
               <a:defRPr sz="4350" b="1">
                 <a:solidFill>
                   <a:srgbClr val="FFFFFF"/>
@@ -4540,6 +4557,7 @@
               </a:defRPr>
             </a:lvl7pPr>
             <a:lvl8pPr>
+              <a:buNone/>
               <a:defRPr sz="4350" b="1">
                 <a:solidFill>
                   <a:srgbClr val="FFFFFF"/>
@@ -4550,6 +4568,7 @@
               </a:defRPr>
             </a:lvl8pPr>
             <a:lvl9pPr>
+              <a:buNone/>
               <a:defRPr sz="4350" b="1">
                 <a:solidFill>
                   <a:srgbClr val="FFFFFF"/>
@@ -4562,6 +4581,7 @@
           </a:lstStyle>
           <a:p xmlns:a="http://schemas.openxmlformats.org/drawingml/2006/main">
             <a:pPr>
+              <a:buNone/>
               <a:defRPr sz="4350" b="1">
                 <a:solidFill>
                   <a:srgbClr val="FFFFFF"/>
@@ -4649,7 +4669,7 @@
             <a:normAutofit fontScale="100000"/>
           </a:bodyPr>
           <a:lstStyle xmlns:a="http://schemas.openxmlformats.org/drawingml/2006/main">
-            <a:defPPr>
+            <a:defPPr algn="l">
               <a:defRPr sz="2400">
                 <a:solidFill>
                   <a:srgbClr val="FFFFFF"/>
@@ -4659,7 +4679,8 @@
                 <a:cs typeface="Arial"/>
               </a:defRPr>
             </a:defPPr>
-            <a:lvl1pPr>
+            <a:lvl1pPr algn="l">
+              <a:buNone/>
               <a:defRPr sz="2400">
                 <a:solidFill>
                   <a:srgbClr val="FFFFFF"/>
@@ -4669,7 +4690,8 @@
                 <a:cs typeface="Arial"/>
               </a:defRPr>
             </a:lvl1pPr>
-            <a:lvl2pPr>
+            <a:lvl2pPr algn="l">
+              <a:buNone/>
               <a:defRPr sz="2400">
                 <a:solidFill>
                   <a:srgbClr val="FFFFFF"/>
@@ -4679,7 +4701,8 @@
                 <a:cs typeface="Arial"/>
               </a:defRPr>
             </a:lvl2pPr>
-            <a:lvl3pPr>
+            <a:lvl3pPr algn="l">
+              <a:buNone/>
               <a:defRPr sz="2400">
                 <a:solidFill>
                   <a:srgbClr val="FFFFFF"/>
@@ -4689,7 +4712,8 @@
                 <a:cs typeface="Arial"/>
               </a:defRPr>
             </a:lvl3pPr>
-            <a:lvl4pPr>
+            <a:lvl4pPr algn="l">
+              <a:buNone/>
               <a:defRPr sz="2400">
                 <a:solidFill>
                   <a:srgbClr val="FFFFFF"/>
@@ -4699,7 +4723,8 @@
                 <a:cs typeface="Arial"/>
               </a:defRPr>
             </a:lvl4pPr>
-            <a:lvl5pPr>
+            <a:lvl5pPr algn="l">
+              <a:buNone/>
               <a:defRPr sz="2400">
                 <a:solidFill>
                   <a:srgbClr val="FFFFFF"/>
@@ -4709,7 +4734,8 @@
                 <a:cs typeface="Arial"/>
               </a:defRPr>
             </a:lvl5pPr>
-            <a:lvl6pPr>
+            <a:lvl6pPr algn="l">
+              <a:buNone/>
               <a:defRPr sz="2400">
                 <a:solidFill>
                   <a:srgbClr val="FFFFFF"/>
@@ -4719,7 +4745,8 @@
                 <a:cs typeface="Arial"/>
               </a:defRPr>
             </a:lvl6pPr>
-            <a:lvl7pPr>
+            <a:lvl7pPr algn="l">
+              <a:buNone/>
               <a:defRPr sz="2400">
                 <a:solidFill>
                   <a:srgbClr val="FFFFFF"/>
@@ -4729,7 +4756,8 @@
                 <a:cs typeface="Arial"/>
               </a:defRPr>
             </a:lvl7pPr>
-            <a:lvl8pPr>
+            <a:lvl8pPr algn="l">
+              <a:buNone/>
               <a:defRPr sz="2400">
                 <a:solidFill>
                   <a:srgbClr val="FFFFFF"/>
@@ -4739,7 +4767,8 @@
                 <a:cs typeface="Arial"/>
               </a:defRPr>
             </a:lvl8pPr>
-            <a:lvl9pPr>
+            <a:lvl9pPr algn="l">
+              <a:buNone/>
               <a:defRPr sz="2400">
                 <a:solidFill>
                   <a:srgbClr val="FFFFFF"/>
@@ -4751,7 +4780,8 @@
             </a:lvl9pPr>
           </a:lstStyle>
           <a:p xmlns:a="http://schemas.openxmlformats.org/drawingml/2006/main">
-            <a:pPr>
+            <a:pPr algn="l">
+              <a:buNone/>
               <a:defRPr sz="2400">
                 <a:solidFill>
                   <a:srgbClr val="FFFFFF"/>
@@ -4770,7 +4800,7 @@
                 <a:ea typeface="Arial"/>
                 <a:cs typeface="Arial"/>
               </a:rPr>
-              <a:t>Cloud-enabled mobile app</a:t>
+              <a:t>Cloud-enabled mobile app - corrective review</a:t>
             </a:r>
           </a:p>
         </p:txBody>
@@ -4808,7 +4838,7 @@
             <a:normAutofit fontScale="100000"/>
           </a:bodyPr>
           <a:lstStyle xmlns:a="http://schemas.openxmlformats.org/drawingml/2006/main">
-            <a:defPPr>
+            <a:defPPr algn="l">
               <a:defRPr sz="1800">
                 <a:solidFill>
                   <a:srgbClr val="FFFFFF"/>
@@ -4818,7 +4848,8 @@
                 <a:cs typeface="Arial"/>
               </a:defRPr>
             </a:defPPr>
-            <a:lvl1pPr>
+            <a:lvl1pPr algn="l">
+              <a:buNone/>
               <a:defRPr sz="1800">
                 <a:solidFill>
                   <a:srgbClr val="FFFFFF"/>
@@ -4828,7 +4859,8 @@
                 <a:cs typeface="Arial"/>
               </a:defRPr>
             </a:lvl1pPr>
-            <a:lvl2pPr>
+            <a:lvl2pPr algn="l">
+              <a:buNone/>
               <a:defRPr sz="1800">
                 <a:solidFill>
                   <a:srgbClr val="FFFFFF"/>
@@ -4838,7 +4870,8 @@
                 <a:cs typeface="Arial"/>
               </a:defRPr>
             </a:lvl2pPr>
-            <a:lvl3pPr>
+            <a:lvl3pPr algn="l">
+              <a:buNone/>
               <a:defRPr sz="1800">
                 <a:solidFill>
                   <a:srgbClr val="FFFFFF"/>
@@ -4848,7 +4881,8 @@
                 <a:cs typeface="Arial"/>
               </a:defRPr>
             </a:lvl3pPr>
-            <a:lvl4pPr>
+            <a:lvl4pPr algn="l">
+              <a:buNone/>
               <a:defRPr sz="1800">
                 <a:solidFill>
                   <a:srgbClr val="FFFFFF"/>
@@ -4858,7 +4892,8 @@
                 <a:cs typeface="Arial"/>
               </a:defRPr>
             </a:lvl4pPr>
-            <a:lvl5pPr>
+            <a:lvl5pPr algn="l">
+              <a:buNone/>
               <a:defRPr sz="1800">
                 <a:solidFill>
                   <a:srgbClr val="FFFFFF"/>
@@ -4868,7 +4903,8 @@
                 <a:cs typeface="Arial"/>
               </a:defRPr>
             </a:lvl5pPr>
-            <a:lvl6pPr>
+            <a:lvl6pPr algn="l">
+              <a:buNone/>
               <a:defRPr sz="1800">
                 <a:solidFill>
                   <a:srgbClr val="FFFFFF"/>
@@ -4878,7 +4914,8 @@
                 <a:cs typeface="Arial"/>
               </a:defRPr>
             </a:lvl6pPr>
-            <a:lvl7pPr>
+            <a:lvl7pPr algn="l">
+              <a:buNone/>
               <a:defRPr sz="1800">
                 <a:solidFill>
                   <a:srgbClr val="FFFFFF"/>
@@ -4888,7 +4925,8 @@
                 <a:cs typeface="Arial"/>
               </a:defRPr>
             </a:lvl7pPr>
-            <a:lvl8pPr>
+            <a:lvl8pPr algn="l">
+              <a:buNone/>
               <a:defRPr sz="1800">
                 <a:solidFill>
                   <a:srgbClr val="FFFFFF"/>
@@ -4898,7 +4936,8 @@
                 <a:cs typeface="Arial"/>
               </a:defRPr>
             </a:lvl8pPr>
-            <a:lvl9pPr>
+            <a:lvl9pPr algn="l">
+              <a:buNone/>
               <a:defRPr sz="1800">
                 <a:solidFill>
                   <a:srgbClr val="FFFFFF"/>
@@ -4910,7 +4949,7 @@
             </a:lvl9pPr>
           </a:lstStyle>
           <a:p xmlns:a="http://schemas.openxmlformats.org/drawingml/2006/main">
-            <a:pPr>
+            <a:pPr algn="l">
               <a:lnSpc>
                 <a:spcPct val="125000"/>
               </a:lnSpc>
@@ -4933,11 +4972,11 @@
                 <a:ea typeface="Arial"/>
                 <a:cs typeface="Arial"/>
               </a:rPr>
-              <a:t>- Flutter + Riverpod</a:t>
+              <a:t>Flutter + Riverpod and Firebase adapters</a:t>
             </a:r>
           </a:p>
           <a:p xmlns:a="http://schemas.openxmlformats.org/drawingml/2006/main">
-            <a:pPr>
+            <a:pPr algn="l">
               <a:lnSpc>
                 <a:spcPct val="125000"/>
               </a:lnSpc>
@@ -4960,11 +4999,11 @@
                 <a:ea typeface="Arial"/>
                 <a:cs typeface="Arial"/>
               </a:rPr>
-              <a:t>- Firebase service integrations</a:t>
+              <a:t>UID isolation and current-proposal security</a:t>
             </a:r>
           </a:p>
           <a:p xmlns:a="http://schemas.openxmlformats.org/drawingml/2006/main">
-            <a:pPr>
+            <a:pPr algn="l">
               <a:lnSpc>
                 <a:spcPct val="125000"/>
               </a:lnSpc>
@@ -4987,11 +5026,11 @@
                 <a:ea typeface="Arial"/>
                 <a:cs typeface="Arial"/>
               </a:rPr>
-              <a:t>- Google ARTEMIS test suite</a:t>
+              <a:t>8 Flutter tests; 26 emulator rules tests</a:t>
             </a:r>
           </a:p>
           <a:p xmlns:a="http://schemas.openxmlformats.org/drawingml/2006/main">
-            <a:pPr>
+            <a:pPr algn="l">
               <a:lnSpc>
                 <a:spcPct val="125000"/>
               </a:lnSpc>
@@ -5014,7 +5053,7 @@
                 <a:ea typeface="Arial"/>
                 <a:cs typeface="Arial"/>
               </a:rPr>
-              <a:t>- Local AI code review</a:t>
+              <a:t>DRAFT: runtime and cloud evidence remain open</a:t>
             </a:r>
           </a:p>
         </p:txBody>
@@ -5063,6 +5102,7 @@
               </a:defRPr>
             </a:defPPr>
             <a:lvl1pPr>
+              <a:buNone/>
               <a:defRPr sz="1125">
                 <a:solidFill>
                   <a:srgbClr val="DCE8FF"/>
@@ -5073,6 +5113,7 @@
               </a:defRPr>
             </a:lvl1pPr>
             <a:lvl2pPr>
+              <a:buNone/>
               <a:defRPr sz="1125">
                 <a:solidFill>
                   <a:srgbClr val="DCE8FF"/>
@@ -5083,6 +5124,7 @@
               </a:defRPr>
             </a:lvl2pPr>
             <a:lvl3pPr>
+              <a:buNone/>
               <a:defRPr sz="1125">
                 <a:solidFill>
                   <a:srgbClr val="DCE8FF"/>
@@ -5093,6 +5135,7 @@
               </a:defRPr>
             </a:lvl3pPr>
             <a:lvl4pPr>
+              <a:buNone/>
               <a:defRPr sz="1125">
                 <a:solidFill>
                   <a:srgbClr val="DCE8FF"/>
@@ -5103,6 +5146,7 @@
               </a:defRPr>
             </a:lvl4pPr>
             <a:lvl5pPr>
+              <a:buNone/>
               <a:defRPr sz="1125">
                 <a:solidFill>
                   <a:srgbClr val="DCE8FF"/>
@@ -5113,6 +5157,7 @@
               </a:defRPr>
             </a:lvl5pPr>
             <a:lvl6pPr>
+              <a:buNone/>
               <a:defRPr sz="1125">
                 <a:solidFill>
                   <a:srgbClr val="DCE8FF"/>
@@ -5123,6 +5168,7 @@
               </a:defRPr>
             </a:lvl6pPr>
             <a:lvl7pPr>
+              <a:buNone/>
               <a:defRPr sz="1125">
                 <a:solidFill>
                   <a:srgbClr val="DCE8FF"/>
@@ -5133,6 +5179,7 @@
               </a:defRPr>
             </a:lvl7pPr>
             <a:lvl8pPr>
+              <a:buNone/>
               <a:defRPr sz="1125">
                 <a:solidFill>
                   <a:srgbClr val="DCE8FF"/>
@@ -5143,6 +5190,7 @@
               </a:defRPr>
             </a:lvl8pPr>
             <a:lvl9pPr>
+              <a:buNone/>
               <a:defRPr sz="1125">
                 <a:solidFill>
                   <a:srgbClr val="DCE8FF"/>
@@ -5155,6 +5203,7 @@
           </a:lstStyle>
           <a:p xmlns:a="http://schemas.openxmlformats.org/drawingml/2006/main">
             <a:pPr>
+              <a:buNone/>
               <a:defRPr sz="1125">
                 <a:solidFill>
                   <a:srgbClr val="DCE8FF"/>
@@ -5282,6 +5331,7 @@
               </a:defRPr>
             </a:defPPr>
             <a:lvl1pPr>
+              <a:buNone/>
               <a:defRPr sz="3225" b="1">
                 <a:solidFill>
                   <a:srgbClr val="14213D"/>
@@ -5292,6 +5342,7 @@
               </a:defRPr>
             </a:lvl1pPr>
             <a:lvl2pPr>
+              <a:buNone/>
               <a:defRPr sz="3225" b="1">
                 <a:solidFill>
                   <a:srgbClr val="14213D"/>
@@ -5302,6 +5353,7 @@
               </a:defRPr>
             </a:lvl2pPr>
             <a:lvl3pPr>
+              <a:buNone/>
               <a:defRPr sz="3225" b="1">
                 <a:solidFill>
                   <a:srgbClr val="14213D"/>
@@ -5312,6 +5364,7 @@
               </a:defRPr>
             </a:lvl3pPr>
             <a:lvl4pPr>
+              <a:buNone/>
               <a:defRPr sz="3225" b="1">
                 <a:solidFill>
                   <a:srgbClr val="14213D"/>
@@ -5322,6 +5375,7 @@
               </a:defRPr>
             </a:lvl4pPr>
             <a:lvl5pPr>
+              <a:buNone/>
               <a:defRPr sz="3225" b="1">
                 <a:solidFill>
                   <a:srgbClr val="14213D"/>
@@ -5332,6 +5386,7 @@
               </a:defRPr>
             </a:lvl5pPr>
             <a:lvl6pPr>
+              <a:buNone/>
               <a:defRPr sz="3225" b="1">
                 <a:solidFill>
                   <a:srgbClr val="14213D"/>
@@ -5342,6 +5397,7 @@
               </a:defRPr>
             </a:lvl6pPr>
             <a:lvl7pPr>
+              <a:buNone/>
               <a:defRPr sz="3225" b="1">
                 <a:solidFill>
                   <a:srgbClr val="14213D"/>
@@ -5352,6 +5408,7 @@
               </a:defRPr>
             </a:lvl7pPr>
             <a:lvl8pPr>
+              <a:buNone/>
               <a:defRPr sz="3225" b="1">
                 <a:solidFill>
                   <a:srgbClr val="14213D"/>
@@ -5362,6 +5419,7 @@
               </a:defRPr>
             </a:lvl8pPr>
             <a:lvl9pPr>
+              <a:buNone/>
               <a:defRPr sz="3225" b="1">
                 <a:solidFill>
                   <a:srgbClr val="14213D"/>
@@ -5374,6 +5432,7 @@
           </a:lstStyle>
           <a:p xmlns:a="http://schemas.openxmlformats.org/drawingml/2006/main">
             <a:pPr>
+              <a:buNone/>
               <a:defRPr sz="3225" b="1">
                 <a:solidFill>
                   <a:srgbClr val="14213D"/>
@@ -5461,7 +5520,7 @@
             <a:normAutofit fontScale="100000"/>
           </a:bodyPr>
           <a:lstStyle xmlns:a="http://schemas.openxmlformats.org/drawingml/2006/main">
-            <a:defPPr>
+            <a:defPPr algn="l">
               <a:defRPr sz="2025">
                 <a:solidFill>
                   <a:srgbClr val="52627A"/>
@@ -5471,7 +5530,8 @@
                 <a:cs typeface="Arial"/>
               </a:defRPr>
             </a:defPPr>
-            <a:lvl1pPr>
+            <a:lvl1pPr algn="l">
+              <a:buNone/>
               <a:defRPr sz="2025">
                 <a:solidFill>
                   <a:srgbClr val="52627A"/>
@@ -5481,7 +5541,8 @@
                 <a:cs typeface="Arial"/>
               </a:defRPr>
             </a:lvl1pPr>
-            <a:lvl2pPr>
+            <a:lvl2pPr algn="l">
+              <a:buNone/>
               <a:defRPr sz="2025">
                 <a:solidFill>
                   <a:srgbClr val="52627A"/>
@@ -5491,7 +5552,8 @@
                 <a:cs typeface="Arial"/>
               </a:defRPr>
             </a:lvl2pPr>
-            <a:lvl3pPr>
+            <a:lvl3pPr algn="l">
+              <a:buNone/>
               <a:defRPr sz="2025">
                 <a:solidFill>
                   <a:srgbClr val="52627A"/>
@@ -5501,7 +5563,8 @@
                 <a:cs typeface="Arial"/>
               </a:defRPr>
             </a:lvl3pPr>
-            <a:lvl4pPr>
+            <a:lvl4pPr algn="l">
+              <a:buNone/>
               <a:defRPr sz="2025">
                 <a:solidFill>
                   <a:srgbClr val="52627A"/>
@@ -5511,7 +5574,8 @@
                 <a:cs typeface="Arial"/>
               </a:defRPr>
             </a:lvl4pPr>
-            <a:lvl5pPr>
+            <a:lvl5pPr algn="l">
+              <a:buNone/>
               <a:defRPr sz="2025">
                 <a:solidFill>
                   <a:srgbClr val="52627A"/>
@@ -5521,7 +5585,8 @@
                 <a:cs typeface="Arial"/>
               </a:defRPr>
             </a:lvl5pPr>
-            <a:lvl6pPr>
+            <a:lvl6pPr algn="l">
+              <a:buNone/>
               <a:defRPr sz="2025">
                 <a:solidFill>
                   <a:srgbClr val="52627A"/>
@@ -5531,7 +5596,8 @@
                 <a:cs typeface="Arial"/>
               </a:defRPr>
             </a:lvl6pPr>
-            <a:lvl7pPr>
+            <a:lvl7pPr algn="l">
+              <a:buNone/>
               <a:defRPr sz="2025">
                 <a:solidFill>
                   <a:srgbClr val="52627A"/>
@@ -5541,7 +5607,8 @@
                 <a:cs typeface="Arial"/>
               </a:defRPr>
             </a:lvl7pPr>
-            <a:lvl8pPr>
+            <a:lvl8pPr algn="l">
+              <a:buNone/>
               <a:defRPr sz="2025">
                 <a:solidFill>
                   <a:srgbClr val="52627A"/>
@@ -5551,7 +5618,8 @@
                 <a:cs typeface="Arial"/>
               </a:defRPr>
             </a:lvl8pPr>
-            <a:lvl9pPr>
+            <a:lvl9pPr algn="l">
+              <a:buNone/>
               <a:defRPr sz="2025">
                 <a:solidFill>
                   <a:srgbClr val="52627A"/>
@@ -5563,7 +5631,7 @@
             </a:lvl9pPr>
           </a:lstStyle>
           <a:p xmlns:a="http://schemas.openxmlformats.org/drawingml/2006/main">
-            <a:pPr>
+            <a:pPr algn="l">
               <a:lnSpc>
                 <a:spcPct val="112000"/>
               </a:lnSpc>
@@ -5586,7 +5654,7 @@
                 <a:ea typeface="Arial"/>
                 <a:cs typeface="Arial"/>
               </a:rPr>
-              <a:t>Static checks pass; Android compilation and device runtime remain unverified.</a:t>
+              <a:t>Local checks pass; Android runtime remains unverified</a:t>
             </a:r>
           </a:p>
         </p:txBody>
@@ -5624,7 +5692,7 @@
             <a:normAutofit fontScale="100000"/>
           </a:bodyPr>
           <a:lstStyle xmlns:a="http://schemas.openxmlformats.org/drawingml/2006/main">
-            <a:defPPr>
+            <a:defPPr algn="l">
               <a:defRPr sz="1875">
                 <a:solidFill>
                   <a:srgbClr val="14213D"/>
@@ -5634,7 +5702,8 @@
                 <a:cs typeface="Arial"/>
               </a:defRPr>
             </a:defPPr>
-            <a:lvl1pPr>
+            <a:lvl1pPr algn="l">
+              <a:buNone/>
               <a:defRPr sz="1875">
                 <a:solidFill>
                   <a:srgbClr val="14213D"/>
@@ -5644,7 +5713,8 @@
                 <a:cs typeface="Arial"/>
               </a:defRPr>
             </a:lvl1pPr>
-            <a:lvl2pPr>
+            <a:lvl2pPr algn="l">
+              <a:buNone/>
               <a:defRPr sz="1875">
                 <a:solidFill>
                   <a:srgbClr val="14213D"/>
@@ -5654,7 +5724,8 @@
                 <a:cs typeface="Arial"/>
               </a:defRPr>
             </a:lvl2pPr>
-            <a:lvl3pPr>
+            <a:lvl3pPr algn="l">
+              <a:buNone/>
               <a:defRPr sz="1875">
                 <a:solidFill>
                   <a:srgbClr val="14213D"/>
@@ -5664,7 +5735,8 @@
                 <a:cs typeface="Arial"/>
               </a:defRPr>
             </a:lvl3pPr>
-            <a:lvl4pPr>
+            <a:lvl4pPr algn="l">
+              <a:buNone/>
               <a:defRPr sz="1875">
                 <a:solidFill>
                   <a:srgbClr val="14213D"/>
@@ -5674,7 +5746,8 @@
                 <a:cs typeface="Arial"/>
               </a:defRPr>
             </a:lvl4pPr>
-            <a:lvl5pPr>
+            <a:lvl5pPr algn="l">
+              <a:buNone/>
               <a:defRPr sz="1875">
                 <a:solidFill>
                   <a:srgbClr val="14213D"/>
@@ -5684,7 +5757,8 @@
                 <a:cs typeface="Arial"/>
               </a:defRPr>
             </a:lvl5pPr>
-            <a:lvl6pPr>
+            <a:lvl6pPr algn="l">
+              <a:buNone/>
               <a:defRPr sz="1875">
                 <a:solidFill>
                   <a:srgbClr val="14213D"/>
@@ -5694,7 +5768,8 @@
                 <a:cs typeface="Arial"/>
               </a:defRPr>
             </a:lvl6pPr>
-            <a:lvl7pPr>
+            <a:lvl7pPr algn="l">
+              <a:buNone/>
               <a:defRPr sz="1875">
                 <a:solidFill>
                   <a:srgbClr val="14213D"/>
@@ -5704,7 +5779,8 @@
                 <a:cs typeface="Arial"/>
               </a:defRPr>
             </a:lvl7pPr>
-            <a:lvl8pPr>
+            <a:lvl8pPr algn="l">
+              <a:buNone/>
               <a:defRPr sz="1875">
                 <a:solidFill>
                   <a:srgbClr val="14213D"/>
@@ -5714,7 +5790,8 @@
                 <a:cs typeface="Arial"/>
               </a:defRPr>
             </a:lvl8pPr>
-            <a:lvl9pPr>
+            <a:lvl9pPr algn="l">
+              <a:buNone/>
               <a:defRPr sz="1875">
                 <a:solidFill>
                   <a:srgbClr val="14213D"/>
@@ -5726,7 +5803,7 @@
             </a:lvl9pPr>
           </a:lstStyle>
           <a:p xmlns:a="http://schemas.openxmlformats.org/drawingml/2006/main">
-            <a:pPr>
+            <a:pPr algn="l">
               <a:lnSpc>
                 <a:spcPct val="120000"/>
               </a:lnSpc>
@@ -5749,11 +5826,11 @@
                 <a:ea typeface="Arial"/>
                 <a:cs typeface="Arial"/>
               </a:rPr>
-              <a:t>01   Dart analyzer: no issues found</a:t>
+              <a:t>01   Flutter 3.47.8 / Dart 3.13.7 / portable JDK 21</a:t>
             </a:r>
           </a:p>
           <a:p xmlns:a="http://schemas.openxmlformats.org/drawingml/2006/main">
-            <a:pPr>
+            <a:pPr algn="l">
               <a:lnSpc>
                 <a:spcPct val="120000"/>
               </a:lnSpc>
@@ -5776,11 +5853,11 @@
                 <a:ea typeface="Arial"/>
                 <a:cs typeface="Arial"/>
               </a:rPr>
-              <a:t>02   Dart formatter: 22 files, zero changes</a:t>
+              <a:t>02   Formatter and analyzer clean; 8 Flutter tests pass</a:t>
             </a:r>
           </a:p>
           <a:p xmlns:a="http://schemas.openxmlformats.org/drawingml/2006/main">
-            <a:pPr>
+            <a:pPr algn="l">
               <a:lnSpc>
                 <a:spcPct val="120000"/>
               </a:lnSpc>
@@ -5803,11 +5880,11 @@
                 <a:ea typeface="Arial"/>
                 <a:cs typeface="Arial"/>
               </a:rPr>
-              <a:t>03   Python syntax and pytest collection: pass, 25 functions</a:t>
+              <a:t>03   26 real Firestore/Storage emulator tests pass</a:t>
             </a:r>
           </a:p>
           <a:p xmlns:a="http://schemas.openxmlformats.org/drawingml/2006/main">
-            <a:pPr>
+            <a:pPr algn="l">
               <a:lnSpc>
                 <a:spcPct val="120000"/>
               </a:lnSpc>
@@ -5830,11 +5907,11 @@
                 <a:ea typeface="Arial"/>
                 <a:cs typeface="Arial"/>
               </a:rPr>
-              <a:t>04   Firebase JSON and PowerShell runner syntax: valid</a:t>
+              <a:t>04   26 ARTEMIS cases collect; npm audit: zero findings</a:t>
             </a:r>
           </a:p>
           <a:p xmlns:a="http://schemas.openxmlformats.org/drawingml/2006/main">
-            <a:pPr>
+            <a:pPr algn="l">
               <a:lnSpc>
                 <a:spcPct val="120000"/>
               </a:lnSpc>
@@ -5857,7 +5934,7 @@
                 <a:ea typeface="Arial"/>
                 <a:cs typeface="Arial"/>
               </a:rPr>
-              <a:t>05   Android build fails before compilation: Java loopback connection error</a:t>
+              <a:t>05   CI debug APK builds; device runtime still NOT RUN</a:t>
             </a:r>
           </a:p>
         </p:txBody>
@@ -5926,7 +6003,7 @@
             <a:normAutofit fontScale="100000"/>
           </a:bodyPr>
           <a:lstStyle xmlns:a="http://schemas.openxmlformats.org/drawingml/2006/main">
-            <a:defPPr>
+            <a:defPPr algn="l">
               <a:defRPr sz="1125">
                 <a:solidFill>
                   <a:srgbClr val="52627A"/>
@@ -5936,7 +6013,8 @@
                 <a:cs typeface="Arial"/>
               </a:defRPr>
             </a:defPPr>
-            <a:lvl1pPr>
+            <a:lvl1pPr algn="l">
+              <a:buNone/>
               <a:defRPr sz="1125">
                 <a:solidFill>
                   <a:srgbClr val="52627A"/>
@@ -5946,7 +6024,8 @@
                 <a:cs typeface="Arial"/>
               </a:defRPr>
             </a:lvl1pPr>
-            <a:lvl2pPr>
+            <a:lvl2pPr algn="l">
+              <a:buNone/>
               <a:defRPr sz="1125">
                 <a:solidFill>
                   <a:srgbClr val="52627A"/>
@@ -5956,7 +6035,8 @@
                 <a:cs typeface="Arial"/>
               </a:defRPr>
             </a:lvl2pPr>
-            <a:lvl3pPr>
+            <a:lvl3pPr algn="l">
+              <a:buNone/>
               <a:defRPr sz="1125">
                 <a:solidFill>
                   <a:srgbClr val="52627A"/>
@@ -5966,7 +6046,8 @@
                 <a:cs typeface="Arial"/>
               </a:defRPr>
             </a:lvl3pPr>
-            <a:lvl4pPr>
+            <a:lvl4pPr algn="l">
+              <a:buNone/>
               <a:defRPr sz="1125">
                 <a:solidFill>
                   <a:srgbClr val="52627A"/>
@@ -5976,7 +6057,8 @@
                 <a:cs typeface="Arial"/>
               </a:defRPr>
             </a:lvl4pPr>
-            <a:lvl5pPr>
+            <a:lvl5pPr algn="l">
+              <a:buNone/>
               <a:defRPr sz="1125">
                 <a:solidFill>
                   <a:srgbClr val="52627A"/>
@@ -5986,7 +6068,8 @@
                 <a:cs typeface="Arial"/>
               </a:defRPr>
             </a:lvl5pPr>
-            <a:lvl6pPr>
+            <a:lvl6pPr algn="l">
+              <a:buNone/>
               <a:defRPr sz="1125">
                 <a:solidFill>
                   <a:srgbClr val="52627A"/>
@@ -5996,7 +6079,8 @@
                 <a:cs typeface="Arial"/>
               </a:defRPr>
             </a:lvl6pPr>
-            <a:lvl7pPr>
+            <a:lvl7pPr algn="l">
+              <a:buNone/>
               <a:defRPr sz="1125">
                 <a:solidFill>
                   <a:srgbClr val="52627A"/>
@@ -6006,7 +6090,8 @@
                 <a:cs typeface="Arial"/>
               </a:defRPr>
             </a:lvl7pPr>
-            <a:lvl8pPr>
+            <a:lvl8pPr algn="l">
+              <a:buNone/>
               <a:defRPr sz="1125">
                 <a:solidFill>
                   <a:srgbClr val="52627A"/>
@@ -6016,7 +6101,8 @@
                 <a:cs typeface="Arial"/>
               </a:defRPr>
             </a:lvl8pPr>
-            <a:lvl9pPr>
+            <a:lvl9pPr algn="l">
+              <a:buNone/>
               <a:defRPr sz="1125">
                 <a:solidFill>
                   <a:srgbClr val="52627A"/>
@@ -6028,7 +6114,8 @@
             </a:lvl9pPr>
           </a:lstStyle>
           <a:p xmlns:a="http://schemas.openxmlformats.org/drawingml/2006/main">
-            <a:pPr>
+            <a:pPr algn="l">
+              <a:buNone/>
               <a:defRPr sz="1125">
                 <a:solidFill>
                   <a:srgbClr val="52627A"/>
@@ -6047,7 +6134,7 @@
                 <a:ea typeface="Arial"/>
                 <a:cs typeface="Arial"/>
               </a:rPr>
-              <a:t>Checks run 2026-10-26 | No mobile scenario executed</a:t>
+              <a:t>2026-10-30 | evidence/corrective/ | No runtime screenshots</a:t>
             </a:r>
           </a:p>
         </p:txBody>
@@ -6096,6 +6183,7 @@
               </a:defRPr>
             </a:defPPr>
             <a:lvl1pPr algn="r">
+              <a:buNone/>
               <a:defRPr sz="1125" b="1">
                 <a:solidFill>
                   <a:srgbClr val="162CD4"/>
@@ -6106,6 +6194,7 @@
               </a:defRPr>
             </a:lvl1pPr>
             <a:lvl2pPr algn="r">
+              <a:buNone/>
               <a:defRPr sz="1125" b="1">
                 <a:solidFill>
                   <a:srgbClr val="162CD4"/>
@@ -6116,6 +6205,7 @@
               </a:defRPr>
             </a:lvl2pPr>
             <a:lvl3pPr algn="r">
+              <a:buNone/>
               <a:defRPr sz="1125" b="1">
                 <a:solidFill>
                   <a:srgbClr val="162CD4"/>
@@ -6126,6 +6216,7 @@
               </a:defRPr>
             </a:lvl3pPr>
             <a:lvl4pPr algn="r">
+              <a:buNone/>
               <a:defRPr sz="1125" b="1">
                 <a:solidFill>
                   <a:srgbClr val="162CD4"/>
@@ -6136,6 +6227,7 @@
               </a:defRPr>
             </a:lvl4pPr>
             <a:lvl5pPr algn="r">
+              <a:buNone/>
               <a:defRPr sz="1125" b="1">
                 <a:solidFill>
                   <a:srgbClr val="162CD4"/>
@@ -6146,6 +6238,7 @@
               </a:defRPr>
             </a:lvl5pPr>
             <a:lvl6pPr algn="r">
+              <a:buNone/>
               <a:defRPr sz="1125" b="1">
                 <a:solidFill>
                   <a:srgbClr val="162CD4"/>
@@ -6156,6 +6249,7 @@
               </a:defRPr>
             </a:lvl6pPr>
             <a:lvl7pPr algn="r">
+              <a:buNone/>
               <a:defRPr sz="1125" b="1">
                 <a:solidFill>
                   <a:srgbClr val="162CD4"/>
@@ -6166,6 +6260,7 @@
               </a:defRPr>
             </a:lvl7pPr>
             <a:lvl8pPr algn="r">
+              <a:buNone/>
               <a:defRPr sz="1125" b="1">
                 <a:solidFill>
                   <a:srgbClr val="162CD4"/>
@@ -6176,6 +6271,7 @@
               </a:defRPr>
             </a:lvl8pPr>
             <a:lvl9pPr algn="r">
+              <a:buNone/>
               <a:defRPr sz="1125" b="1">
                 <a:solidFill>
                   <a:srgbClr val="162CD4"/>
@@ -6188,6 +6284,7 @@
           </a:lstStyle>
           <a:p xmlns:a="http://schemas.openxmlformats.org/drawingml/2006/main">
             <a:pPr algn="r">
+              <a:buNone/>
               <a:defRPr sz="1125" b="1">
                 <a:solidFill>
                   <a:srgbClr val="162CD4"/>
@@ -6315,6 +6412,7 @@
               </a:defRPr>
             </a:defPPr>
             <a:lvl1pPr>
+              <a:buNone/>
               <a:defRPr sz="3225" b="1">
                 <a:solidFill>
                   <a:srgbClr val="14213D"/>
@@ -6325,6 +6423,7 @@
               </a:defRPr>
             </a:lvl1pPr>
             <a:lvl2pPr>
+              <a:buNone/>
               <a:defRPr sz="3225" b="1">
                 <a:solidFill>
                   <a:srgbClr val="14213D"/>
@@ -6335,6 +6434,7 @@
               </a:defRPr>
             </a:lvl2pPr>
             <a:lvl3pPr>
+              <a:buNone/>
               <a:defRPr sz="3225" b="1">
                 <a:solidFill>
                   <a:srgbClr val="14213D"/>
@@ -6345,6 +6445,7 @@
               </a:defRPr>
             </a:lvl3pPr>
             <a:lvl4pPr>
+              <a:buNone/>
               <a:defRPr sz="3225" b="1">
                 <a:solidFill>
                   <a:srgbClr val="14213D"/>
@@ -6355,6 +6456,7 @@
               </a:defRPr>
             </a:lvl4pPr>
             <a:lvl5pPr>
+              <a:buNone/>
               <a:defRPr sz="3225" b="1">
                 <a:solidFill>
                   <a:srgbClr val="14213D"/>
@@ -6365,6 +6467,7 @@
               </a:defRPr>
             </a:lvl5pPr>
             <a:lvl6pPr>
+              <a:buNone/>
               <a:defRPr sz="3225" b="1">
                 <a:solidFill>
                   <a:srgbClr val="14213D"/>
@@ -6375,6 +6478,7 @@
               </a:defRPr>
             </a:lvl6pPr>
             <a:lvl7pPr>
+              <a:buNone/>
               <a:defRPr sz="3225" b="1">
                 <a:solidFill>
                   <a:srgbClr val="14213D"/>
@@ -6385,6 +6489,7 @@
               </a:defRPr>
             </a:lvl7pPr>
             <a:lvl8pPr>
+              <a:buNone/>
               <a:defRPr sz="3225" b="1">
                 <a:solidFill>
                   <a:srgbClr val="14213D"/>
@@ -6395,6 +6500,7 @@
               </a:defRPr>
             </a:lvl8pPr>
             <a:lvl9pPr>
+              <a:buNone/>
               <a:defRPr sz="3225" b="1">
                 <a:solidFill>
                   <a:srgbClr val="14213D"/>
@@ -6407,6 +6513,7 @@
           </a:lstStyle>
           <a:p xmlns:a="http://schemas.openxmlformats.org/drawingml/2006/main">
             <a:pPr>
+              <a:buNone/>
               <a:defRPr sz="3225" b="1">
                 <a:solidFill>
                   <a:srgbClr val="14213D"/>
@@ -6494,7 +6601,7 @@
             <a:normAutofit fontScale="100000"/>
           </a:bodyPr>
           <a:lstStyle xmlns:a="http://schemas.openxmlformats.org/drawingml/2006/main">
-            <a:defPPr>
+            <a:defPPr algn="l">
               <a:defRPr sz="2025">
                 <a:solidFill>
                   <a:srgbClr val="52627A"/>
@@ -6504,7 +6611,8 @@
                 <a:cs typeface="Arial"/>
               </a:defRPr>
             </a:defPPr>
-            <a:lvl1pPr>
+            <a:lvl1pPr algn="l">
+              <a:buNone/>
               <a:defRPr sz="2025">
                 <a:solidFill>
                   <a:srgbClr val="52627A"/>
@@ -6514,7 +6622,8 @@
                 <a:cs typeface="Arial"/>
               </a:defRPr>
             </a:lvl1pPr>
-            <a:lvl2pPr>
+            <a:lvl2pPr algn="l">
+              <a:buNone/>
               <a:defRPr sz="2025">
                 <a:solidFill>
                   <a:srgbClr val="52627A"/>
@@ -6524,7 +6633,8 @@
                 <a:cs typeface="Arial"/>
               </a:defRPr>
             </a:lvl2pPr>
-            <a:lvl3pPr>
+            <a:lvl3pPr algn="l">
+              <a:buNone/>
               <a:defRPr sz="2025">
                 <a:solidFill>
                   <a:srgbClr val="52627A"/>
@@ -6534,7 +6644,8 @@
                 <a:cs typeface="Arial"/>
               </a:defRPr>
             </a:lvl3pPr>
-            <a:lvl4pPr>
+            <a:lvl4pPr algn="l">
+              <a:buNone/>
               <a:defRPr sz="2025">
                 <a:solidFill>
                   <a:srgbClr val="52627A"/>
@@ -6544,7 +6655,8 @@
                 <a:cs typeface="Arial"/>
               </a:defRPr>
             </a:lvl4pPr>
-            <a:lvl5pPr>
+            <a:lvl5pPr algn="l">
+              <a:buNone/>
               <a:defRPr sz="2025">
                 <a:solidFill>
                   <a:srgbClr val="52627A"/>
@@ -6554,7 +6666,8 @@
                 <a:cs typeface="Arial"/>
               </a:defRPr>
             </a:lvl5pPr>
-            <a:lvl6pPr>
+            <a:lvl6pPr algn="l">
+              <a:buNone/>
               <a:defRPr sz="2025">
                 <a:solidFill>
                   <a:srgbClr val="52627A"/>
@@ -6564,7 +6677,8 @@
                 <a:cs typeface="Arial"/>
               </a:defRPr>
             </a:lvl6pPr>
-            <a:lvl7pPr>
+            <a:lvl7pPr algn="l">
+              <a:buNone/>
               <a:defRPr sz="2025">
                 <a:solidFill>
                   <a:srgbClr val="52627A"/>
@@ -6574,7 +6688,8 @@
                 <a:cs typeface="Arial"/>
               </a:defRPr>
             </a:lvl7pPr>
-            <a:lvl8pPr>
+            <a:lvl8pPr algn="l">
+              <a:buNone/>
               <a:defRPr sz="2025">
                 <a:solidFill>
                   <a:srgbClr val="52627A"/>
@@ -6584,7 +6699,8 @@
                 <a:cs typeface="Arial"/>
               </a:defRPr>
             </a:lvl8pPr>
-            <a:lvl9pPr>
+            <a:lvl9pPr algn="l">
+              <a:buNone/>
               <a:defRPr sz="2025">
                 <a:solidFill>
                   <a:srgbClr val="52627A"/>
@@ -6596,7 +6712,7 @@
             </a:lvl9pPr>
           </a:lstStyle>
           <a:p xmlns:a="http://schemas.openxmlformats.org/drawingml/2006/main">
-            <a:pPr>
+            <a:pPr algn="l">
               <a:lnSpc>
                 <a:spcPct val="112000"/>
               </a:lnSpc>
@@ -6619,7 +6735,7 @@
                 <a:ea typeface="Arial"/>
                 <a:cs typeface="Arial"/>
               </a:rPr>
-              <a:t>Six local findings are documented with requirement-based decisions.</a:t>
+              <a:t>Corrective findings have commit and regression-test traceability</a:t>
             </a:r>
           </a:p>
         </p:txBody>
@@ -6657,7 +6773,7 @@
             <a:normAutofit fontScale="100000"/>
           </a:bodyPr>
           <a:lstStyle xmlns:a="http://schemas.openxmlformats.org/drawingml/2006/main">
-            <a:defPPr>
+            <a:defPPr algn="l">
               <a:defRPr sz="1875">
                 <a:solidFill>
                   <a:srgbClr val="14213D"/>
@@ -6667,7 +6783,8 @@
                 <a:cs typeface="Arial"/>
               </a:defRPr>
             </a:defPPr>
-            <a:lvl1pPr>
+            <a:lvl1pPr algn="l">
+              <a:buNone/>
               <a:defRPr sz="1875">
                 <a:solidFill>
                   <a:srgbClr val="14213D"/>
@@ -6677,7 +6794,8 @@
                 <a:cs typeface="Arial"/>
               </a:defRPr>
             </a:lvl1pPr>
-            <a:lvl2pPr>
+            <a:lvl2pPr algn="l">
+              <a:buNone/>
               <a:defRPr sz="1875">
                 <a:solidFill>
                   <a:srgbClr val="14213D"/>
@@ -6687,7 +6805,8 @@
                 <a:cs typeface="Arial"/>
               </a:defRPr>
             </a:lvl2pPr>
-            <a:lvl3pPr>
+            <a:lvl3pPr algn="l">
+              <a:buNone/>
               <a:defRPr sz="1875">
                 <a:solidFill>
                   <a:srgbClr val="14213D"/>
@@ -6697,7 +6816,8 @@
                 <a:cs typeface="Arial"/>
               </a:defRPr>
             </a:lvl3pPr>
-            <a:lvl4pPr>
+            <a:lvl4pPr algn="l">
+              <a:buNone/>
               <a:defRPr sz="1875">
                 <a:solidFill>
                   <a:srgbClr val="14213D"/>
@@ -6707,7 +6827,8 @@
                 <a:cs typeface="Arial"/>
               </a:defRPr>
             </a:lvl4pPr>
-            <a:lvl5pPr>
+            <a:lvl5pPr algn="l">
+              <a:buNone/>
               <a:defRPr sz="1875">
                 <a:solidFill>
                   <a:srgbClr val="14213D"/>
@@ -6717,7 +6838,8 @@
                 <a:cs typeface="Arial"/>
               </a:defRPr>
             </a:lvl5pPr>
-            <a:lvl6pPr>
+            <a:lvl6pPr algn="l">
+              <a:buNone/>
               <a:defRPr sz="1875">
                 <a:solidFill>
                   <a:srgbClr val="14213D"/>
@@ -6727,7 +6849,8 @@
                 <a:cs typeface="Arial"/>
               </a:defRPr>
             </a:lvl6pPr>
-            <a:lvl7pPr>
+            <a:lvl7pPr algn="l">
+              <a:buNone/>
               <a:defRPr sz="1875">
                 <a:solidFill>
                   <a:srgbClr val="14213D"/>
@@ -6737,7 +6860,8 @@
                 <a:cs typeface="Arial"/>
               </a:defRPr>
             </a:lvl7pPr>
-            <a:lvl8pPr>
+            <a:lvl8pPr algn="l">
+              <a:buNone/>
               <a:defRPr sz="1875">
                 <a:solidFill>
                   <a:srgbClr val="14213D"/>
@@ -6747,7 +6871,8 @@
                 <a:cs typeface="Arial"/>
               </a:defRPr>
             </a:lvl8pPr>
-            <a:lvl9pPr>
+            <a:lvl9pPr algn="l">
+              <a:buNone/>
               <a:defRPr sz="1875">
                 <a:solidFill>
                   <a:srgbClr val="14213D"/>
@@ -6759,7 +6884,7 @@
             </a:lvl9pPr>
           </a:lstStyle>
           <a:p xmlns:a="http://schemas.openxmlformats.org/drawingml/2006/main">
-            <a:pPr>
+            <a:pPr algn="l">
               <a:lnSpc>
                 <a:spcPct val="120000"/>
               </a:lnSpc>
@@ -6782,11 +6907,11 @@
                 <a:ea typeface="Arial"/>
                 <a:cs typeface="Arial"/>
               </a:rPr>
-              <a:t>01   Accepted: parent adjustment no longer writes server-owned chat status</a:t>
+              <a:t>01   P1 inbox UID/recipient isolation: da73da3</a:t>
             </a:r>
           </a:p>
           <a:p xmlns:a="http://schemas.openxmlformats.org/drawingml/2006/main">
-            <a:pPr>
+            <a:pPr algn="l">
               <a:lnSpc>
                 <a:spcPct val="120000"/>
               </a:lnSpc>
@@ -6809,11 +6934,11 @@
                 <a:ea typeface="Arial"/>
                 <a:cs typeface="Arial"/>
               </a:rPr>
-              <a:t>02   Accepted: validate AI output and active tutor IDs</a:t>
+              <a:t>02   P2 interrupted registration recovery: 1bc63f6</a:t>
             </a:r>
           </a:p>
           <a:p xmlns:a="http://schemas.openxmlformats.org/drawingml/2006/main">
-            <a:pPr>
+            <a:pPr algn="l">
               <a:lnSpc>
                 <a:spcPct val="120000"/>
               </a:lnSpc>
@@ -6836,11 +6961,11 @@
                 <a:ea typeface="Arial"/>
                 <a:cs typeface="Arial"/>
               </a:rPr>
-              <a:t>03   Accepted: detach FCM registration before signing out</a:t>
+              <a:t>03   Proposal ownership/current-state rules: b8f97c4</a:t>
             </a:r>
           </a:p>
           <a:p xmlns:a="http://schemas.openxmlformats.org/drawingml/2006/main">
-            <a:pPr>
+            <a:pPr algn="l">
               <a:lnSpc>
                 <a:spcPct val="120000"/>
               </a:lnSpc>
@@ -6863,11 +6988,11 @@
                 <a:ea typeface="Arial"/>
                 <a:cs typeface="Arial"/>
               </a:rPr>
-              <a:t>04   Documented: tutor catalog query cap of 100</a:t>
+              <a:t>04   Atomic role/link isolation and 26 emulator tests</a:t>
             </a:r>
           </a:p>
           <a:p xmlns:a="http://schemas.openxmlformats.org/drawingml/2006/main">
-            <a:pPr>
+            <a:pPr algn="l">
               <a:lnSpc>
                 <a:spcPct val="120000"/>
               </a:lnSpc>
@@ -6890,7 +7015,7 @@
                 <a:ea typeface="Arial"/>
                 <a:cs typeface="Arial"/>
               </a:rPr>
-              <a:t>05   Deferred: guest quota contract and backend chat activity projection</a:t>
+              <a:t>05   CI and honest E2E evidence states: 114d682</a:t>
             </a:r>
           </a:p>
         </p:txBody>
@@ -6959,7 +7084,7 @@
             <a:normAutofit fontScale="100000"/>
           </a:bodyPr>
           <a:lstStyle xmlns:a="http://schemas.openxmlformats.org/drawingml/2006/main">
-            <a:defPPr>
+            <a:defPPr algn="l">
               <a:defRPr sz="1125">
                 <a:solidFill>
                   <a:srgbClr val="52627A"/>
@@ -6969,7 +7094,8 @@
                 <a:cs typeface="Arial"/>
               </a:defRPr>
             </a:defPPr>
-            <a:lvl1pPr>
+            <a:lvl1pPr algn="l">
+              <a:buNone/>
               <a:defRPr sz="1125">
                 <a:solidFill>
                   <a:srgbClr val="52627A"/>
@@ -6979,7 +7105,8 @@
                 <a:cs typeface="Arial"/>
               </a:defRPr>
             </a:lvl1pPr>
-            <a:lvl2pPr>
+            <a:lvl2pPr algn="l">
+              <a:buNone/>
               <a:defRPr sz="1125">
                 <a:solidFill>
                   <a:srgbClr val="52627A"/>
@@ -6989,7 +7116,8 @@
                 <a:cs typeface="Arial"/>
               </a:defRPr>
             </a:lvl2pPr>
-            <a:lvl3pPr>
+            <a:lvl3pPr algn="l">
+              <a:buNone/>
               <a:defRPr sz="1125">
                 <a:solidFill>
                   <a:srgbClr val="52627A"/>
@@ -6999,7 +7127,8 @@
                 <a:cs typeface="Arial"/>
               </a:defRPr>
             </a:lvl3pPr>
-            <a:lvl4pPr>
+            <a:lvl4pPr algn="l">
+              <a:buNone/>
               <a:defRPr sz="1125">
                 <a:solidFill>
                   <a:srgbClr val="52627A"/>
@@ -7009,7 +7138,8 @@
                 <a:cs typeface="Arial"/>
               </a:defRPr>
             </a:lvl4pPr>
-            <a:lvl5pPr>
+            <a:lvl5pPr algn="l">
+              <a:buNone/>
               <a:defRPr sz="1125">
                 <a:solidFill>
                   <a:srgbClr val="52627A"/>
@@ -7019,7 +7149,8 @@
                 <a:cs typeface="Arial"/>
               </a:defRPr>
             </a:lvl5pPr>
-            <a:lvl6pPr>
+            <a:lvl6pPr algn="l">
+              <a:buNone/>
               <a:defRPr sz="1125">
                 <a:solidFill>
                   <a:srgbClr val="52627A"/>
@@ -7029,7 +7160,8 @@
                 <a:cs typeface="Arial"/>
               </a:defRPr>
             </a:lvl6pPr>
-            <a:lvl7pPr>
+            <a:lvl7pPr algn="l">
+              <a:buNone/>
               <a:defRPr sz="1125">
                 <a:solidFill>
                   <a:srgbClr val="52627A"/>
@@ -7039,7 +7171,8 @@
                 <a:cs typeface="Arial"/>
               </a:defRPr>
             </a:lvl7pPr>
-            <a:lvl8pPr>
+            <a:lvl8pPr algn="l">
+              <a:buNone/>
               <a:defRPr sz="1125">
                 <a:solidFill>
                   <a:srgbClr val="52627A"/>
@@ -7049,7 +7182,8 @@
                 <a:cs typeface="Arial"/>
               </a:defRPr>
             </a:lvl8pPr>
-            <a:lvl9pPr>
+            <a:lvl9pPr algn="l">
+              <a:buNone/>
               <a:defRPr sz="1125">
                 <a:solidFill>
                   <a:srgbClr val="52627A"/>
@@ -7061,7 +7195,8 @@
             </a:lvl9pPr>
           </a:lstStyle>
           <a:p xmlns:a="http://schemas.openxmlformats.org/drawingml/2006/main">
-            <a:pPr>
+            <a:pPr algn="l">
+              <a:buNone/>
               <a:defRPr sz="1125">
                 <a:solidFill>
                   <a:srgbClr val="52627A"/>
@@ -7080,7 +7215,7 @@
                 <a:ea typeface="Arial"/>
                 <a:cs typeface="Arial"/>
               </a:rPr>
-              <a:t>docs/code-review.md | Local Codex review, not hosted PR approval</a:t>
+              <a:t>Internal Codex review | EXTERNAL_REVIEW_NOT_AVAILABLE</a:t>
             </a:r>
           </a:p>
         </p:txBody>
@@ -7129,6 +7264,7 @@
               </a:defRPr>
             </a:defPPr>
             <a:lvl1pPr algn="r">
+              <a:buNone/>
               <a:defRPr sz="1125" b="1">
                 <a:solidFill>
                   <a:srgbClr val="162CD4"/>
@@ -7139,6 +7275,7 @@
               </a:defRPr>
             </a:lvl1pPr>
             <a:lvl2pPr algn="r">
+              <a:buNone/>
               <a:defRPr sz="1125" b="1">
                 <a:solidFill>
                   <a:srgbClr val="162CD4"/>
@@ -7149,6 +7286,7 @@
               </a:defRPr>
             </a:lvl2pPr>
             <a:lvl3pPr algn="r">
+              <a:buNone/>
               <a:defRPr sz="1125" b="1">
                 <a:solidFill>
                   <a:srgbClr val="162CD4"/>
@@ -7159,6 +7297,7 @@
               </a:defRPr>
             </a:lvl3pPr>
             <a:lvl4pPr algn="r">
+              <a:buNone/>
               <a:defRPr sz="1125" b="1">
                 <a:solidFill>
                   <a:srgbClr val="162CD4"/>
@@ -7169,6 +7308,7 @@
               </a:defRPr>
             </a:lvl4pPr>
             <a:lvl5pPr algn="r">
+              <a:buNone/>
               <a:defRPr sz="1125" b="1">
                 <a:solidFill>
                   <a:srgbClr val="162CD4"/>
@@ -7179,6 +7319,7 @@
               </a:defRPr>
             </a:lvl5pPr>
             <a:lvl6pPr algn="r">
+              <a:buNone/>
               <a:defRPr sz="1125" b="1">
                 <a:solidFill>
                   <a:srgbClr val="162CD4"/>
@@ -7189,6 +7330,7 @@
               </a:defRPr>
             </a:lvl6pPr>
             <a:lvl7pPr algn="r">
+              <a:buNone/>
               <a:defRPr sz="1125" b="1">
                 <a:solidFill>
                   <a:srgbClr val="162CD4"/>
@@ -7199,6 +7341,7 @@
               </a:defRPr>
             </a:lvl7pPr>
             <a:lvl8pPr algn="r">
+              <a:buNone/>
               <a:defRPr sz="1125" b="1">
                 <a:solidFill>
                   <a:srgbClr val="162CD4"/>
@@ -7209,6 +7352,7 @@
               </a:defRPr>
             </a:lvl8pPr>
             <a:lvl9pPr algn="r">
+              <a:buNone/>
               <a:defRPr sz="1125" b="1">
                 <a:solidFill>
                   <a:srgbClr val="162CD4"/>
@@ -7221,6 +7365,7 @@
           </a:lstStyle>
           <a:p xmlns:a="http://schemas.openxmlformats.org/drawingml/2006/main">
             <a:pPr algn="r">
+              <a:buNone/>
               <a:defRPr sz="1125" b="1">
                 <a:solidFill>
                   <a:srgbClr val="162CD4"/>
@@ -7348,6 +7493,7 @@
               </a:defRPr>
             </a:defPPr>
             <a:lvl1pPr>
+              <a:buNone/>
               <a:defRPr sz="3225" b="1">
                 <a:solidFill>
                   <a:srgbClr val="14213D"/>
@@ -7358,6 +7504,7 @@
               </a:defRPr>
             </a:lvl1pPr>
             <a:lvl2pPr>
+              <a:buNone/>
               <a:defRPr sz="3225" b="1">
                 <a:solidFill>
                   <a:srgbClr val="14213D"/>
@@ -7368,6 +7515,7 @@
               </a:defRPr>
             </a:lvl2pPr>
             <a:lvl3pPr>
+              <a:buNone/>
               <a:defRPr sz="3225" b="1">
                 <a:solidFill>
                   <a:srgbClr val="14213D"/>
@@ -7378,6 +7526,7 @@
               </a:defRPr>
             </a:lvl3pPr>
             <a:lvl4pPr>
+              <a:buNone/>
               <a:defRPr sz="3225" b="1">
                 <a:solidFill>
                   <a:srgbClr val="14213D"/>
@@ -7388,6 +7537,7 @@
               </a:defRPr>
             </a:lvl4pPr>
             <a:lvl5pPr>
+              <a:buNone/>
               <a:defRPr sz="3225" b="1">
                 <a:solidFill>
                   <a:srgbClr val="14213D"/>
@@ -7398,6 +7548,7 @@
               </a:defRPr>
             </a:lvl5pPr>
             <a:lvl6pPr>
+              <a:buNone/>
               <a:defRPr sz="3225" b="1">
                 <a:solidFill>
                   <a:srgbClr val="14213D"/>
@@ -7408,6 +7559,7 @@
               </a:defRPr>
             </a:lvl6pPr>
             <a:lvl7pPr>
+              <a:buNone/>
               <a:defRPr sz="3225" b="1">
                 <a:solidFill>
                   <a:srgbClr val="14213D"/>
@@ -7418,6 +7570,7 @@
               </a:defRPr>
             </a:lvl7pPr>
             <a:lvl8pPr>
+              <a:buNone/>
               <a:defRPr sz="3225" b="1">
                 <a:solidFill>
                   <a:srgbClr val="14213D"/>
@@ -7428,6 +7581,7 @@
               </a:defRPr>
             </a:lvl8pPr>
             <a:lvl9pPr>
+              <a:buNone/>
               <a:defRPr sz="3225" b="1">
                 <a:solidFill>
                   <a:srgbClr val="14213D"/>
@@ -7440,6 +7594,7 @@
           </a:lstStyle>
           <a:p xmlns:a="http://schemas.openxmlformats.org/drawingml/2006/main">
             <a:pPr>
+              <a:buNone/>
               <a:defRPr sz="3225" b="1">
                 <a:solidFill>
                   <a:srgbClr val="14213D"/>
@@ -7538,6 +7693,7 @@
               </a:defRPr>
             </a:defPPr>
             <a:lvl1pPr>
+              <a:buNone/>
               <a:defRPr sz="2025">
                 <a:solidFill>
                   <a:srgbClr val="52627A"/>
@@ -7548,6 +7704,7 @@
               </a:defRPr>
             </a:lvl1pPr>
             <a:lvl2pPr>
+              <a:buNone/>
               <a:defRPr sz="2025">
                 <a:solidFill>
                   <a:srgbClr val="52627A"/>
@@ -7558,6 +7715,7 @@
               </a:defRPr>
             </a:lvl2pPr>
             <a:lvl3pPr>
+              <a:buNone/>
               <a:defRPr sz="2025">
                 <a:solidFill>
                   <a:srgbClr val="52627A"/>
@@ -7568,6 +7726,7 @@
               </a:defRPr>
             </a:lvl3pPr>
             <a:lvl4pPr>
+              <a:buNone/>
               <a:defRPr sz="2025">
                 <a:solidFill>
                   <a:srgbClr val="52627A"/>
@@ -7578,6 +7737,7 @@
               </a:defRPr>
             </a:lvl4pPr>
             <a:lvl5pPr>
+              <a:buNone/>
               <a:defRPr sz="2025">
                 <a:solidFill>
                   <a:srgbClr val="52627A"/>
@@ -7588,6 +7748,7 @@
               </a:defRPr>
             </a:lvl5pPr>
             <a:lvl6pPr>
+              <a:buNone/>
               <a:defRPr sz="2025">
                 <a:solidFill>
                   <a:srgbClr val="52627A"/>
@@ -7598,6 +7759,7 @@
               </a:defRPr>
             </a:lvl6pPr>
             <a:lvl7pPr>
+              <a:buNone/>
               <a:defRPr sz="2025">
                 <a:solidFill>
                   <a:srgbClr val="52627A"/>
@@ -7608,6 +7770,7 @@
               </a:defRPr>
             </a:lvl7pPr>
             <a:lvl8pPr>
+              <a:buNone/>
               <a:defRPr sz="2025">
                 <a:solidFill>
                   <a:srgbClr val="52627A"/>
@@ -7618,6 +7781,7 @@
               </a:defRPr>
             </a:lvl8pPr>
             <a:lvl9pPr>
+              <a:buNone/>
               <a:defRPr sz="2025">
                 <a:solidFill>
                   <a:srgbClr val="52627A"/>
@@ -7690,7 +7854,7 @@
             <a:normAutofit fontScale="100000"/>
           </a:bodyPr>
           <a:lstStyle xmlns:a="http://schemas.openxmlformats.org/drawingml/2006/main">
-            <a:defPPr>
+            <a:defPPr algn="l">
               <a:defRPr sz="1875">
                 <a:solidFill>
                   <a:srgbClr val="14213D"/>
@@ -7700,7 +7864,8 @@
                 <a:cs typeface="Arial"/>
               </a:defRPr>
             </a:defPPr>
-            <a:lvl1pPr>
+            <a:lvl1pPr algn="l">
+              <a:buNone/>
               <a:defRPr sz="1875">
                 <a:solidFill>
                   <a:srgbClr val="14213D"/>
@@ -7710,7 +7875,8 @@
                 <a:cs typeface="Arial"/>
               </a:defRPr>
             </a:lvl1pPr>
-            <a:lvl2pPr>
+            <a:lvl2pPr algn="l">
+              <a:buNone/>
               <a:defRPr sz="1875">
                 <a:solidFill>
                   <a:srgbClr val="14213D"/>
@@ -7720,7 +7886,8 @@
                 <a:cs typeface="Arial"/>
               </a:defRPr>
             </a:lvl2pPr>
-            <a:lvl3pPr>
+            <a:lvl3pPr algn="l">
+              <a:buNone/>
               <a:defRPr sz="1875">
                 <a:solidFill>
                   <a:srgbClr val="14213D"/>
@@ -7730,7 +7897,8 @@
                 <a:cs typeface="Arial"/>
               </a:defRPr>
             </a:lvl3pPr>
-            <a:lvl4pPr>
+            <a:lvl4pPr algn="l">
+              <a:buNone/>
               <a:defRPr sz="1875">
                 <a:solidFill>
                   <a:srgbClr val="14213D"/>
@@ -7740,7 +7908,8 @@
                 <a:cs typeface="Arial"/>
               </a:defRPr>
             </a:lvl4pPr>
-            <a:lvl5pPr>
+            <a:lvl5pPr algn="l">
+              <a:buNone/>
               <a:defRPr sz="1875">
                 <a:solidFill>
                   <a:srgbClr val="14213D"/>
@@ -7750,7 +7919,8 @@
                 <a:cs typeface="Arial"/>
               </a:defRPr>
             </a:lvl5pPr>
-            <a:lvl6pPr>
+            <a:lvl6pPr algn="l">
+              <a:buNone/>
               <a:defRPr sz="1875">
                 <a:solidFill>
                   <a:srgbClr val="14213D"/>
@@ -7760,7 +7930,8 @@
                 <a:cs typeface="Arial"/>
               </a:defRPr>
             </a:lvl6pPr>
-            <a:lvl7pPr>
+            <a:lvl7pPr algn="l">
+              <a:buNone/>
               <a:defRPr sz="1875">
                 <a:solidFill>
                   <a:srgbClr val="14213D"/>
@@ -7770,7 +7941,8 @@
                 <a:cs typeface="Arial"/>
               </a:defRPr>
             </a:lvl7pPr>
-            <a:lvl8pPr>
+            <a:lvl8pPr algn="l">
+              <a:buNone/>
               <a:defRPr sz="1875">
                 <a:solidFill>
                   <a:srgbClr val="14213D"/>
@@ -7780,7 +7952,8 @@
                 <a:cs typeface="Arial"/>
               </a:defRPr>
             </a:lvl8pPr>
-            <a:lvl9pPr>
+            <a:lvl9pPr algn="l">
+              <a:buNone/>
               <a:defRPr sz="1875">
                 <a:solidFill>
                   <a:srgbClr val="14213D"/>
@@ -7792,7 +7965,7 @@
             </a:lvl9pPr>
           </a:lstStyle>
           <a:p xmlns:a="http://schemas.openxmlformats.org/drawingml/2006/main">
-            <a:pPr>
+            <a:pPr algn="l">
               <a:lnSpc>
                 <a:spcPct val="120000"/>
               </a:lnSpc>
@@ -7815,11 +7988,11 @@
                 <a:ea typeface="Arial"/>
                 <a:cs typeface="Arial"/>
               </a:rPr>
-              <a:t>01   Successful APK build and screenshots at 360dp and 412dp</a:t>
+              <a:t>01   APK runtime and authentic 360dp/412dp captures</a:t>
             </a:r>
           </a:p>
           <a:p xmlns:a="http://schemas.openxmlformats.org/drawingml/2006/main">
-            <a:pPr>
+            <a:pPr algn="l">
               <a:lnSpc>
                 <a:spcPct val="120000"/>
               </a:lnSpc>
@@ -7842,11 +8015,11 @@
                 <a:ea typeface="Arial"/>
                 <a:cs typeface="Arial"/>
               </a:rPr>
-              <a:t>02   Firebase project, OAuth, active tutor records and safe test account</a:t>
+              <a:t>02   Authorized Firebase test resources and provider setup</a:t>
             </a:r>
           </a:p>
           <a:p xmlns:a="http://schemas.openxmlformats.org/drawingml/2006/main">
-            <a:pPr>
+            <a:pPr algn="l">
               <a:lnSpc>
                 <a:spcPct val="120000"/>
               </a:lnSpc>
@@ -7869,11 +8042,11 @@
                 <a:ea typeface="Arial"/>
                 <a:cs typeface="Arial"/>
               </a:rPr>
-              <a:t>03   Trusted staging backend for consultant, invoice and schedule cases</a:t>
+              <a:t>03   Trusted consultant, invoice and payment backend</a:t>
             </a:r>
           </a:p>
           <a:p xmlns:a="http://schemas.openxmlformats.org/drawingml/2006/main">
-            <a:pPr>
+            <a:pPr algn="l">
               <a:lnSpc>
                 <a:spcPct val="120000"/>
               </a:lnSpc>
@@ -7896,11 +8069,11 @@
                 <a:ea typeface="Arial"/>
                 <a:cs typeface="Arial"/>
               </a:rPr>
-              <a:t>04   ARTEMIS host/model key, connected device and 24 x 3 traces</a:t>
+              <a:t>04   ARTEMIS host/key, device and original reviewed traces</a:t>
             </a:r>
           </a:p>
           <a:p xmlns:a="http://schemas.openxmlformats.org/drawingml/2006/main">
-            <a:pPr>
+            <a:pPr algn="l">
               <a:lnSpc>
                 <a:spcPct val="120000"/>
               </a:lnSpc>
@@ -7923,7 +8096,7 @@
                 <a:ea typeface="Arial"/>
                 <a:cs typeface="Arial"/>
               </a:rPr>
-              <a:t>05   Firebase Console evidence, hosted review, report and demo recording</a:t>
+              <a:t>05   Live FCM/OS isolation, console evidence and human review</a:t>
             </a:r>
           </a:p>
         </p:txBody>
@@ -8003,6 +8176,7 @@
               </a:defRPr>
             </a:defPPr>
             <a:lvl1pPr>
+              <a:buNone/>
               <a:defRPr sz="1125">
                 <a:solidFill>
                   <a:srgbClr val="52627A"/>
@@ -8013,6 +8187,7 @@
               </a:defRPr>
             </a:lvl1pPr>
             <a:lvl2pPr>
+              <a:buNone/>
               <a:defRPr sz="1125">
                 <a:solidFill>
                   <a:srgbClr val="52627A"/>
@@ -8023,6 +8198,7 @@
               </a:defRPr>
             </a:lvl2pPr>
             <a:lvl3pPr>
+              <a:buNone/>
               <a:defRPr sz="1125">
                 <a:solidFill>
                   <a:srgbClr val="52627A"/>
@@ -8033,6 +8209,7 @@
               </a:defRPr>
             </a:lvl3pPr>
             <a:lvl4pPr>
+              <a:buNone/>
               <a:defRPr sz="1125">
                 <a:solidFill>
                   <a:srgbClr val="52627A"/>
@@ -8043,6 +8220,7 @@
               </a:defRPr>
             </a:lvl4pPr>
             <a:lvl5pPr>
+              <a:buNone/>
               <a:defRPr sz="1125">
                 <a:solidFill>
                   <a:srgbClr val="52627A"/>
@@ -8053,6 +8231,7 @@
               </a:defRPr>
             </a:lvl5pPr>
             <a:lvl6pPr>
+              <a:buNone/>
               <a:defRPr sz="1125">
                 <a:solidFill>
                   <a:srgbClr val="52627A"/>
@@ -8063,6 +8242,7 @@
               </a:defRPr>
             </a:lvl6pPr>
             <a:lvl7pPr>
+              <a:buNone/>
               <a:defRPr sz="1125">
                 <a:solidFill>
                   <a:srgbClr val="52627A"/>
@@ -8073,6 +8253,7 @@
               </a:defRPr>
             </a:lvl7pPr>
             <a:lvl8pPr>
+              <a:buNone/>
               <a:defRPr sz="1125">
                 <a:solidFill>
                   <a:srgbClr val="52627A"/>
@@ -8083,6 +8264,7 @@
               </a:defRPr>
             </a:lvl8pPr>
             <a:lvl9pPr>
+              <a:buNone/>
               <a:defRPr sz="1125">
                 <a:solidFill>
                   <a:srgbClr val="52627A"/>
@@ -8095,6 +8277,7 @@
           </a:lstStyle>
           <a:p xmlns:a="http://schemas.openxmlformats.org/drawingml/2006/main">
             <a:pPr>
+              <a:buNone/>
               <a:defRPr sz="1125">
                 <a:solidFill>
                   <a:srgbClr val="52627A"/>
@@ -8162,6 +8345,7 @@
               </a:defRPr>
             </a:defPPr>
             <a:lvl1pPr algn="r">
+              <a:buNone/>
               <a:defRPr sz="1125" b="1">
                 <a:solidFill>
                   <a:srgbClr val="162CD4"/>
@@ -8172,6 +8356,7 @@
               </a:defRPr>
             </a:lvl1pPr>
             <a:lvl2pPr algn="r">
+              <a:buNone/>
               <a:defRPr sz="1125" b="1">
                 <a:solidFill>
                   <a:srgbClr val="162CD4"/>
@@ -8182,6 +8367,7 @@
               </a:defRPr>
             </a:lvl2pPr>
             <a:lvl3pPr algn="r">
+              <a:buNone/>
               <a:defRPr sz="1125" b="1">
                 <a:solidFill>
                   <a:srgbClr val="162CD4"/>
@@ -8192,6 +8378,7 @@
               </a:defRPr>
             </a:lvl3pPr>
             <a:lvl4pPr algn="r">
+              <a:buNone/>
               <a:defRPr sz="1125" b="1">
                 <a:solidFill>
                   <a:srgbClr val="162CD4"/>
@@ -8202,6 +8389,7 @@
               </a:defRPr>
             </a:lvl4pPr>
             <a:lvl5pPr algn="r">
+              <a:buNone/>
               <a:defRPr sz="1125" b="1">
                 <a:solidFill>
                   <a:srgbClr val="162CD4"/>
@@ -8212,6 +8400,7 @@
               </a:defRPr>
             </a:lvl5pPr>
             <a:lvl6pPr algn="r">
+              <a:buNone/>
               <a:defRPr sz="1125" b="1">
                 <a:solidFill>
                   <a:srgbClr val="162CD4"/>
@@ -8222,6 +8411,7 @@
               </a:defRPr>
             </a:lvl6pPr>
             <a:lvl7pPr algn="r">
+              <a:buNone/>
               <a:defRPr sz="1125" b="1">
                 <a:solidFill>
                   <a:srgbClr val="162CD4"/>
@@ -8232,6 +8422,7 @@
               </a:defRPr>
             </a:lvl7pPr>
             <a:lvl8pPr algn="r">
+              <a:buNone/>
               <a:defRPr sz="1125" b="1">
                 <a:solidFill>
                   <a:srgbClr val="162CD4"/>
@@ -8242,6 +8433,7 @@
               </a:defRPr>
             </a:lvl8pPr>
             <a:lvl9pPr algn="r">
+              <a:buNone/>
               <a:defRPr sz="1125" b="1">
                 <a:solidFill>
                   <a:srgbClr val="162CD4"/>
@@ -8254,6 +8446,7 @@
           </a:lstStyle>
           <a:p xmlns:a="http://schemas.openxmlformats.org/drawingml/2006/main">
             <a:pPr algn="r">
+              <a:buNone/>
               <a:defRPr sz="1125" b="1">
                 <a:solidFill>
                   <a:srgbClr val="162CD4"/>
@@ -8381,6 +8574,7 @@
               </a:defRPr>
             </a:defPPr>
             <a:lvl1pPr>
+              <a:buNone/>
               <a:defRPr sz="3225" b="1">
                 <a:solidFill>
                   <a:srgbClr val="14213D"/>
@@ -8391,6 +8585,7 @@
               </a:defRPr>
             </a:lvl1pPr>
             <a:lvl2pPr>
+              <a:buNone/>
               <a:defRPr sz="3225" b="1">
                 <a:solidFill>
                   <a:srgbClr val="14213D"/>
@@ -8401,6 +8596,7 @@
               </a:defRPr>
             </a:lvl2pPr>
             <a:lvl3pPr>
+              <a:buNone/>
               <a:defRPr sz="3225" b="1">
                 <a:solidFill>
                   <a:srgbClr val="14213D"/>
@@ -8411,6 +8607,7 @@
               </a:defRPr>
             </a:lvl3pPr>
             <a:lvl4pPr>
+              <a:buNone/>
               <a:defRPr sz="3225" b="1">
                 <a:solidFill>
                   <a:srgbClr val="14213D"/>
@@ -8421,6 +8618,7 @@
               </a:defRPr>
             </a:lvl4pPr>
             <a:lvl5pPr>
+              <a:buNone/>
               <a:defRPr sz="3225" b="1">
                 <a:solidFill>
                   <a:srgbClr val="14213D"/>
@@ -8431,6 +8629,7 @@
               </a:defRPr>
             </a:lvl5pPr>
             <a:lvl6pPr>
+              <a:buNone/>
               <a:defRPr sz="3225" b="1">
                 <a:solidFill>
                   <a:srgbClr val="14213D"/>
@@ -8441,6 +8640,7 @@
               </a:defRPr>
             </a:lvl6pPr>
             <a:lvl7pPr>
+              <a:buNone/>
               <a:defRPr sz="3225" b="1">
                 <a:solidFill>
                   <a:srgbClr val="14213D"/>
@@ -8451,6 +8651,7 @@
               </a:defRPr>
             </a:lvl7pPr>
             <a:lvl8pPr>
+              <a:buNone/>
               <a:defRPr sz="3225" b="1">
                 <a:solidFill>
                   <a:srgbClr val="14213D"/>
@@ -8461,6 +8662,7 @@
               </a:defRPr>
             </a:lvl8pPr>
             <a:lvl9pPr>
+              <a:buNone/>
               <a:defRPr sz="3225" b="1">
                 <a:solidFill>
                   <a:srgbClr val="14213D"/>
@@ -8473,6 +8675,7 @@
           </a:lstStyle>
           <a:p xmlns:a="http://schemas.openxmlformats.org/drawingml/2006/main">
             <a:pPr>
+              <a:buNone/>
               <a:defRPr sz="3225" b="1">
                 <a:solidFill>
                   <a:srgbClr val="14213D"/>
@@ -8571,6 +8774,7 @@
               </a:defRPr>
             </a:defPPr>
             <a:lvl1pPr>
+              <a:buNone/>
               <a:defRPr sz="2025">
                 <a:solidFill>
                   <a:srgbClr val="52627A"/>
@@ -8581,6 +8785,7 @@
               </a:defRPr>
             </a:lvl1pPr>
             <a:lvl2pPr>
+              <a:buNone/>
               <a:defRPr sz="2025">
                 <a:solidFill>
                   <a:srgbClr val="52627A"/>
@@ -8591,6 +8796,7 @@
               </a:defRPr>
             </a:lvl2pPr>
             <a:lvl3pPr>
+              <a:buNone/>
               <a:defRPr sz="2025">
                 <a:solidFill>
                   <a:srgbClr val="52627A"/>
@@ -8601,6 +8807,7 @@
               </a:defRPr>
             </a:lvl3pPr>
             <a:lvl4pPr>
+              <a:buNone/>
               <a:defRPr sz="2025">
                 <a:solidFill>
                   <a:srgbClr val="52627A"/>
@@ -8611,6 +8818,7 @@
               </a:defRPr>
             </a:lvl4pPr>
             <a:lvl5pPr>
+              <a:buNone/>
               <a:defRPr sz="2025">
                 <a:solidFill>
                   <a:srgbClr val="52627A"/>
@@ -8621,6 +8829,7 @@
               </a:defRPr>
             </a:lvl5pPr>
             <a:lvl6pPr>
+              <a:buNone/>
               <a:defRPr sz="2025">
                 <a:solidFill>
                   <a:srgbClr val="52627A"/>
@@ -8631,6 +8840,7 @@
               </a:defRPr>
             </a:lvl6pPr>
             <a:lvl7pPr>
+              <a:buNone/>
               <a:defRPr sz="2025">
                 <a:solidFill>
                   <a:srgbClr val="52627A"/>
@@ -8641,6 +8851,7 @@
               </a:defRPr>
             </a:lvl7pPr>
             <a:lvl8pPr>
+              <a:buNone/>
               <a:defRPr sz="2025">
                 <a:solidFill>
                   <a:srgbClr val="52627A"/>
@@ -8651,6 +8862,7 @@
               </a:defRPr>
             </a:lvl8pPr>
             <a:lvl9pPr>
+              <a:buNone/>
               <a:defRPr sz="2025">
                 <a:solidFill>
                   <a:srgbClr val="52627A"/>
@@ -8723,7 +8935,7 @@
             <a:normAutofit fontScale="100000"/>
           </a:bodyPr>
           <a:lstStyle xmlns:a="http://schemas.openxmlformats.org/drawingml/2006/main">
-            <a:defPPr>
+            <a:defPPr algn="l">
               <a:defRPr sz="1875">
                 <a:solidFill>
                   <a:srgbClr val="14213D"/>
@@ -8733,7 +8945,8 @@
                 <a:cs typeface="Arial"/>
               </a:defRPr>
             </a:defPPr>
-            <a:lvl1pPr>
+            <a:lvl1pPr algn="l">
+              <a:buNone/>
               <a:defRPr sz="1875">
                 <a:solidFill>
                   <a:srgbClr val="14213D"/>
@@ -8743,7 +8956,8 @@
                 <a:cs typeface="Arial"/>
               </a:defRPr>
             </a:lvl1pPr>
-            <a:lvl2pPr>
+            <a:lvl2pPr algn="l">
+              <a:buNone/>
               <a:defRPr sz="1875">
                 <a:solidFill>
                   <a:srgbClr val="14213D"/>
@@ -8753,7 +8967,8 @@
                 <a:cs typeface="Arial"/>
               </a:defRPr>
             </a:lvl2pPr>
-            <a:lvl3pPr>
+            <a:lvl3pPr algn="l">
+              <a:buNone/>
               <a:defRPr sz="1875">
                 <a:solidFill>
                   <a:srgbClr val="14213D"/>
@@ -8763,7 +8978,8 @@
                 <a:cs typeface="Arial"/>
               </a:defRPr>
             </a:lvl3pPr>
-            <a:lvl4pPr>
+            <a:lvl4pPr algn="l">
+              <a:buNone/>
               <a:defRPr sz="1875">
                 <a:solidFill>
                   <a:srgbClr val="14213D"/>
@@ -8773,7 +8989,8 @@
                 <a:cs typeface="Arial"/>
               </a:defRPr>
             </a:lvl4pPr>
-            <a:lvl5pPr>
+            <a:lvl5pPr algn="l">
+              <a:buNone/>
               <a:defRPr sz="1875">
                 <a:solidFill>
                   <a:srgbClr val="14213D"/>
@@ -8783,7 +9000,8 @@
                 <a:cs typeface="Arial"/>
               </a:defRPr>
             </a:lvl5pPr>
-            <a:lvl6pPr>
+            <a:lvl6pPr algn="l">
+              <a:buNone/>
               <a:defRPr sz="1875">
                 <a:solidFill>
                   <a:srgbClr val="14213D"/>
@@ -8793,7 +9011,8 @@
                 <a:cs typeface="Arial"/>
               </a:defRPr>
             </a:lvl6pPr>
-            <a:lvl7pPr>
+            <a:lvl7pPr algn="l">
+              <a:buNone/>
               <a:defRPr sz="1875">
                 <a:solidFill>
                   <a:srgbClr val="14213D"/>
@@ -8803,7 +9022,8 @@
                 <a:cs typeface="Arial"/>
               </a:defRPr>
             </a:lvl7pPr>
-            <a:lvl8pPr>
+            <a:lvl8pPr algn="l">
+              <a:buNone/>
               <a:defRPr sz="1875">
                 <a:solidFill>
                   <a:srgbClr val="14213D"/>
@@ -8813,7 +9033,8 @@
                 <a:cs typeface="Arial"/>
               </a:defRPr>
             </a:lvl8pPr>
-            <a:lvl9pPr>
+            <a:lvl9pPr algn="l">
+              <a:buNone/>
               <a:defRPr sz="1875">
                 <a:solidFill>
                   <a:srgbClr val="14213D"/>
@@ -8825,7 +9046,7 @@
             </a:lvl9pPr>
           </a:lstStyle>
           <a:p xmlns:a="http://schemas.openxmlformats.org/drawingml/2006/main">
-            <a:pPr>
+            <a:pPr algn="l">
               <a:lnSpc>
                 <a:spcPct val="120000"/>
               </a:lnSpc>
@@ -8848,11 +9069,11 @@
                 <a:ea typeface="Arial"/>
                 <a:cs typeface="Arial"/>
               </a:rPr>
-              <a:t>01   Configure a non-production Firebase project and Android OAuth</a:t>
+              <a:t>01   Reproduce checks using D-drive portable tooling</a:t>
             </a:r>
           </a:p>
           <a:p xmlns:a="http://schemas.openxmlformats.org/drawingml/2006/main">
-            <a:pPr>
+            <a:pPr algn="l">
               <a:lnSpc>
                 <a:spcPct val="120000"/>
               </a:lnSpc>
@@ -8875,11 +9096,11 @@
                 <a:ea typeface="Arial"/>
                 <a:cs typeface="Arial"/>
               </a:rPr>
-              <a:t>02   Run Gradle build in an environment that permits Java loopback</a:t>
+              <a:t>02   Install CI-built APK on an authorized test device</a:t>
             </a:r>
           </a:p>
           <a:p xmlns:a="http://schemas.openxmlformats.org/drawingml/2006/main">
-            <a:pPr>
+            <a:pPr algn="l">
               <a:lnSpc>
                 <a:spcPct val="120000"/>
               </a:lnSpc>
@@ -8902,11 +9123,11 @@
                 <a:ea typeface="Arial"/>
                 <a:cs typeface="Arial"/>
               </a:rPr>
-              <a:t>03   Start ARTEMIS and connect a device with the app installed</a:t>
+              <a:t>03   Supply approved Firebase/backend staging fixtures</a:t>
             </a:r>
           </a:p>
           <a:p xmlns:a="http://schemas.openxmlformats.org/drawingml/2006/main">
-            <a:pPr>
+            <a:pPr algn="l">
               <a:lnSpc>
                 <a:spcPct val="120000"/>
               </a:lnSpc>
@@ -8929,11 +9150,11 @@
                 <a:ea typeface="Arial"/>
                 <a:cs typeface="Arial"/>
               </a:rPr>
-              <a:t>04   Execute 21 automated cases, 3 manual FCM cases and Pro exploration</a:t>
+              <a:t>04   Run Flash repeats, manual cases and Pro exploration</a:t>
             </a:r>
           </a:p>
           <a:p xmlns:a="http://schemas.openxmlformats.org/drawingml/2006/main">
-            <a:pPr>
+            <a:pPr algn="l">
               <a:lnSpc>
                 <a:spcPct val="120000"/>
               </a:lnSpc>
@@ -8956,7 +9177,7 @@
                 <a:ea typeface="Arial"/>
                 <a:cs typeface="Arial"/>
               </a:rPr>
-              <a:t>05   Record Analytics/Crashlytics/Remote Config evidence and final demo</a:t>
+              <a:t>05   Review traces, complete demo and retain honest gaps</a:t>
             </a:r>
           </a:p>
         </p:txBody>
@@ -9025,7 +9246,7 @@
             <a:normAutofit fontScale="100000"/>
           </a:bodyPr>
           <a:lstStyle xmlns:a="http://schemas.openxmlformats.org/drawingml/2006/main">
-            <a:defPPr>
+            <a:defPPr algn="l">
               <a:defRPr sz="1125">
                 <a:solidFill>
                   <a:srgbClr val="52627A"/>
@@ -9035,7 +9256,8 @@
                 <a:cs typeface="Arial"/>
               </a:defRPr>
             </a:defPPr>
-            <a:lvl1pPr>
+            <a:lvl1pPr algn="l">
+              <a:buNone/>
               <a:defRPr sz="1125">
                 <a:solidFill>
                   <a:srgbClr val="52627A"/>
@@ -9045,7 +9267,8 @@
                 <a:cs typeface="Arial"/>
               </a:defRPr>
             </a:lvl1pPr>
-            <a:lvl2pPr>
+            <a:lvl2pPr algn="l">
+              <a:buNone/>
               <a:defRPr sz="1125">
                 <a:solidFill>
                   <a:srgbClr val="52627A"/>
@@ -9055,7 +9278,8 @@
                 <a:cs typeface="Arial"/>
               </a:defRPr>
             </a:lvl2pPr>
-            <a:lvl3pPr>
+            <a:lvl3pPr algn="l">
+              <a:buNone/>
               <a:defRPr sz="1125">
                 <a:solidFill>
                   <a:srgbClr val="52627A"/>
@@ -9065,7 +9289,8 @@
                 <a:cs typeface="Arial"/>
               </a:defRPr>
             </a:lvl3pPr>
-            <a:lvl4pPr>
+            <a:lvl4pPr algn="l">
+              <a:buNone/>
               <a:defRPr sz="1125">
                 <a:solidFill>
                   <a:srgbClr val="52627A"/>
@@ -9075,7 +9300,8 @@
                 <a:cs typeface="Arial"/>
               </a:defRPr>
             </a:lvl4pPr>
-            <a:lvl5pPr>
+            <a:lvl5pPr algn="l">
+              <a:buNone/>
               <a:defRPr sz="1125">
                 <a:solidFill>
                   <a:srgbClr val="52627A"/>
@@ -9085,7 +9311,8 @@
                 <a:cs typeface="Arial"/>
               </a:defRPr>
             </a:lvl5pPr>
-            <a:lvl6pPr>
+            <a:lvl6pPr algn="l">
+              <a:buNone/>
               <a:defRPr sz="1125">
                 <a:solidFill>
                   <a:srgbClr val="52627A"/>
@@ -9095,7 +9322,8 @@
                 <a:cs typeface="Arial"/>
               </a:defRPr>
             </a:lvl6pPr>
-            <a:lvl7pPr>
+            <a:lvl7pPr algn="l">
+              <a:buNone/>
               <a:defRPr sz="1125">
                 <a:solidFill>
                   <a:srgbClr val="52627A"/>
@@ -9105,7 +9333,8 @@
                 <a:cs typeface="Arial"/>
               </a:defRPr>
             </a:lvl7pPr>
-            <a:lvl8pPr>
+            <a:lvl8pPr algn="l">
+              <a:buNone/>
               <a:defRPr sz="1125">
                 <a:solidFill>
                   <a:srgbClr val="52627A"/>
@@ -9115,7 +9344,8 @@
                 <a:cs typeface="Arial"/>
               </a:defRPr>
             </a:lvl8pPr>
-            <a:lvl9pPr>
+            <a:lvl9pPr algn="l">
+              <a:buNone/>
               <a:defRPr sz="1125">
                 <a:solidFill>
                   <a:srgbClr val="52627A"/>
@@ -9127,7 +9357,8 @@
             </a:lvl9pPr>
           </a:lstStyle>
           <a:p xmlns:a="http://schemas.openxmlformats.org/drawingml/2006/main">
-            <a:pPr>
+            <a:pPr algn="l">
+              <a:buNone/>
               <a:defRPr sz="1125">
                 <a:solidFill>
                   <a:srgbClr val="52627A"/>
@@ -9146,7 +9377,7 @@
                 <a:ea typeface="Arial"/>
                 <a:cs typeface="Arial"/>
               </a:rPr>
-              <a:t>README.md; docs/test-plan.md | No commits or pushes were created</a:t>
+              <a:t>docs/lab3-report.md; docs/demo-script.md | Corrective branch pushed; do not merge</a:t>
             </a:r>
           </a:p>
         </p:txBody>
@@ -9195,6 +9426,7 @@
               </a:defRPr>
             </a:defPPr>
             <a:lvl1pPr algn="r">
+              <a:buNone/>
               <a:defRPr sz="1125" b="1">
                 <a:solidFill>
                   <a:srgbClr val="162CD4"/>
@@ -9205,6 +9437,7 @@
               </a:defRPr>
             </a:lvl1pPr>
             <a:lvl2pPr algn="r">
+              <a:buNone/>
               <a:defRPr sz="1125" b="1">
                 <a:solidFill>
                   <a:srgbClr val="162CD4"/>
@@ -9215,6 +9448,7 @@
               </a:defRPr>
             </a:lvl2pPr>
             <a:lvl3pPr algn="r">
+              <a:buNone/>
               <a:defRPr sz="1125" b="1">
                 <a:solidFill>
                   <a:srgbClr val="162CD4"/>
@@ -9225,6 +9459,7 @@
               </a:defRPr>
             </a:lvl3pPr>
             <a:lvl4pPr algn="r">
+              <a:buNone/>
               <a:defRPr sz="1125" b="1">
                 <a:solidFill>
                   <a:srgbClr val="162CD4"/>
@@ -9235,6 +9470,7 @@
               </a:defRPr>
             </a:lvl4pPr>
             <a:lvl5pPr algn="r">
+              <a:buNone/>
               <a:defRPr sz="1125" b="1">
                 <a:solidFill>
                   <a:srgbClr val="162CD4"/>
@@ -9245,6 +9481,7 @@
               </a:defRPr>
             </a:lvl5pPr>
             <a:lvl6pPr algn="r">
+              <a:buNone/>
               <a:defRPr sz="1125" b="1">
                 <a:solidFill>
                   <a:srgbClr val="162CD4"/>
@@ -9255,6 +9492,7 @@
               </a:defRPr>
             </a:lvl6pPr>
             <a:lvl7pPr algn="r">
+              <a:buNone/>
               <a:defRPr sz="1125" b="1">
                 <a:solidFill>
                   <a:srgbClr val="162CD4"/>
@@ -9265,6 +9503,7 @@
               </a:defRPr>
             </a:lvl7pPr>
             <a:lvl8pPr algn="r">
+              <a:buNone/>
               <a:defRPr sz="1125" b="1">
                 <a:solidFill>
                   <a:srgbClr val="162CD4"/>
@@ -9275,6 +9514,7 @@
               </a:defRPr>
             </a:lvl8pPr>
             <a:lvl9pPr algn="r">
+              <a:buNone/>
               <a:defRPr sz="1125" b="1">
                 <a:solidFill>
                   <a:srgbClr val="162CD4"/>
@@ -9287,6 +9527,7 @@
           </a:lstStyle>
           <a:p xmlns:a="http://schemas.openxmlformats.org/drawingml/2006/main">
             <a:pPr algn="r">
+              <a:buNone/>
               <a:defRPr sz="1125" b="1">
                 <a:solidFill>
                   <a:srgbClr val="162CD4"/>
@@ -9414,6 +9655,7 @@
               </a:defRPr>
             </a:defPPr>
             <a:lvl1pPr>
+              <a:buNone/>
               <a:defRPr sz="3225" b="1">
                 <a:solidFill>
                   <a:srgbClr val="14213D"/>
@@ -9424,6 +9666,7 @@
               </a:defRPr>
             </a:lvl1pPr>
             <a:lvl2pPr>
+              <a:buNone/>
               <a:defRPr sz="3225" b="1">
                 <a:solidFill>
                   <a:srgbClr val="14213D"/>
@@ -9434,6 +9677,7 @@
               </a:defRPr>
             </a:lvl2pPr>
             <a:lvl3pPr>
+              <a:buNone/>
               <a:defRPr sz="3225" b="1">
                 <a:solidFill>
                   <a:srgbClr val="14213D"/>
@@ -9444,6 +9688,7 @@
               </a:defRPr>
             </a:lvl3pPr>
             <a:lvl4pPr>
+              <a:buNone/>
               <a:defRPr sz="3225" b="1">
                 <a:solidFill>
                   <a:srgbClr val="14213D"/>
@@ -9454,6 +9699,7 @@
               </a:defRPr>
             </a:lvl4pPr>
             <a:lvl5pPr>
+              <a:buNone/>
               <a:defRPr sz="3225" b="1">
                 <a:solidFill>
                   <a:srgbClr val="14213D"/>
@@ -9464,6 +9710,7 @@
               </a:defRPr>
             </a:lvl5pPr>
             <a:lvl6pPr>
+              <a:buNone/>
               <a:defRPr sz="3225" b="1">
                 <a:solidFill>
                   <a:srgbClr val="14213D"/>
@@ -9474,6 +9721,7 @@
               </a:defRPr>
             </a:lvl6pPr>
             <a:lvl7pPr>
+              <a:buNone/>
               <a:defRPr sz="3225" b="1">
                 <a:solidFill>
                   <a:srgbClr val="14213D"/>
@@ -9484,6 +9732,7 @@
               </a:defRPr>
             </a:lvl7pPr>
             <a:lvl8pPr>
+              <a:buNone/>
               <a:defRPr sz="3225" b="1">
                 <a:solidFill>
                   <a:srgbClr val="14213D"/>
@@ -9494,6 +9743,7 @@
               </a:defRPr>
             </a:lvl8pPr>
             <a:lvl9pPr>
+              <a:buNone/>
               <a:defRPr sz="3225" b="1">
                 <a:solidFill>
                   <a:srgbClr val="14213D"/>
@@ -9506,6 +9756,7 @@
           </a:lstStyle>
           <a:p xmlns:a="http://schemas.openxmlformats.org/drawingml/2006/main">
             <a:pPr>
+              <a:buNone/>
               <a:defRPr sz="3225" b="1">
                 <a:solidFill>
                   <a:srgbClr val="14213D"/>
@@ -9604,6 +9855,7 @@
               </a:defRPr>
             </a:defPPr>
             <a:lvl1pPr>
+              <a:buNone/>
               <a:defRPr sz="2025">
                 <a:solidFill>
                   <a:srgbClr val="52627A"/>
@@ -9614,6 +9866,7 @@
               </a:defRPr>
             </a:lvl1pPr>
             <a:lvl2pPr>
+              <a:buNone/>
               <a:defRPr sz="2025">
                 <a:solidFill>
                   <a:srgbClr val="52627A"/>
@@ -9624,6 +9877,7 @@
               </a:defRPr>
             </a:lvl2pPr>
             <a:lvl3pPr>
+              <a:buNone/>
               <a:defRPr sz="2025">
                 <a:solidFill>
                   <a:srgbClr val="52627A"/>
@@ -9634,6 +9888,7 @@
               </a:defRPr>
             </a:lvl3pPr>
             <a:lvl4pPr>
+              <a:buNone/>
               <a:defRPr sz="2025">
                 <a:solidFill>
                   <a:srgbClr val="52627A"/>
@@ -9644,6 +9899,7 @@
               </a:defRPr>
             </a:lvl4pPr>
             <a:lvl5pPr>
+              <a:buNone/>
               <a:defRPr sz="2025">
                 <a:solidFill>
                   <a:srgbClr val="52627A"/>
@@ -9654,6 +9910,7 @@
               </a:defRPr>
             </a:lvl5pPr>
             <a:lvl6pPr>
+              <a:buNone/>
               <a:defRPr sz="2025">
                 <a:solidFill>
                   <a:srgbClr val="52627A"/>
@@ -9664,6 +9921,7 @@
               </a:defRPr>
             </a:lvl6pPr>
             <a:lvl7pPr>
+              <a:buNone/>
               <a:defRPr sz="2025">
                 <a:solidFill>
                   <a:srgbClr val="52627A"/>
@@ -9674,6 +9932,7 @@
               </a:defRPr>
             </a:lvl7pPr>
             <a:lvl8pPr>
+              <a:buNone/>
               <a:defRPr sz="2025">
                 <a:solidFill>
                   <a:srgbClr val="52627A"/>
@@ -9684,6 +9943,7 @@
               </a:defRPr>
             </a:lvl8pPr>
             <a:lvl9pPr>
+              <a:buNone/>
               <a:defRPr sz="2025">
                 <a:solidFill>
                   <a:srgbClr val="52627A"/>
@@ -9756,7 +10016,7 @@
             <a:normAutofit fontScale="100000"/>
           </a:bodyPr>
           <a:lstStyle xmlns:a="http://schemas.openxmlformats.org/drawingml/2006/main">
-            <a:defPPr>
+            <a:defPPr algn="l">
               <a:defRPr sz="1875">
                 <a:solidFill>
                   <a:srgbClr val="14213D"/>
@@ -9766,7 +10026,8 @@
                 <a:cs typeface="Arial"/>
               </a:defRPr>
             </a:defPPr>
-            <a:lvl1pPr>
+            <a:lvl1pPr algn="l">
+              <a:buNone/>
               <a:defRPr sz="1875">
                 <a:solidFill>
                   <a:srgbClr val="14213D"/>
@@ -9776,7 +10037,8 @@
                 <a:cs typeface="Arial"/>
               </a:defRPr>
             </a:lvl1pPr>
-            <a:lvl2pPr>
+            <a:lvl2pPr algn="l">
+              <a:buNone/>
               <a:defRPr sz="1875">
                 <a:solidFill>
                   <a:srgbClr val="14213D"/>
@@ -9786,7 +10048,8 @@
                 <a:cs typeface="Arial"/>
               </a:defRPr>
             </a:lvl2pPr>
-            <a:lvl3pPr>
+            <a:lvl3pPr algn="l">
+              <a:buNone/>
               <a:defRPr sz="1875">
                 <a:solidFill>
                   <a:srgbClr val="14213D"/>
@@ -9796,7 +10059,8 @@
                 <a:cs typeface="Arial"/>
               </a:defRPr>
             </a:lvl3pPr>
-            <a:lvl4pPr>
+            <a:lvl4pPr algn="l">
+              <a:buNone/>
               <a:defRPr sz="1875">
                 <a:solidFill>
                   <a:srgbClr val="14213D"/>
@@ -9806,7 +10070,8 @@
                 <a:cs typeface="Arial"/>
               </a:defRPr>
             </a:lvl4pPr>
-            <a:lvl5pPr>
+            <a:lvl5pPr algn="l">
+              <a:buNone/>
               <a:defRPr sz="1875">
                 <a:solidFill>
                   <a:srgbClr val="14213D"/>
@@ -9816,7 +10081,8 @@
                 <a:cs typeface="Arial"/>
               </a:defRPr>
             </a:lvl5pPr>
-            <a:lvl6pPr>
+            <a:lvl6pPr algn="l">
+              <a:buNone/>
               <a:defRPr sz="1875">
                 <a:solidFill>
                   <a:srgbClr val="14213D"/>
@@ -9826,7 +10092,8 @@
                 <a:cs typeface="Arial"/>
               </a:defRPr>
             </a:lvl6pPr>
-            <a:lvl7pPr>
+            <a:lvl7pPr algn="l">
+              <a:buNone/>
               <a:defRPr sz="1875">
                 <a:solidFill>
                   <a:srgbClr val="14213D"/>
@@ -9836,7 +10103,8 @@
                 <a:cs typeface="Arial"/>
               </a:defRPr>
             </a:lvl7pPr>
-            <a:lvl8pPr>
+            <a:lvl8pPr algn="l">
+              <a:buNone/>
               <a:defRPr sz="1875">
                 <a:solidFill>
                   <a:srgbClr val="14213D"/>
@@ -9846,7 +10114,8 @@
                 <a:cs typeface="Arial"/>
               </a:defRPr>
             </a:lvl8pPr>
-            <a:lvl9pPr>
+            <a:lvl9pPr algn="l">
+              <a:buNone/>
               <a:defRPr sz="1875">
                 <a:solidFill>
                   <a:srgbClr val="14213D"/>
@@ -9858,7 +10127,7 @@
             </a:lvl9pPr>
           </a:lstStyle>
           <a:p xmlns:a="http://schemas.openxmlformats.org/drawingml/2006/main">
-            <a:pPr>
+            <a:pPr algn="l">
               <a:lnSpc>
                 <a:spcPct val="120000"/>
               </a:lnSpc>
@@ -9881,11 +10150,11 @@
                 <a:ea typeface="Arial"/>
                 <a:cs typeface="Arial"/>
               </a:rPr>
-              <a:t>01   Personality: trustworthy, warm and clear</a:t>
+              <a:t>01   Explore real active tutor profiles</a:t>
             </a:r>
           </a:p>
           <a:p xmlns:a="http://schemas.openxmlformats.org/drawingml/2006/main">
-            <a:pPr>
+            <a:pPr algn="l">
               <a:lnSpc>
                 <a:spcPct val="120000"/>
               </a:lnSpc>
@@ -9908,11 +10177,11 @@
                 <a:ea typeface="Arial"/>
                 <a:cs typeface="Arial"/>
               </a:rPr>
-              <a:t>02   Explore real active tutor profiles</a:t>
+              <a:t>02   Preserve tutor context through parent authentication</a:t>
             </a:r>
           </a:p>
           <a:p xmlns:a="http://schemas.openxmlformats.org/drawingml/2006/main">
-            <a:pPr>
+            <a:pPr algn="l">
               <a:lnSpc>
                 <a:spcPct val="120000"/>
               </a:lnSpc>
@@ -9935,11 +10204,11 @@
                 <a:ea typeface="Arial"/>
                 <a:cs typeface="Arial"/>
               </a:rPr>
-              <a:t>03   Ask for a connection and communicate with a BeeWise consultant</a:t>
+              <a:t>03   Coordinate through a trusted BeeWise consultant</a:t>
             </a:r>
           </a:p>
           <a:p xmlns:a="http://schemas.openxmlformats.org/drawingml/2006/main">
-            <a:pPr>
+            <a:pPr algn="l">
               <a:lnSpc>
                 <a:spcPct val="120000"/>
               </a:lnSpc>
@@ -9962,7 +10231,34 @@
                 <a:ea typeface="Arial"/>
                 <a:cs typeface="Arial"/>
               </a:rPr>
-              <a:t>04   Keep proposals, invoices, payment checks and schedules under trusted control</a:t>
+              <a:t>04   Tutor applications stay private and pending review</a:t>
+            </a:r>
+          </a:p>
+          <a:p xmlns:a="http://schemas.openxmlformats.org/drawingml/2006/main">
+            <a:pPr algn="l">
+              <a:lnSpc>
+                <a:spcPct val="120000"/>
+              </a:lnSpc>
+              <a:buNone/>
+              <a:defRPr sz="1875">
+                <a:solidFill>
+                  <a:srgbClr val="14213D"/>
+                </a:solidFill>
+                <a:latin typeface="Arial"/>
+                <a:ea typeface="Arial"/>
+                <a:cs typeface="Arial"/>
+              </a:defRPr>
+            </a:pPr>
+            <a:r>
+              <a:rPr sz="1875">
+                <a:solidFill>
+                  <a:srgbClr val="14213D"/>
+                </a:solidFill>
+                <a:latin typeface="Arial"/>
+                <a:ea typeface="Arial"/>
+                <a:cs typeface="Arial"/>
+              </a:rPr>
+              <a:t>05   Backend alone verifies payment and official schedule</a:t>
             </a:r>
           </a:p>
         </p:txBody>
@@ -10042,6 +10338,7 @@
               </a:defRPr>
             </a:defPPr>
             <a:lvl1pPr>
+              <a:buNone/>
               <a:defRPr sz="1125">
                 <a:solidFill>
                   <a:srgbClr val="52627A"/>
@@ -10052,6 +10349,7 @@
               </a:defRPr>
             </a:lvl1pPr>
             <a:lvl2pPr>
+              <a:buNone/>
               <a:defRPr sz="1125">
                 <a:solidFill>
                   <a:srgbClr val="52627A"/>
@@ -10062,6 +10360,7 @@
               </a:defRPr>
             </a:lvl2pPr>
             <a:lvl3pPr>
+              <a:buNone/>
               <a:defRPr sz="1125">
                 <a:solidFill>
                   <a:srgbClr val="52627A"/>
@@ -10072,6 +10371,7 @@
               </a:defRPr>
             </a:lvl3pPr>
             <a:lvl4pPr>
+              <a:buNone/>
               <a:defRPr sz="1125">
                 <a:solidFill>
                   <a:srgbClr val="52627A"/>
@@ -10082,6 +10382,7 @@
               </a:defRPr>
             </a:lvl4pPr>
             <a:lvl5pPr>
+              <a:buNone/>
               <a:defRPr sz="1125">
                 <a:solidFill>
                   <a:srgbClr val="52627A"/>
@@ -10092,6 +10393,7 @@
               </a:defRPr>
             </a:lvl5pPr>
             <a:lvl6pPr>
+              <a:buNone/>
               <a:defRPr sz="1125">
                 <a:solidFill>
                   <a:srgbClr val="52627A"/>
@@ -10102,6 +10404,7 @@
               </a:defRPr>
             </a:lvl6pPr>
             <a:lvl7pPr>
+              <a:buNone/>
               <a:defRPr sz="1125">
                 <a:solidFill>
                   <a:srgbClr val="52627A"/>
@@ -10112,6 +10415,7 @@
               </a:defRPr>
             </a:lvl7pPr>
             <a:lvl8pPr>
+              <a:buNone/>
               <a:defRPr sz="1125">
                 <a:solidFill>
                   <a:srgbClr val="52627A"/>
@@ -10122,6 +10426,7 @@
               </a:defRPr>
             </a:lvl8pPr>
             <a:lvl9pPr>
+              <a:buNone/>
               <a:defRPr sz="1125">
                 <a:solidFill>
                   <a:srgbClr val="52627A"/>
@@ -10134,6 +10439,7 @@
           </a:lstStyle>
           <a:p xmlns:a="http://schemas.openxmlformats.org/drawingml/2006/main">
             <a:pPr>
+              <a:buNone/>
               <a:defRPr sz="1125">
                 <a:solidFill>
                   <a:srgbClr val="52627A"/>
@@ -10201,6 +10507,7 @@
               </a:defRPr>
             </a:defPPr>
             <a:lvl1pPr algn="r">
+              <a:buNone/>
               <a:defRPr sz="1125" b="1">
                 <a:solidFill>
                   <a:srgbClr val="162CD4"/>
@@ -10211,6 +10518,7 @@
               </a:defRPr>
             </a:lvl1pPr>
             <a:lvl2pPr algn="r">
+              <a:buNone/>
               <a:defRPr sz="1125" b="1">
                 <a:solidFill>
                   <a:srgbClr val="162CD4"/>
@@ -10221,6 +10529,7 @@
               </a:defRPr>
             </a:lvl2pPr>
             <a:lvl3pPr algn="r">
+              <a:buNone/>
               <a:defRPr sz="1125" b="1">
                 <a:solidFill>
                   <a:srgbClr val="162CD4"/>
@@ -10231,6 +10540,7 @@
               </a:defRPr>
             </a:lvl3pPr>
             <a:lvl4pPr algn="r">
+              <a:buNone/>
               <a:defRPr sz="1125" b="1">
                 <a:solidFill>
                   <a:srgbClr val="162CD4"/>
@@ -10241,6 +10551,7 @@
               </a:defRPr>
             </a:lvl4pPr>
             <a:lvl5pPr algn="r">
+              <a:buNone/>
               <a:defRPr sz="1125" b="1">
                 <a:solidFill>
                   <a:srgbClr val="162CD4"/>
@@ -10251,6 +10562,7 @@
               </a:defRPr>
             </a:lvl5pPr>
             <a:lvl6pPr algn="r">
+              <a:buNone/>
               <a:defRPr sz="1125" b="1">
                 <a:solidFill>
                   <a:srgbClr val="162CD4"/>
@@ -10261,6 +10573,7 @@
               </a:defRPr>
             </a:lvl6pPr>
             <a:lvl7pPr algn="r">
+              <a:buNone/>
               <a:defRPr sz="1125" b="1">
                 <a:solidFill>
                   <a:srgbClr val="162CD4"/>
@@ -10271,6 +10584,7 @@
               </a:defRPr>
             </a:lvl7pPr>
             <a:lvl8pPr algn="r">
+              <a:buNone/>
               <a:defRPr sz="1125" b="1">
                 <a:solidFill>
                   <a:srgbClr val="162CD4"/>
@@ -10281,6 +10595,7 @@
               </a:defRPr>
             </a:lvl8pPr>
             <a:lvl9pPr algn="r">
+              <a:buNone/>
               <a:defRPr sz="1125" b="1">
                 <a:solidFill>
                   <a:srgbClr val="162CD4"/>
@@ -10293,6 +10608,7 @@
           </a:lstStyle>
           <a:p xmlns:a="http://schemas.openxmlformats.org/drawingml/2006/main">
             <a:pPr algn="r">
+              <a:buNone/>
               <a:defRPr sz="1125" b="1">
                 <a:solidFill>
                   <a:srgbClr val="162CD4"/>
@@ -10420,6 +10736,7 @@
               </a:defRPr>
             </a:defPPr>
             <a:lvl1pPr>
+              <a:buNone/>
               <a:defRPr sz="3225" b="1">
                 <a:solidFill>
                   <a:srgbClr val="14213D"/>
@@ -10430,6 +10747,7 @@
               </a:defRPr>
             </a:lvl1pPr>
             <a:lvl2pPr>
+              <a:buNone/>
               <a:defRPr sz="3225" b="1">
                 <a:solidFill>
                   <a:srgbClr val="14213D"/>
@@ -10440,6 +10758,7 @@
               </a:defRPr>
             </a:lvl2pPr>
             <a:lvl3pPr>
+              <a:buNone/>
               <a:defRPr sz="3225" b="1">
                 <a:solidFill>
                   <a:srgbClr val="14213D"/>
@@ -10450,6 +10769,7 @@
               </a:defRPr>
             </a:lvl3pPr>
             <a:lvl4pPr>
+              <a:buNone/>
               <a:defRPr sz="3225" b="1">
                 <a:solidFill>
                   <a:srgbClr val="14213D"/>
@@ -10460,6 +10780,7 @@
               </a:defRPr>
             </a:lvl4pPr>
             <a:lvl5pPr>
+              <a:buNone/>
               <a:defRPr sz="3225" b="1">
                 <a:solidFill>
                   <a:srgbClr val="14213D"/>
@@ -10470,6 +10791,7 @@
               </a:defRPr>
             </a:lvl5pPr>
             <a:lvl6pPr>
+              <a:buNone/>
               <a:defRPr sz="3225" b="1">
                 <a:solidFill>
                   <a:srgbClr val="14213D"/>
@@ -10480,6 +10802,7 @@
               </a:defRPr>
             </a:lvl6pPr>
             <a:lvl7pPr>
+              <a:buNone/>
               <a:defRPr sz="3225" b="1">
                 <a:solidFill>
                   <a:srgbClr val="14213D"/>
@@ -10490,6 +10813,7 @@
               </a:defRPr>
             </a:lvl7pPr>
             <a:lvl8pPr>
+              <a:buNone/>
               <a:defRPr sz="3225" b="1">
                 <a:solidFill>
                   <a:srgbClr val="14213D"/>
@@ -10500,6 +10824,7 @@
               </a:defRPr>
             </a:lvl8pPr>
             <a:lvl9pPr>
+              <a:buNone/>
               <a:defRPr sz="3225" b="1">
                 <a:solidFill>
                   <a:srgbClr val="14213D"/>
@@ -10512,6 +10837,7 @@
           </a:lstStyle>
           <a:p xmlns:a="http://schemas.openxmlformats.org/drawingml/2006/main">
             <a:pPr>
+              <a:buNone/>
               <a:defRPr sz="3225" b="1">
                 <a:solidFill>
                   <a:srgbClr val="14213D"/>
@@ -10610,6 +10936,7 @@
               </a:defRPr>
             </a:defPPr>
             <a:lvl1pPr>
+              <a:buNone/>
               <a:defRPr sz="2025">
                 <a:solidFill>
                   <a:srgbClr val="52627A"/>
@@ -10620,6 +10947,7 @@
               </a:defRPr>
             </a:lvl1pPr>
             <a:lvl2pPr>
+              <a:buNone/>
               <a:defRPr sz="2025">
                 <a:solidFill>
                   <a:srgbClr val="52627A"/>
@@ -10630,6 +10958,7 @@
               </a:defRPr>
             </a:lvl2pPr>
             <a:lvl3pPr>
+              <a:buNone/>
               <a:defRPr sz="2025">
                 <a:solidFill>
                   <a:srgbClr val="52627A"/>
@@ -10640,6 +10969,7 @@
               </a:defRPr>
             </a:lvl3pPr>
             <a:lvl4pPr>
+              <a:buNone/>
               <a:defRPr sz="2025">
                 <a:solidFill>
                   <a:srgbClr val="52627A"/>
@@ -10650,6 +10980,7 @@
               </a:defRPr>
             </a:lvl4pPr>
             <a:lvl5pPr>
+              <a:buNone/>
               <a:defRPr sz="2025">
                 <a:solidFill>
                   <a:srgbClr val="52627A"/>
@@ -10660,6 +10991,7 @@
               </a:defRPr>
             </a:lvl5pPr>
             <a:lvl6pPr>
+              <a:buNone/>
               <a:defRPr sz="2025">
                 <a:solidFill>
                   <a:srgbClr val="52627A"/>
@@ -10670,6 +11002,7 @@
               </a:defRPr>
             </a:lvl6pPr>
             <a:lvl7pPr>
+              <a:buNone/>
               <a:defRPr sz="2025">
                 <a:solidFill>
                   <a:srgbClr val="52627A"/>
@@ -10680,6 +11013,7 @@
               </a:defRPr>
             </a:lvl7pPr>
             <a:lvl8pPr>
+              <a:buNone/>
               <a:defRPr sz="2025">
                 <a:solidFill>
                   <a:srgbClr val="52627A"/>
@@ -10690,6 +11024,7 @@
               </a:defRPr>
             </a:lvl8pPr>
             <a:lvl9pPr>
+              <a:buNone/>
               <a:defRPr sz="2025">
                 <a:solidFill>
                   <a:srgbClr val="52627A"/>
@@ -10773,6 +11108,7 @@
               </a:defRPr>
             </a:defPPr>
             <a:lvl1pPr>
+              <a:buNone/>
               <a:defRPr sz="1875">
                 <a:solidFill>
                   <a:srgbClr val="14213D"/>
@@ -10783,6 +11119,7 @@
               </a:defRPr>
             </a:lvl1pPr>
             <a:lvl2pPr>
+              <a:buNone/>
               <a:defRPr sz="1875">
                 <a:solidFill>
                   <a:srgbClr val="14213D"/>
@@ -10793,6 +11130,7 @@
               </a:defRPr>
             </a:lvl2pPr>
             <a:lvl3pPr>
+              <a:buNone/>
               <a:defRPr sz="1875">
                 <a:solidFill>
                   <a:srgbClr val="14213D"/>
@@ -10803,6 +11141,7 @@
               </a:defRPr>
             </a:lvl3pPr>
             <a:lvl4pPr>
+              <a:buNone/>
               <a:defRPr sz="1875">
                 <a:solidFill>
                   <a:srgbClr val="14213D"/>
@@ -10813,6 +11152,7 @@
               </a:defRPr>
             </a:lvl4pPr>
             <a:lvl5pPr>
+              <a:buNone/>
               <a:defRPr sz="1875">
                 <a:solidFill>
                   <a:srgbClr val="14213D"/>
@@ -10823,6 +11163,7 @@
               </a:defRPr>
             </a:lvl5pPr>
             <a:lvl6pPr>
+              <a:buNone/>
               <a:defRPr sz="1875">
                 <a:solidFill>
                   <a:srgbClr val="14213D"/>
@@ -10833,6 +11174,7 @@
               </a:defRPr>
             </a:lvl6pPr>
             <a:lvl7pPr>
+              <a:buNone/>
               <a:defRPr sz="1875">
                 <a:solidFill>
                   <a:srgbClr val="14213D"/>
@@ -10843,6 +11185,7 @@
               </a:defRPr>
             </a:lvl7pPr>
             <a:lvl8pPr>
+              <a:buNone/>
               <a:defRPr sz="1875">
                 <a:solidFill>
                   <a:srgbClr val="14213D"/>
@@ -10853,6 +11196,7 @@
               </a:defRPr>
             </a:lvl8pPr>
             <a:lvl9pPr>
+              <a:buNone/>
               <a:defRPr sz="1875">
                 <a:solidFill>
                   <a:srgbClr val="14213D"/>
@@ -11075,6 +11419,7 @@
               </a:defRPr>
             </a:defPPr>
             <a:lvl1pPr>
+              <a:buNone/>
               <a:defRPr sz="1125">
                 <a:solidFill>
                   <a:srgbClr val="52627A"/>
@@ -11085,6 +11430,7 @@
               </a:defRPr>
             </a:lvl1pPr>
             <a:lvl2pPr>
+              <a:buNone/>
               <a:defRPr sz="1125">
                 <a:solidFill>
                   <a:srgbClr val="52627A"/>
@@ -11095,6 +11441,7 @@
               </a:defRPr>
             </a:lvl2pPr>
             <a:lvl3pPr>
+              <a:buNone/>
               <a:defRPr sz="1125">
                 <a:solidFill>
                   <a:srgbClr val="52627A"/>
@@ -11105,6 +11452,7 @@
               </a:defRPr>
             </a:lvl3pPr>
             <a:lvl4pPr>
+              <a:buNone/>
               <a:defRPr sz="1125">
                 <a:solidFill>
                   <a:srgbClr val="52627A"/>
@@ -11115,6 +11463,7 @@
               </a:defRPr>
             </a:lvl4pPr>
             <a:lvl5pPr>
+              <a:buNone/>
               <a:defRPr sz="1125">
                 <a:solidFill>
                   <a:srgbClr val="52627A"/>
@@ -11125,6 +11474,7 @@
               </a:defRPr>
             </a:lvl5pPr>
             <a:lvl6pPr>
+              <a:buNone/>
               <a:defRPr sz="1125">
                 <a:solidFill>
                   <a:srgbClr val="52627A"/>
@@ -11135,6 +11485,7 @@
               </a:defRPr>
             </a:lvl6pPr>
             <a:lvl7pPr>
+              <a:buNone/>
               <a:defRPr sz="1125">
                 <a:solidFill>
                   <a:srgbClr val="52627A"/>
@@ -11145,6 +11496,7 @@
               </a:defRPr>
             </a:lvl7pPr>
             <a:lvl8pPr>
+              <a:buNone/>
               <a:defRPr sz="1125">
                 <a:solidFill>
                   <a:srgbClr val="52627A"/>
@@ -11155,6 +11507,7 @@
               </a:defRPr>
             </a:lvl8pPr>
             <a:lvl9pPr>
+              <a:buNone/>
               <a:defRPr sz="1125">
                 <a:solidFill>
                   <a:srgbClr val="52627A"/>
@@ -11167,6 +11520,7 @@
           </a:lstStyle>
           <a:p xmlns:a="http://schemas.openxmlformats.org/drawingml/2006/main">
             <a:pPr>
+              <a:buNone/>
               <a:defRPr sz="1125">
                 <a:solidFill>
                   <a:srgbClr val="52627A"/>
@@ -11234,6 +11588,7 @@
               </a:defRPr>
             </a:defPPr>
             <a:lvl1pPr algn="r">
+              <a:buNone/>
               <a:defRPr sz="1125" b="1">
                 <a:solidFill>
                   <a:srgbClr val="162CD4"/>
@@ -11244,6 +11599,7 @@
               </a:defRPr>
             </a:lvl1pPr>
             <a:lvl2pPr algn="r">
+              <a:buNone/>
               <a:defRPr sz="1125" b="1">
                 <a:solidFill>
                   <a:srgbClr val="162CD4"/>
@@ -11254,6 +11610,7 @@
               </a:defRPr>
             </a:lvl2pPr>
             <a:lvl3pPr algn="r">
+              <a:buNone/>
               <a:defRPr sz="1125" b="1">
                 <a:solidFill>
                   <a:srgbClr val="162CD4"/>
@@ -11264,6 +11621,7 @@
               </a:defRPr>
             </a:lvl3pPr>
             <a:lvl4pPr algn="r">
+              <a:buNone/>
               <a:defRPr sz="1125" b="1">
                 <a:solidFill>
                   <a:srgbClr val="162CD4"/>
@@ -11274,6 +11632,7 @@
               </a:defRPr>
             </a:lvl4pPr>
             <a:lvl5pPr algn="r">
+              <a:buNone/>
               <a:defRPr sz="1125" b="1">
                 <a:solidFill>
                   <a:srgbClr val="162CD4"/>
@@ -11284,6 +11643,7 @@
               </a:defRPr>
             </a:lvl5pPr>
             <a:lvl6pPr algn="r">
+              <a:buNone/>
               <a:defRPr sz="1125" b="1">
                 <a:solidFill>
                   <a:srgbClr val="162CD4"/>
@@ -11294,6 +11654,7 @@
               </a:defRPr>
             </a:lvl6pPr>
             <a:lvl7pPr algn="r">
+              <a:buNone/>
               <a:defRPr sz="1125" b="1">
                 <a:solidFill>
                   <a:srgbClr val="162CD4"/>
@@ -11304,6 +11665,7 @@
               </a:defRPr>
             </a:lvl7pPr>
             <a:lvl8pPr algn="r">
+              <a:buNone/>
               <a:defRPr sz="1125" b="1">
                 <a:solidFill>
                   <a:srgbClr val="162CD4"/>
@@ -11314,6 +11676,7 @@
               </a:defRPr>
             </a:lvl8pPr>
             <a:lvl9pPr algn="r">
+              <a:buNone/>
               <a:defRPr sz="1125" b="1">
                 <a:solidFill>
                   <a:srgbClr val="162CD4"/>
@@ -11326,6 +11689,7 @@
           </a:lstStyle>
           <a:p xmlns:a="http://schemas.openxmlformats.org/drawingml/2006/main">
             <a:pPr algn="r">
+              <a:buNone/>
               <a:defRPr sz="1125" b="1">
                 <a:solidFill>
                   <a:srgbClr val="162CD4"/>
@@ -11453,6 +11817,7 @@
               </a:defRPr>
             </a:defPPr>
             <a:lvl1pPr>
+              <a:buNone/>
               <a:defRPr sz="3225" b="1">
                 <a:solidFill>
                   <a:srgbClr val="14213D"/>
@@ -11463,6 +11828,7 @@
               </a:defRPr>
             </a:lvl1pPr>
             <a:lvl2pPr>
+              <a:buNone/>
               <a:defRPr sz="3225" b="1">
                 <a:solidFill>
                   <a:srgbClr val="14213D"/>
@@ -11473,6 +11839,7 @@
               </a:defRPr>
             </a:lvl2pPr>
             <a:lvl3pPr>
+              <a:buNone/>
               <a:defRPr sz="3225" b="1">
                 <a:solidFill>
                   <a:srgbClr val="14213D"/>
@@ -11483,6 +11850,7 @@
               </a:defRPr>
             </a:lvl3pPr>
             <a:lvl4pPr>
+              <a:buNone/>
               <a:defRPr sz="3225" b="1">
                 <a:solidFill>
                   <a:srgbClr val="14213D"/>
@@ -11493,6 +11861,7 @@
               </a:defRPr>
             </a:lvl4pPr>
             <a:lvl5pPr>
+              <a:buNone/>
               <a:defRPr sz="3225" b="1">
                 <a:solidFill>
                   <a:srgbClr val="14213D"/>
@@ -11503,6 +11872,7 @@
               </a:defRPr>
             </a:lvl5pPr>
             <a:lvl6pPr>
+              <a:buNone/>
               <a:defRPr sz="3225" b="1">
                 <a:solidFill>
                   <a:srgbClr val="14213D"/>
@@ -11513,6 +11883,7 @@
               </a:defRPr>
             </a:lvl6pPr>
             <a:lvl7pPr>
+              <a:buNone/>
               <a:defRPr sz="3225" b="1">
                 <a:solidFill>
                   <a:srgbClr val="14213D"/>
@@ -11523,6 +11894,7 @@
               </a:defRPr>
             </a:lvl7pPr>
             <a:lvl8pPr>
+              <a:buNone/>
               <a:defRPr sz="3225" b="1">
                 <a:solidFill>
                   <a:srgbClr val="14213D"/>
@@ -11533,6 +11905,7 @@
               </a:defRPr>
             </a:lvl8pPr>
             <a:lvl9pPr>
+              <a:buNone/>
               <a:defRPr sz="3225" b="1">
                 <a:solidFill>
                   <a:srgbClr val="14213D"/>
@@ -11545,6 +11918,7 @@
           </a:lstStyle>
           <a:p xmlns:a="http://schemas.openxmlformats.org/drawingml/2006/main">
             <a:pPr>
+              <a:buNone/>
               <a:defRPr sz="3225" b="1">
                 <a:solidFill>
                   <a:srgbClr val="14213D"/>
@@ -11643,6 +12017,7 @@
               </a:defRPr>
             </a:defPPr>
             <a:lvl1pPr>
+              <a:buNone/>
               <a:defRPr sz="2025">
                 <a:solidFill>
                   <a:srgbClr val="52627A"/>
@@ -11653,6 +12028,7 @@
               </a:defRPr>
             </a:lvl1pPr>
             <a:lvl2pPr>
+              <a:buNone/>
               <a:defRPr sz="2025">
                 <a:solidFill>
                   <a:srgbClr val="52627A"/>
@@ -11663,6 +12039,7 @@
               </a:defRPr>
             </a:lvl2pPr>
             <a:lvl3pPr>
+              <a:buNone/>
               <a:defRPr sz="2025">
                 <a:solidFill>
                   <a:srgbClr val="52627A"/>
@@ -11673,6 +12050,7 @@
               </a:defRPr>
             </a:lvl3pPr>
             <a:lvl4pPr>
+              <a:buNone/>
               <a:defRPr sz="2025">
                 <a:solidFill>
                   <a:srgbClr val="52627A"/>
@@ -11683,6 +12061,7 @@
               </a:defRPr>
             </a:lvl4pPr>
             <a:lvl5pPr>
+              <a:buNone/>
               <a:defRPr sz="2025">
                 <a:solidFill>
                   <a:srgbClr val="52627A"/>
@@ -11693,6 +12072,7 @@
               </a:defRPr>
             </a:lvl5pPr>
             <a:lvl6pPr>
+              <a:buNone/>
               <a:defRPr sz="2025">
                 <a:solidFill>
                   <a:srgbClr val="52627A"/>
@@ -11703,6 +12083,7 @@
               </a:defRPr>
             </a:lvl6pPr>
             <a:lvl7pPr>
+              <a:buNone/>
               <a:defRPr sz="2025">
                 <a:solidFill>
                   <a:srgbClr val="52627A"/>
@@ -11713,6 +12094,7 @@
               </a:defRPr>
             </a:lvl7pPr>
             <a:lvl8pPr>
+              <a:buNone/>
               <a:defRPr sz="2025">
                 <a:solidFill>
                   <a:srgbClr val="52627A"/>
@@ -11723,6 +12105,7 @@
               </a:defRPr>
             </a:lvl8pPr>
             <a:lvl9pPr>
+              <a:buNone/>
               <a:defRPr sz="2025">
                 <a:solidFill>
                   <a:srgbClr val="52627A"/>
@@ -11806,6 +12189,7 @@
               </a:defRPr>
             </a:defPPr>
             <a:lvl1pPr>
+              <a:buNone/>
               <a:defRPr sz="1875">
                 <a:solidFill>
                   <a:srgbClr val="14213D"/>
@@ -11816,6 +12200,7 @@
               </a:defRPr>
             </a:lvl1pPr>
             <a:lvl2pPr>
+              <a:buNone/>
               <a:defRPr sz="1875">
                 <a:solidFill>
                   <a:srgbClr val="14213D"/>
@@ -11826,6 +12211,7 @@
               </a:defRPr>
             </a:lvl2pPr>
             <a:lvl3pPr>
+              <a:buNone/>
               <a:defRPr sz="1875">
                 <a:solidFill>
                   <a:srgbClr val="14213D"/>
@@ -11836,6 +12222,7 @@
               </a:defRPr>
             </a:lvl3pPr>
             <a:lvl4pPr>
+              <a:buNone/>
               <a:defRPr sz="1875">
                 <a:solidFill>
                   <a:srgbClr val="14213D"/>
@@ -11846,6 +12233,7 @@
               </a:defRPr>
             </a:lvl4pPr>
             <a:lvl5pPr>
+              <a:buNone/>
               <a:defRPr sz="1875">
                 <a:solidFill>
                   <a:srgbClr val="14213D"/>
@@ -11856,6 +12244,7 @@
               </a:defRPr>
             </a:lvl5pPr>
             <a:lvl6pPr>
+              <a:buNone/>
               <a:defRPr sz="1875">
                 <a:solidFill>
                   <a:srgbClr val="14213D"/>
@@ -11866,6 +12255,7 @@
               </a:defRPr>
             </a:lvl6pPr>
             <a:lvl7pPr>
+              <a:buNone/>
               <a:defRPr sz="1875">
                 <a:solidFill>
                   <a:srgbClr val="14213D"/>
@@ -11876,6 +12266,7 @@
               </a:defRPr>
             </a:lvl7pPr>
             <a:lvl8pPr>
+              <a:buNone/>
               <a:defRPr sz="1875">
                 <a:solidFill>
                   <a:srgbClr val="14213D"/>
@@ -11886,6 +12277,7 @@
               </a:defRPr>
             </a:lvl8pPr>
             <a:lvl9pPr>
+              <a:buNone/>
               <a:defRPr sz="1875">
                 <a:solidFill>
                   <a:srgbClr val="14213D"/>
@@ -12108,6 +12500,7 @@
               </a:defRPr>
             </a:defPPr>
             <a:lvl1pPr>
+              <a:buNone/>
               <a:defRPr sz="1125">
                 <a:solidFill>
                   <a:srgbClr val="52627A"/>
@@ -12118,6 +12511,7 @@
               </a:defRPr>
             </a:lvl1pPr>
             <a:lvl2pPr>
+              <a:buNone/>
               <a:defRPr sz="1125">
                 <a:solidFill>
                   <a:srgbClr val="52627A"/>
@@ -12128,6 +12522,7 @@
               </a:defRPr>
             </a:lvl2pPr>
             <a:lvl3pPr>
+              <a:buNone/>
               <a:defRPr sz="1125">
                 <a:solidFill>
                   <a:srgbClr val="52627A"/>
@@ -12138,6 +12533,7 @@
               </a:defRPr>
             </a:lvl3pPr>
             <a:lvl4pPr>
+              <a:buNone/>
               <a:defRPr sz="1125">
                 <a:solidFill>
                   <a:srgbClr val="52627A"/>
@@ -12148,6 +12544,7 @@
               </a:defRPr>
             </a:lvl4pPr>
             <a:lvl5pPr>
+              <a:buNone/>
               <a:defRPr sz="1125">
                 <a:solidFill>
                   <a:srgbClr val="52627A"/>
@@ -12158,6 +12555,7 @@
               </a:defRPr>
             </a:lvl5pPr>
             <a:lvl6pPr>
+              <a:buNone/>
               <a:defRPr sz="1125">
                 <a:solidFill>
                   <a:srgbClr val="52627A"/>
@@ -12168,6 +12566,7 @@
               </a:defRPr>
             </a:lvl6pPr>
             <a:lvl7pPr>
+              <a:buNone/>
               <a:defRPr sz="1125">
                 <a:solidFill>
                   <a:srgbClr val="52627A"/>
@@ -12178,6 +12577,7 @@
               </a:defRPr>
             </a:lvl7pPr>
             <a:lvl8pPr>
+              <a:buNone/>
               <a:defRPr sz="1125">
                 <a:solidFill>
                   <a:srgbClr val="52627A"/>
@@ -12188,6 +12588,7 @@
               </a:defRPr>
             </a:lvl8pPr>
             <a:lvl9pPr>
+              <a:buNone/>
               <a:defRPr sz="1125">
                 <a:solidFill>
                   <a:srgbClr val="52627A"/>
@@ -12200,6 +12601,7 @@
           </a:lstStyle>
           <a:p xmlns:a="http://schemas.openxmlformats.org/drawingml/2006/main">
             <a:pPr>
+              <a:buNone/>
               <a:defRPr sz="1125">
                 <a:solidFill>
                   <a:srgbClr val="52627A"/>
@@ -12267,6 +12669,7 @@
               </a:defRPr>
             </a:defPPr>
             <a:lvl1pPr algn="r">
+              <a:buNone/>
               <a:defRPr sz="1125" b="1">
                 <a:solidFill>
                   <a:srgbClr val="162CD4"/>
@@ -12277,6 +12680,7 @@
               </a:defRPr>
             </a:lvl1pPr>
             <a:lvl2pPr algn="r">
+              <a:buNone/>
               <a:defRPr sz="1125" b="1">
                 <a:solidFill>
                   <a:srgbClr val="162CD4"/>
@@ -12287,6 +12691,7 @@
               </a:defRPr>
             </a:lvl2pPr>
             <a:lvl3pPr algn="r">
+              <a:buNone/>
               <a:defRPr sz="1125" b="1">
                 <a:solidFill>
                   <a:srgbClr val="162CD4"/>
@@ -12297,6 +12702,7 @@
               </a:defRPr>
             </a:lvl3pPr>
             <a:lvl4pPr algn="r">
+              <a:buNone/>
               <a:defRPr sz="1125" b="1">
                 <a:solidFill>
                   <a:srgbClr val="162CD4"/>
@@ -12307,6 +12713,7 @@
               </a:defRPr>
             </a:lvl4pPr>
             <a:lvl5pPr algn="r">
+              <a:buNone/>
               <a:defRPr sz="1125" b="1">
                 <a:solidFill>
                   <a:srgbClr val="162CD4"/>
@@ -12317,6 +12724,7 @@
               </a:defRPr>
             </a:lvl5pPr>
             <a:lvl6pPr algn="r">
+              <a:buNone/>
               <a:defRPr sz="1125" b="1">
                 <a:solidFill>
                   <a:srgbClr val="162CD4"/>
@@ -12327,6 +12735,7 @@
               </a:defRPr>
             </a:lvl6pPr>
             <a:lvl7pPr algn="r">
+              <a:buNone/>
               <a:defRPr sz="1125" b="1">
                 <a:solidFill>
                   <a:srgbClr val="162CD4"/>
@@ -12337,6 +12746,7 @@
               </a:defRPr>
             </a:lvl7pPr>
             <a:lvl8pPr algn="r">
+              <a:buNone/>
               <a:defRPr sz="1125" b="1">
                 <a:solidFill>
                   <a:srgbClr val="162CD4"/>
@@ -12347,6 +12757,7 @@
               </a:defRPr>
             </a:lvl8pPr>
             <a:lvl9pPr algn="r">
+              <a:buNone/>
               <a:defRPr sz="1125" b="1">
                 <a:solidFill>
                   <a:srgbClr val="162CD4"/>
@@ -12359,6 +12770,7 @@
           </a:lstStyle>
           <a:p xmlns:a="http://schemas.openxmlformats.org/drawingml/2006/main">
             <a:pPr algn="r">
+              <a:buNone/>
               <a:defRPr sz="1125" b="1">
                 <a:solidFill>
                   <a:srgbClr val="162CD4"/>
@@ -12486,6 +12898,7 @@
               </a:defRPr>
             </a:defPPr>
             <a:lvl1pPr>
+              <a:buNone/>
               <a:defRPr sz="3225" b="1">
                 <a:solidFill>
                   <a:srgbClr val="14213D"/>
@@ -12496,6 +12909,7 @@
               </a:defRPr>
             </a:lvl1pPr>
             <a:lvl2pPr>
+              <a:buNone/>
               <a:defRPr sz="3225" b="1">
                 <a:solidFill>
                   <a:srgbClr val="14213D"/>
@@ -12506,6 +12920,7 @@
               </a:defRPr>
             </a:lvl2pPr>
             <a:lvl3pPr>
+              <a:buNone/>
               <a:defRPr sz="3225" b="1">
                 <a:solidFill>
                   <a:srgbClr val="14213D"/>
@@ -12516,6 +12931,7 @@
               </a:defRPr>
             </a:lvl3pPr>
             <a:lvl4pPr>
+              <a:buNone/>
               <a:defRPr sz="3225" b="1">
                 <a:solidFill>
                   <a:srgbClr val="14213D"/>
@@ -12526,6 +12942,7 @@
               </a:defRPr>
             </a:lvl4pPr>
             <a:lvl5pPr>
+              <a:buNone/>
               <a:defRPr sz="3225" b="1">
                 <a:solidFill>
                   <a:srgbClr val="14213D"/>
@@ -12536,6 +12953,7 @@
               </a:defRPr>
             </a:lvl5pPr>
             <a:lvl6pPr>
+              <a:buNone/>
               <a:defRPr sz="3225" b="1">
                 <a:solidFill>
                   <a:srgbClr val="14213D"/>
@@ -12546,6 +12964,7 @@
               </a:defRPr>
             </a:lvl6pPr>
             <a:lvl7pPr>
+              <a:buNone/>
               <a:defRPr sz="3225" b="1">
                 <a:solidFill>
                   <a:srgbClr val="14213D"/>
@@ -12556,6 +12975,7 @@
               </a:defRPr>
             </a:lvl7pPr>
             <a:lvl8pPr>
+              <a:buNone/>
               <a:defRPr sz="3225" b="1">
                 <a:solidFill>
                   <a:srgbClr val="14213D"/>
@@ -12566,6 +12986,7 @@
               </a:defRPr>
             </a:lvl8pPr>
             <a:lvl9pPr>
+              <a:buNone/>
               <a:defRPr sz="3225" b="1">
                 <a:solidFill>
                   <a:srgbClr val="14213D"/>
@@ -12578,6 +12999,7 @@
           </a:lstStyle>
           <a:p xmlns:a="http://schemas.openxmlformats.org/drawingml/2006/main">
             <a:pPr>
+              <a:buNone/>
               <a:defRPr sz="3225" b="1">
                 <a:solidFill>
                   <a:srgbClr val="14213D"/>
@@ -12676,6 +13098,7 @@
               </a:defRPr>
             </a:defPPr>
             <a:lvl1pPr>
+              <a:buNone/>
               <a:defRPr sz="2025">
                 <a:solidFill>
                   <a:srgbClr val="52627A"/>
@@ -12686,6 +13109,7 @@
               </a:defRPr>
             </a:lvl1pPr>
             <a:lvl2pPr>
+              <a:buNone/>
               <a:defRPr sz="2025">
                 <a:solidFill>
                   <a:srgbClr val="52627A"/>
@@ -12696,6 +13120,7 @@
               </a:defRPr>
             </a:lvl2pPr>
             <a:lvl3pPr>
+              <a:buNone/>
               <a:defRPr sz="2025">
                 <a:solidFill>
                   <a:srgbClr val="52627A"/>
@@ -12706,6 +13131,7 @@
               </a:defRPr>
             </a:lvl3pPr>
             <a:lvl4pPr>
+              <a:buNone/>
               <a:defRPr sz="2025">
                 <a:solidFill>
                   <a:srgbClr val="52627A"/>
@@ -12716,6 +13142,7 @@
               </a:defRPr>
             </a:lvl4pPr>
             <a:lvl5pPr>
+              <a:buNone/>
               <a:defRPr sz="2025">
                 <a:solidFill>
                   <a:srgbClr val="52627A"/>
@@ -12726,6 +13153,7 @@
               </a:defRPr>
             </a:lvl5pPr>
             <a:lvl6pPr>
+              <a:buNone/>
               <a:defRPr sz="2025">
                 <a:solidFill>
                   <a:srgbClr val="52627A"/>
@@ -12736,6 +13164,7 @@
               </a:defRPr>
             </a:lvl6pPr>
             <a:lvl7pPr>
+              <a:buNone/>
               <a:defRPr sz="2025">
                 <a:solidFill>
                   <a:srgbClr val="52627A"/>
@@ -12746,6 +13175,7 @@
               </a:defRPr>
             </a:lvl7pPr>
             <a:lvl8pPr>
+              <a:buNone/>
               <a:defRPr sz="2025">
                 <a:solidFill>
                   <a:srgbClr val="52627A"/>
@@ -12756,6 +13186,7 @@
               </a:defRPr>
             </a:lvl8pPr>
             <a:lvl9pPr>
+              <a:buNone/>
               <a:defRPr sz="2025">
                 <a:solidFill>
                   <a:srgbClr val="52627A"/>
@@ -12839,6 +13270,7 @@
               </a:defRPr>
             </a:defPPr>
             <a:lvl1pPr>
+              <a:buNone/>
               <a:defRPr sz="1875">
                 <a:solidFill>
                   <a:srgbClr val="14213D"/>
@@ -12849,6 +13281,7 @@
               </a:defRPr>
             </a:lvl1pPr>
             <a:lvl2pPr>
+              <a:buNone/>
               <a:defRPr sz="1875">
                 <a:solidFill>
                   <a:srgbClr val="14213D"/>
@@ -12859,6 +13292,7 @@
               </a:defRPr>
             </a:lvl2pPr>
             <a:lvl3pPr>
+              <a:buNone/>
               <a:defRPr sz="1875">
                 <a:solidFill>
                   <a:srgbClr val="14213D"/>
@@ -12869,6 +13303,7 @@
               </a:defRPr>
             </a:lvl3pPr>
             <a:lvl4pPr>
+              <a:buNone/>
               <a:defRPr sz="1875">
                 <a:solidFill>
                   <a:srgbClr val="14213D"/>
@@ -12879,6 +13314,7 @@
               </a:defRPr>
             </a:lvl4pPr>
             <a:lvl5pPr>
+              <a:buNone/>
               <a:defRPr sz="1875">
                 <a:solidFill>
                   <a:srgbClr val="14213D"/>
@@ -12889,6 +13325,7 @@
               </a:defRPr>
             </a:lvl5pPr>
             <a:lvl6pPr>
+              <a:buNone/>
               <a:defRPr sz="1875">
                 <a:solidFill>
                   <a:srgbClr val="14213D"/>
@@ -12899,6 +13336,7 @@
               </a:defRPr>
             </a:lvl6pPr>
             <a:lvl7pPr>
+              <a:buNone/>
               <a:defRPr sz="1875">
                 <a:solidFill>
                   <a:srgbClr val="14213D"/>
@@ -12909,6 +13347,7 @@
               </a:defRPr>
             </a:lvl7pPr>
             <a:lvl8pPr>
+              <a:buNone/>
               <a:defRPr sz="1875">
                 <a:solidFill>
                   <a:srgbClr val="14213D"/>
@@ -12919,6 +13358,7 @@
               </a:defRPr>
             </a:lvl8pPr>
             <a:lvl9pPr>
+              <a:buNone/>
               <a:defRPr sz="1875">
                 <a:solidFill>
                   <a:srgbClr val="14213D"/>
@@ -13141,6 +13581,7 @@
               </a:defRPr>
             </a:defPPr>
             <a:lvl1pPr>
+              <a:buNone/>
               <a:defRPr sz="1125">
                 <a:solidFill>
                   <a:srgbClr val="52627A"/>
@@ -13151,6 +13592,7 @@
               </a:defRPr>
             </a:lvl1pPr>
             <a:lvl2pPr>
+              <a:buNone/>
               <a:defRPr sz="1125">
                 <a:solidFill>
                   <a:srgbClr val="52627A"/>
@@ -13161,6 +13603,7 @@
               </a:defRPr>
             </a:lvl2pPr>
             <a:lvl3pPr>
+              <a:buNone/>
               <a:defRPr sz="1125">
                 <a:solidFill>
                   <a:srgbClr val="52627A"/>
@@ -13171,6 +13614,7 @@
               </a:defRPr>
             </a:lvl3pPr>
             <a:lvl4pPr>
+              <a:buNone/>
               <a:defRPr sz="1125">
                 <a:solidFill>
                   <a:srgbClr val="52627A"/>
@@ -13181,6 +13625,7 @@
               </a:defRPr>
             </a:lvl4pPr>
             <a:lvl5pPr>
+              <a:buNone/>
               <a:defRPr sz="1125">
                 <a:solidFill>
                   <a:srgbClr val="52627A"/>
@@ -13191,6 +13636,7 @@
               </a:defRPr>
             </a:lvl5pPr>
             <a:lvl6pPr>
+              <a:buNone/>
               <a:defRPr sz="1125">
                 <a:solidFill>
                   <a:srgbClr val="52627A"/>
@@ -13201,6 +13647,7 @@
               </a:defRPr>
             </a:lvl6pPr>
             <a:lvl7pPr>
+              <a:buNone/>
               <a:defRPr sz="1125">
                 <a:solidFill>
                   <a:srgbClr val="52627A"/>
@@ -13211,6 +13658,7 @@
               </a:defRPr>
             </a:lvl7pPr>
             <a:lvl8pPr>
+              <a:buNone/>
               <a:defRPr sz="1125">
                 <a:solidFill>
                   <a:srgbClr val="52627A"/>
@@ -13221,6 +13669,7 @@
               </a:defRPr>
             </a:lvl8pPr>
             <a:lvl9pPr>
+              <a:buNone/>
               <a:defRPr sz="1125">
                 <a:solidFill>
                   <a:srgbClr val="52627A"/>
@@ -13233,6 +13682,7 @@
           </a:lstStyle>
           <a:p xmlns:a="http://schemas.openxmlformats.org/drawingml/2006/main">
             <a:pPr>
+              <a:buNone/>
               <a:defRPr sz="1125">
                 <a:solidFill>
                   <a:srgbClr val="52627A"/>
@@ -13300,6 +13750,7 @@
               </a:defRPr>
             </a:defPPr>
             <a:lvl1pPr algn="r">
+              <a:buNone/>
               <a:defRPr sz="1125" b="1">
                 <a:solidFill>
                   <a:srgbClr val="162CD4"/>
@@ -13310,6 +13761,7 @@
               </a:defRPr>
             </a:lvl1pPr>
             <a:lvl2pPr algn="r">
+              <a:buNone/>
               <a:defRPr sz="1125" b="1">
                 <a:solidFill>
                   <a:srgbClr val="162CD4"/>
@@ -13320,6 +13772,7 @@
               </a:defRPr>
             </a:lvl2pPr>
             <a:lvl3pPr algn="r">
+              <a:buNone/>
               <a:defRPr sz="1125" b="1">
                 <a:solidFill>
                   <a:srgbClr val="162CD4"/>
@@ -13330,6 +13783,7 @@
               </a:defRPr>
             </a:lvl3pPr>
             <a:lvl4pPr algn="r">
+              <a:buNone/>
               <a:defRPr sz="1125" b="1">
                 <a:solidFill>
                   <a:srgbClr val="162CD4"/>
@@ -13340,6 +13794,7 @@
               </a:defRPr>
             </a:lvl4pPr>
             <a:lvl5pPr algn="r">
+              <a:buNone/>
               <a:defRPr sz="1125" b="1">
                 <a:solidFill>
                   <a:srgbClr val="162CD4"/>
@@ -13350,6 +13805,7 @@
               </a:defRPr>
             </a:lvl5pPr>
             <a:lvl6pPr algn="r">
+              <a:buNone/>
               <a:defRPr sz="1125" b="1">
                 <a:solidFill>
                   <a:srgbClr val="162CD4"/>
@@ -13360,6 +13816,7 @@
               </a:defRPr>
             </a:lvl6pPr>
             <a:lvl7pPr algn="r">
+              <a:buNone/>
               <a:defRPr sz="1125" b="1">
                 <a:solidFill>
                   <a:srgbClr val="162CD4"/>
@@ -13370,6 +13827,7 @@
               </a:defRPr>
             </a:lvl7pPr>
             <a:lvl8pPr algn="r">
+              <a:buNone/>
               <a:defRPr sz="1125" b="1">
                 <a:solidFill>
                   <a:srgbClr val="162CD4"/>
@@ -13380,6 +13838,7 @@
               </a:defRPr>
             </a:lvl8pPr>
             <a:lvl9pPr algn="r">
+              <a:buNone/>
               <a:defRPr sz="1125" b="1">
                 <a:solidFill>
                   <a:srgbClr val="162CD4"/>
@@ -13392,6 +13851,7 @@
           </a:lstStyle>
           <a:p xmlns:a="http://schemas.openxmlformats.org/drawingml/2006/main">
             <a:pPr algn="r">
+              <a:buNone/>
               <a:defRPr sz="1125" b="1">
                 <a:solidFill>
                   <a:srgbClr val="162CD4"/>
@@ -13519,6 +13979,7 @@
               </a:defRPr>
             </a:defPPr>
             <a:lvl1pPr>
+              <a:buNone/>
               <a:defRPr sz="3225" b="1">
                 <a:solidFill>
                   <a:srgbClr val="14213D"/>
@@ -13529,6 +13990,7 @@
               </a:defRPr>
             </a:lvl1pPr>
             <a:lvl2pPr>
+              <a:buNone/>
               <a:defRPr sz="3225" b="1">
                 <a:solidFill>
                   <a:srgbClr val="14213D"/>
@@ -13539,6 +14001,7 @@
               </a:defRPr>
             </a:lvl2pPr>
             <a:lvl3pPr>
+              <a:buNone/>
               <a:defRPr sz="3225" b="1">
                 <a:solidFill>
                   <a:srgbClr val="14213D"/>
@@ -13549,6 +14012,7 @@
               </a:defRPr>
             </a:lvl3pPr>
             <a:lvl4pPr>
+              <a:buNone/>
               <a:defRPr sz="3225" b="1">
                 <a:solidFill>
                   <a:srgbClr val="14213D"/>
@@ -13559,6 +14023,7 @@
               </a:defRPr>
             </a:lvl4pPr>
             <a:lvl5pPr>
+              <a:buNone/>
               <a:defRPr sz="3225" b="1">
                 <a:solidFill>
                   <a:srgbClr val="14213D"/>
@@ -13569,6 +14034,7 @@
               </a:defRPr>
             </a:lvl5pPr>
             <a:lvl6pPr>
+              <a:buNone/>
               <a:defRPr sz="3225" b="1">
                 <a:solidFill>
                   <a:srgbClr val="14213D"/>
@@ -13579,6 +14045,7 @@
               </a:defRPr>
             </a:lvl6pPr>
             <a:lvl7pPr>
+              <a:buNone/>
               <a:defRPr sz="3225" b="1">
                 <a:solidFill>
                   <a:srgbClr val="14213D"/>
@@ -13589,6 +14056,7 @@
               </a:defRPr>
             </a:lvl7pPr>
             <a:lvl8pPr>
+              <a:buNone/>
               <a:defRPr sz="3225" b="1">
                 <a:solidFill>
                   <a:srgbClr val="14213D"/>
@@ -13599,6 +14067,7 @@
               </a:defRPr>
             </a:lvl8pPr>
             <a:lvl9pPr>
+              <a:buNone/>
               <a:defRPr sz="3225" b="1">
                 <a:solidFill>
                   <a:srgbClr val="14213D"/>
@@ -13611,6 +14080,7 @@
           </a:lstStyle>
           <a:p xmlns:a="http://schemas.openxmlformats.org/drawingml/2006/main">
             <a:pPr>
+              <a:buNone/>
               <a:defRPr sz="3225" b="1">
                 <a:solidFill>
                   <a:srgbClr val="14213D"/>
@@ -13709,6 +14179,7 @@
               </a:defRPr>
             </a:defPPr>
             <a:lvl1pPr>
+              <a:buNone/>
               <a:defRPr sz="2025">
                 <a:solidFill>
                   <a:srgbClr val="52627A"/>
@@ -13719,6 +14190,7 @@
               </a:defRPr>
             </a:lvl1pPr>
             <a:lvl2pPr>
+              <a:buNone/>
               <a:defRPr sz="2025">
                 <a:solidFill>
                   <a:srgbClr val="52627A"/>
@@ -13729,6 +14201,7 @@
               </a:defRPr>
             </a:lvl2pPr>
             <a:lvl3pPr>
+              <a:buNone/>
               <a:defRPr sz="2025">
                 <a:solidFill>
                   <a:srgbClr val="52627A"/>
@@ -13739,6 +14212,7 @@
               </a:defRPr>
             </a:lvl3pPr>
             <a:lvl4pPr>
+              <a:buNone/>
               <a:defRPr sz="2025">
                 <a:solidFill>
                   <a:srgbClr val="52627A"/>
@@ -13749,6 +14223,7 @@
               </a:defRPr>
             </a:lvl4pPr>
             <a:lvl5pPr>
+              <a:buNone/>
               <a:defRPr sz="2025">
                 <a:solidFill>
                   <a:srgbClr val="52627A"/>
@@ -13759,6 +14234,7 @@
               </a:defRPr>
             </a:lvl5pPr>
             <a:lvl6pPr>
+              <a:buNone/>
               <a:defRPr sz="2025">
                 <a:solidFill>
                   <a:srgbClr val="52627A"/>
@@ -13769,6 +14245,7 @@
               </a:defRPr>
             </a:lvl6pPr>
             <a:lvl7pPr>
+              <a:buNone/>
               <a:defRPr sz="2025">
                 <a:solidFill>
                   <a:srgbClr val="52627A"/>
@@ -13779,6 +14256,7 @@
               </a:defRPr>
             </a:lvl7pPr>
             <a:lvl8pPr>
+              <a:buNone/>
               <a:defRPr sz="2025">
                 <a:solidFill>
                   <a:srgbClr val="52627A"/>
@@ -13789,6 +14267,7 @@
               </a:defRPr>
             </a:lvl8pPr>
             <a:lvl9pPr>
+              <a:buNone/>
               <a:defRPr sz="2025">
                 <a:solidFill>
                   <a:srgbClr val="52627A"/>
@@ -13861,7 +14340,7 @@
             <a:normAutofit fontScale="100000"/>
           </a:bodyPr>
           <a:lstStyle xmlns:a="http://schemas.openxmlformats.org/drawingml/2006/main">
-            <a:defPPr>
+            <a:defPPr algn="l">
               <a:defRPr sz="1875">
                 <a:solidFill>
                   <a:srgbClr val="14213D"/>
@@ -13871,7 +14350,8 @@
                 <a:cs typeface="Arial"/>
               </a:defRPr>
             </a:defPPr>
-            <a:lvl1pPr>
+            <a:lvl1pPr algn="l">
+              <a:buNone/>
               <a:defRPr sz="1875">
                 <a:solidFill>
                   <a:srgbClr val="14213D"/>
@@ -13881,7 +14361,8 @@
                 <a:cs typeface="Arial"/>
               </a:defRPr>
             </a:lvl1pPr>
-            <a:lvl2pPr>
+            <a:lvl2pPr algn="l">
+              <a:buNone/>
               <a:defRPr sz="1875">
                 <a:solidFill>
                   <a:srgbClr val="14213D"/>
@@ -13891,7 +14372,8 @@
                 <a:cs typeface="Arial"/>
               </a:defRPr>
             </a:lvl2pPr>
-            <a:lvl3pPr>
+            <a:lvl3pPr algn="l">
+              <a:buNone/>
               <a:defRPr sz="1875">
                 <a:solidFill>
                   <a:srgbClr val="14213D"/>
@@ -13901,7 +14383,8 @@
                 <a:cs typeface="Arial"/>
               </a:defRPr>
             </a:lvl3pPr>
-            <a:lvl4pPr>
+            <a:lvl4pPr algn="l">
+              <a:buNone/>
               <a:defRPr sz="1875">
                 <a:solidFill>
                   <a:srgbClr val="14213D"/>
@@ -13911,7 +14394,8 @@
                 <a:cs typeface="Arial"/>
               </a:defRPr>
             </a:lvl4pPr>
-            <a:lvl5pPr>
+            <a:lvl5pPr algn="l">
+              <a:buNone/>
               <a:defRPr sz="1875">
                 <a:solidFill>
                   <a:srgbClr val="14213D"/>
@@ -13921,7 +14405,8 @@
                 <a:cs typeface="Arial"/>
               </a:defRPr>
             </a:lvl5pPr>
-            <a:lvl6pPr>
+            <a:lvl6pPr algn="l">
+              <a:buNone/>
               <a:defRPr sz="1875">
                 <a:solidFill>
                   <a:srgbClr val="14213D"/>
@@ -13931,7 +14416,8 @@
                 <a:cs typeface="Arial"/>
               </a:defRPr>
             </a:lvl6pPr>
-            <a:lvl7pPr>
+            <a:lvl7pPr algn="l">
+              <a:buNone/>
               <a:defRPr sz="1875">
                 <a:solidFill>
                   <a:srgbClr val="14213D"/>
@@ -13941,7 +14427,8 @@
                 <a:cs typeface="Arial"/>
               </a:defRPr>
             </a:lvl7pPr>
-            <a:lvl8pPr>
+            <a:lvl8pPr algn="l">
+              <a:buNone/>
               <a:defRPr sz="1875">
                 <a:solidFill>
                   <a:srgbClr val="14213D"/>
@@ -13951,7 +14438,8 @@
                 <a:cs typeface="Arial"/>
               </a:defRPr>
             </a:lvl8pPr>
-            <a:lvl9pPr>
+            <a:lvl9pPr algn="l">
+              <a:buNone/>
               <a:defRPr sz="1875">
                 <a:solidFill>
                   <a:srgbClr val="14213D"/>
@@ -13963,7 +14451,7 @@
             </a:lvl9pPr>
           </a:lstStyle>
           <a:p xmlns:a="http://schemas.openxmlformats.org/drawingml/2006/main">
-            <a:pPr>
+            <a:pPr algn="l">
               <a:lnSpc>
                 <a:spcPct val="120000"/>
               </a:lnSpc>
@@ -13986,11 +14474,11 @@
                 <a:ea typeface="Arial"/>
                 <a:cs typeface="Arial"/>
               </a:rPr>
-              <a:t>01   Staff or backend owns active tutor records</a:t>
+              <a:t>01   Staff/backend owns active tutor records</a:t>
             </a:r>
           </a:p>
           <a:p xmlns:a="http://schemas.openxmlformats.org/drawingml/2006/main">
-            <a:pPr>
+            <a:pPr algn="l">
               <a:lnSpc>
                 <a:spcPct val="120000"/>
               </a:lnSpc>
@@ -14013,11 +14501,11 @@
                 <a:ea typeface="Arial"/>
                 <a:cs typeface="Arial"/>
               </a:rPr>
-              <a:t>02   Parent creates a connection request only after authentication</a:t>
+              <a:t>02   Parent/applicant roles cannot be created together</a:t>
             </a:r>
           </a:p>
           <a:p xmlns:a="http://schemas.openxmlformats.org/drawingml/2006/main">
-            <a:pPr>
+            <a:pPr algn="l">
               <a:lnSpc>
                 <a:spcPct val="120000"/>
               </a:lnSpc>
@@ -14040,11 +14528,11 @@
                 <a:ea typeface="Arial"/>
                 <a:cs typeface="Arial"/>
               </a:rPr>
-              <a:t>03   Consultant/backend authors proposals and class revisions</a:t>
+              <a:t>03   Responses require current, pending, unexpired proposals</a:t>
             </a:r>
           </a:p>
           <a:p xmlns:a="http://schemas.openxmlformats.org/drawingml/2006/main">
-            <a:pPr>
+            <a:pPr algn="l">
               <a:lnSpc>
                 <a:spcPct val="120000"/>
               </a:lnSpc>
@@ -14067,11 +14555,11 @@
                 <a:ea typeface="Arial"/>
                 <a:cs typeface="Arial"/>
               </a:rPr>
-              <a:t>04   Trusted backend creates invoices and verifies payment</a:t>
+              <a:t>04   Backend creates invoices and verifies real payment</a:t>
             </a:r>
           </a:p>
           <a:p xmlns:a="http://schemas.openxmlformats.org/drawingml/2006/main">
-            <a:pPr>
+            <a:pPr algn="l">
               <a:lnSpc>
                 <a:spcPct val="120000"/>
               </a:lnSpc>
@@ -14094,7 +14582,7 @@
                 <a:ea typeface="Arial"/>
                 <a:cs typeface="Arial"/>
               </a:rPr>
-              <a:t>05   Only backend can publish the official schedule</a:t>
+              <a:t>05   Only backend publishes the official schedule</a:t>
             </a:r>
           </a:p>
         </p:txBody>
@@ -14174,6 +14662,7 @@
               </a:defRPr>
             </a:defPPr>
             <a:lvl1pPr>
+              <a:buNone/>
               <a:defRPr sz="1125">
                 <a:solidFill>
                   <a:srgbClr val="52627A"/>
@@ -14184,6 +14673,7 @@
               </a:defRPr>
             </a:lvl1pPr>
             <a:lvl2pPr>
+              <a:buNone/>
               <a:defRPr sz="1125">
                 <a:solidFill>
                   <a:srgbClr val="52627A"/>
@@ -14194,6 +14684,7 @@
               </a:defRPr>
             </a:lvl2pPr>
             <a:lvl3pPr>
+              <a:buNone/>
               <a:defRPr sz="1125">
                 <a:solidFill>
                   <a:srgbClr val="52627A"/>
@@ -14204,6 +14695,7 @@
               </a:defRPr>
             </a:lvl3pPr>
             <a:lvl4pPr>
+              <a:buNone/>
               <a:defRPr sz="1125">
                 <a:solidFill>
                   <a:srgbClr val="52627A"/>
@@ -14214,6 +14706,7 @@
               </a:defRPr>
             </a:lvl4pPr>
             <a:lvl5pPr>
+              <a:buNone/>
               <a:defRPr sz="1125">
                 <a:solidFill>
                   <a:srgbClr val="52627A"/>
@@ -14224,6 +14717,7 @@
               </a:defRPr>
             </a:lvl5pPr>
             <a:lvl6pPr>
+              <a:buNone/>
               <a:defRPr sz="1125">
                 <a:solidFill>
                   <a:srgbClr val="52627A"/>
@@ -14234,6 +14728,7 @@
               </a:defRPr>
             </a:lvl6pPr>
             <a:lvl7pPr>
+              <a:buNone/>
               <a:defRPr sz="1125">
                 <a:solidFill>
                   <a:srgbClr val="52627A"/>
@@ -14244,6 +14739,7 @@
               </a:defRPr>
             </a:lvl7pPr>
             <a:lvl8pPr>
+              <a:buNone/>
               <a:defRPr sz="1125">
                 <a:solidFill>
                   <a:srgbClr val="52627A"/>
@@ -14254,6 +14750,7 @@
               </a:defRPr>
             </a:lvl8pPr>
             <a:lvl9pPr>
+              <a:buNone/>
               <a:defRPr sz="1125">
                 <a:solidFill>
                   <a:srgbClr val="52627A"/>
@@ -14266,6 +14763,7 @@
           </a:lstStyle>
           <a:p xmlns:a="http://schemas.openxmlformats.org/drawingml/2006/main">
             <a:pPr>
+              <a:buNone/>
               <a:defRPr sz="1125">
                 <a:solidFill>
                   <a:srgbClr val="52627A"/>
@@ -14333,6 +14831,7 @@
               </a:defRPr>
             </a:defPPr>
             <a:lvl1pPr algn="r">
+              <a:buNone/>
               <a:defRPr sz="1125" b="1">
                 <a:solidFill>
                   <a:srgbClr val="162CD4"/>
@@ -14343,6 +14842,7 @@
               </a:defRPr>
             </a:lvl1pPr>
             <a:lvl2pPr algn="r">
+              <a:buNone/>
               <a:defRPr sz="1125" b="1">
                 <a:solidFill>
                   <a:srgbClr val="162CD4"/>
@@ -14353,6 +14853,7 @@
               </a:defRPr>
             </a:lvl2pPr>
             <a:lvl3pPr algn="r">
+              <a:buNone/>
               <a:defRPr sz="1125" b="1">
                 <a:solidFill>
                   <a:srgbClr val="162CD4"/>
@@ -14363,6 +14864,7 @@
               </a:defRPr>
             </a:lvl3pPr>
             <a:lvl4pPr algn="r">
+              <a:buNone/>
               <a:defRPr sz="1125" b="1">
                 <a:solidFill>
                   <a:srgbClr val="162CD4"/>
@@ -14373,6 +14875,7 @@
               </a:defRPr>
             </a:lvl4pPr>
             <a:lvl5pPr algn="r">
+              <a:buNone/>
               <a:defRPr sz="1125" b="1">
                 <a:solidFill>
                   <a:srgbClr val="162CD4"/>
@@ -14383,6 +14886,7 @@
               </a:defRPr>
             </a:lvl5pPr>
             <a:lvl6pPr algn="r">
+              <a:buNone/>
               <a:defRPr sz="1125" b="1">
                 <a:solidFill>
                   <a:srgbClr val="162CD4"/>
@@ -14393,6 +14897,7 @@
               </a:defRPr>
             </a:lvl6pPr>
             <a:lvl7pPr algn="r">
+              <a:buNone/>
               <a:defRPr sz="1125" b="1">
                 <a:solidFill>
                   <a:srgbClr val="162CD4"/>
@@ -14403,6 +14908,7 @@
               </a:defRPr>
             </a:lvl7pPr>
             <a:lvl8pPr algn="r">
+              <a:buNone/>
               <a:defRPr sz="1125" b="1">
                 <a:solidFill>
                   <a:srgbClr val="162CD4"/>
@@ -14413,6 +14919,7 @@
               </a:defRPr>
             </a:lvl8pPr>
             <a:lvl9pPr algn="r">
+              <a:buNone/>
               <a:defRPr sz="1125" b="1">
                 <a:solidFill>
                   <a:srgbClr val="162CD4"/>
@@ -14425,6 +14932,7 @@
           </a:lstStyle>
           <a:p xmlns:a="http://schemas.openxmlformats.org/drawingml/2006/main">
             <a:pPr algn="r">
+              <a:buNone/>
               <a:defRPr sz="1125" b="1">
                 <a:solidFill>
                   <a:srgbClr val="162CD4"/>
@@ -14552,6 +15060,7 @@
               </a:defRPr>
             </a:defPPr>
             <a:lvl1pPr>
+              <a:buNone/>
               <a:defRPr sz="3225" b="1">
                 <a:solidFill>
                   <a:srgbClr val="14213D"/>
@@ -14562,6 +15071,7 @@
               </a:defRPr>
             </a:lvl1pPr>
             <a:lvl2pPr>
+              <a:buNone/>
               <a:defRPr sz="3225" b="1">
                 <a:solidFill>
                   <a:srgbClr val="14213D"/>
@@ -14572,6 +15082,7 @@
               </a:defRPr>
             </a:lvl2pPr>
             <a:lvl3pPr>
+              <a:buNone/>
               <a:defRPr sz="3225" b="1">
                 <a:solidFill>
                   <a:srgbClr val="14213D"/>
@@ -14582,6 +15093,7 @@
               </a:defRPr>
             </a:lvl3pPr>
             <a:lvl4pPr>
+              <a:buNone/>
               <a:defRPr sz="3225" b="1">
                 <a:solidFill>
                   <a:srgbClr val="14213D"/>
@@ -14592,6 +15104,7 @@
               </a:defRPr>
             </a:lvl4pPr>
             <a:lvl5pPr>
+              <a:buNone/>
               <a:defRPr sz="3225" b="1">
                 <a:solidFill>
                   <a:srgbClr val="14213D"/>
@@ -14602,6 +15115,7 @@
               </a:defRPr>
             </a:lvl5pPr>
             <a:lvl6pPr>
+              <a:buNone/>
               <a:defRPr sz="3225" b="1">
                 <a:solidFill>
                   <a:srgbClr val="14213D"/>
@@ -14612,6 +15126,7 @@
               </a:defRPr>
             </a:lvl6pPr>
             <a:lvl7pPr>
+              <a:buNone/>
               <a:defRPr sz="3225" b="1">
                 <a:solidFill>
                   <a:srgbClr val="14213D"/>
@@ -14622,6 +15137,7 @@
               </a:defRPr>
             </a:lvl7pPr>
             <a:lvl8pPr>
+              <a:buNone/>
               <a:defRPr sz="3225" b="1">
                 <a:solidFill>
                   <a:srgbClr val="14213D"/>
@@ -14632,6 +15148,7 @@
               </a:defRPr>
             </a:lvl8pPr>
             <a:lvl9pPr>
+              <a:buNone/>
               <a:defRPr sz="3225" b="1">
                 <a:solidFill>
                   <a:srgbClr val="14213D"/>
@@ -14644,6 +15161,7 @@
           </a:lstStyle>
           <a:p xmlns:a="http://schemas.openxmlformats.org/drawingml/2006/main">
             <a:pPr>
+              <a:buNone/>
               <a:defRPr sz="3225" b="1">
                 <a:solidFill>
                   <a:srgbClr val="14213D"/>
@@ -14742,6 +15260,7 @@
               </a:defRPr>
             </a:defPPr>
             <a:lvl1pPr>
+              <a:buNone/>
               <a:defRPr sz="2025">
                 <a:solidFill>
                   <a:srgbClr val="52627A"/>
@@ -14752,6 +15271,7 @@
               </a:defRPr>
             </a:lvl1pPr>
             <a:lvl2pPr>
+              <a:buNone/>
               <a:defRPr sz="2025">
                 <a:solidFill>
                   <a:srgbClr val="52627A"/>
@@ -14762,6 +15282,7 @@
               </a:defRPr>
             </a:lvl2pPr>
             <a:lvl3pPr>
+              <a:buNone/>
               <a:defRPr sz="2025">
                 <a:solidFill>
                   <a:srgbClr val="52627A"/>
@@ -14772,6 +15293,7 @@
               </a:defRPr>
             </a:lvl3pPr>
             <a:lvl4pPr>
+              <a:buNone/>
               <a:defRPr sz="2025">
                 <a:solidFill>
                   <a:srgbClr val="52627A"/>
@@ -14782,6 +15304,7 @@
               </a:defRPr>
             </a:lvl4pPr>
             <a:lvl5pPr>
+              <a:buNone/>
               <a:defRPr sz="2025">
                 <a:solidFill>
                   <a:srgbClr val="52627A"/>
@@ -14792,6 +15315,7 @@
               </a:defRPr>
             </a:lvl5pPr>
             <a:lvl6pPr>
+              <a:buNone/>
               <a:defRPr sz="2025">
                 <a:solidFill>
                   <a:srgbClr val="52627A"/>
@@ -14802,6 +15326,7 @@
               </a:defRPr>
             </a:lvl6pPr>
             <a:lvl7pPr>
+              <a:buNone/>
               <a:defRPr sz="2025">
                 <a:solidFill>
                   <a:srgbClr val="52627A"/>
@@ -14812,6 +15337,7 @@
               </a:defRPr>
             </a:lvl7pPr>
             <a:lvl8pPr>
+              <a:buNone/>
               <a:defRPr sz="2025">
                 <a:solidFill>
                   <a:srgbClr val="52627A"/>
@@ -14822,6 +15348,7 @@
               </a:defRPr>
             </a:lvl8pPr>
             <a:lvl9pPr>
+              <a:buNone/>
               <a:defRPr sz="2025">
                 <a:solidFill>
                   <a:srgbClr val="52627A"/>
@@ -14905,6 +15432,7 @@
               </a:defRPr>
             </a:defPPr>
             <a:lvl1pPr>
+              <a:buNone/>
               <a:defRPr sz="1875">
                 <a:solidFill>
                   <a:srgbClr val="14213D"/>
@@ -14915,6 +15443,7 @@
               </a:defRPr>
             </a:lvl1pPr>
             <a:lvl2pPr>
+              <a:buNone/>
               <a:defRPr sz="1875">
                 <a:solidFill>
                   <a:srgbClr val="14213D"/>
@@ -14925,6 +15454,7 @@
               </a:defRPr>
             </a:lvl2pPr>
             <a:lvl3pPr>
+              <a:buNone/>
               <a:defRPr sz="1875">
                 <a:solidFill>
                   <a:srgbClr val="14213D"/>
@@ -14935,6 +15465,7 @@
               </a:defRPr>
             </a:lvl3pPr>
             <a:lvl4pPr>
+              <a:buNone/>
               <a:defRPr sz="1875">
                 <a:solidFill>
                   <a:srgbClr val="14213D"/>
@@ -14945,6 +15476,7 @@
               </a:defRPr>
             </a:lvl4pPr>
             <a:lvl5pPr>
+              <a:buNone/>
               <a:defRPr sz="1875">
                 <a:solidFill>
                   <a:srgbClr val="14213D"/>
@@ -14955,6 +15487,7 @@
               </a:defRPr>
             </a:lvl5pPr>
             <a:lvl6pPr>
+              <a:buNone/>
               <a:defRPr sz="1875">
                 <a:solidFill>
                   <a:srgbClr val="14213D"/>
@@ -14965,6 +15498,7 @@
               </a:defRPr>
             </a:lvl6pPr>
             <a:lvl7pPr>
+              <a:buNone/>
               <a:defRPr sz="1875">
                 <a:solidFill>
                   <a:srgbClr val="14213D"/>
@@ -14975,6 +15509,7 @@
               </a:defRPr>
             </a:lvl7pPr>
             <a:lvl8pPr>
+              <a:buNone/>
               <a:defRPr sz="1875">
                 <a:solidFill>
                   <a:srgbClr val="14213D"/>
@@ -14985,6 +15520,7 @@
               </a:defRPr>
             </a:lvl8pPr>
             <a:lvl9pPr>
+              <a:buNone/>
               <a:defRPr sz="1875">
                 <a:solidFill>
                   <a:srgbClr val="14213D"/>
@@ -15207,6 +15743,7 @@
               </a:defRPr>
             </a:defPPr>
             <a:lvl1pPr>
+              <a:buNone/>
               <a:defRPr sz="1125">
                 <a:solidFill>
                   <a:srgbClr val="52627A"/>
@@ -15217,6 +15754,7 @@
               </a:defRPr>
             </a:lvl1pPr>
             <a:lvl2pPr>
+              <a:buNone/>
               <a:defRPr sz="1125">
                 <a:solidFill>
                   <a:srgbClr val="52627A"/>
@@ -15227,6 +15765,7 @@
               </a:defRPr>
             </a:lvl2pPr>
             <a:lvl3pPr>
+              <a:buNone/>
               <a:defRPr sz="1125">
                 <a:solidFill>
                   <a:srgbClr val="52627A"/>
@@ -15237,6 +15776,7 @@
               </a:defRPr>
             </a:lvl3pPr>
             <a:lvl4pPr>
+              <a:buNone/>
               <a:defRPr sz="1125">
                 <a:solidFill>
                   <a:srgbClr val="52627A"/>
@@ -15247,6 +15787,7 @@
               </a:defRPr>
             </a:lvl4pPr>
             <a:lvl5pPr>
+              <a:buNone/>
               <a:defRPr sz="1125">
                 <a:solidFill>
                   <a:srgbClr val="52627A"/>
@@ -15257,6 +15798,7 @@
               </a:defRPr>
             </a:lvl5pPr>
             <a:lvl6pPr>
+              <a:buNone/>
               <a:defRPr sz="1125">
                 <a:solidFill>
                   <a:srgbClr val="52627A"/>
@@ -15267,6 +15809,7 @@
               </a:defRPr>
             </a:lvl6pPr>
             <a:lvl7pPr>
+              <a:buNone/>
               <a:defRPr sz="1125">
                 <a:solidFill>
                   <a:srgbClr val="52627A"/>
@@ -15277,6 +15820,7 @@
               </a:defRPr>
             </a:lvl7pPr>
             <a:lvl8pPr>
+              <a:buNone/>
               <a:defRPr sz="1125">
                 <a:solidFill>
                   <a:srgbClr val="52627A"/>
@@ -15287,6 +15831,7 @@
               </a:defRPr>
             </a:lvl8pPr>
             <a:lvl9pPr>
+              <a:buNone/>
               <a:defRPr sz="1125">
                 <a:solidFill>
                   <a:srgbClr val="52627A"/>
@@ -15299,6 +15844,7 @@
           </a:lstStyle>
           <a:p xmlns:a="http://schemas.openxmlformats.org/drawingml/2006/main">
             <a:pPr>
+              <a:buNone/>
               <a:defRPr sz="1125">
                 <a:solidFill>
                   <a:srgbClr val="52627A"/>
@@ -15366,6 +15912,7 @@
               </a:defRPr>
             </a:defPPr>
             <a:lvl1pPr algn="r">
+              <a:buNone/>
               <a:defRPr sz="1125" b="1">
                 <a:solidFill>
                   <a:srgbClr val="162CD4"/>
@@ -15376,6 +15923,7 @@
               </a:defRPr>
             </a:lvl1pPr>
             <a:lvl2pPr algn="r">
+              <a:buNone/>
               <a:defRPr sz="1125" b="1">
                 <a:solidFill>
                   <a:srgbClr val="162CD4"/>
@@ -15386,6 +15934,7 @@
               </a:defRPr>
             </a:lvl2pPr>
             <a:lvl3pPr algn="r">
+              <a:buNone/>
               <a:defRPr sz="1125" b="1">
                 <a:solidFill>
                   <a:srgbClr val="162CD4"/>
@@ -15396,6 +15945,7 @@
               </a:defRPr>
             </a:lvl3pPr>
             <a:lvl4pPr algn="r">
+              <a:buNone/>
               <a:defRPr sz="1125" b="1">
                 <a:solidFill>
                   <a:srgbClr val="162CD4"/>
@@ -15406,6 +15956,7 @@
               </a:defRPr>
             </a:lvl4pPr>
             <a:lvl5pPr algn="r">
+              <a:buNone/>
               <a:defRPr sz="1125" b="1">
                 <a:solidFill>
                   <a:srgbClr val="162CD4"/>
@@ -15416,6 +15967,7 @@
               </a:defRPr>
             </a:lvl5pPr>
             <a:lvl6pPr algn="r">
+              <a:buNone/>
               <a:defRPr sz="1125" b="1">
                 <a:solidFill>
                   <a:srgbClr val="162CD4"/>
@@ -15426,6 +15978,7 @@
               </a:defRPr>
             </a:lvl6pPr>
             <a:lvl7pPr algn="r">
+              <a:buNone/>
               <a:defRPr sz="1125" b="1">
                 <a:solidFill>
                   <a:srgbClr val="162CD4"/>
@@ -15436,6 +15989,7 @@
               </a:defRPr>
             </a:lvl7pPr>
             <a:lvl8pPr algn="r">
+              <a:buNone/>
               <a:defRPr sz="1125" b="1">
                 <a:solidFill>
                   <a:srgbClr val="162CD4"/>
@@ -15446,6 +16000,7 @@
               </a:defRPr>
             </a:lvl8pPr>
             <a:lvl9pPr algn="r">
+              <a:buNone/>
               <a:defRPr sz="1125" b="1">
                 <a:solidFill>
                   <a:srgbClr val="162CD4"/>
@@ -15458,6 +16013,7 @@
           </a:lstStyle>
           <a:p xmlns:a="http://schemas.openxmlformats.org/drawingml/2006/main">
             <a:pPr algn="r">
+              <a:buNone/>
               <a:defRPr sz="1125" b="1">
                 <a:solidFill>
                   <a:srgbClr val="162CD4"/>
@@ -15585,6 +16141,7 @@
               </a:defRPr>
             </a:defPPr>
             <a:lvl1pPr>
+              <a:buNone/>
               <a:defRPr sz="3225" b="1">
                 <a:solidFill>
                   <a:srgbClr val="14213D"/>
@@ -15595,6 +16152,7 @@
               </a:defRPr>
             </a:lvl1pPr>
             <a:lvl2pPr>
+              <a:buNone/>
               <a:defRPr sz="3225" b="1">
                 <a:solidFill>
                   <a:srgbClr val="14213D"/>
@@ -15605,6 +16163,7 @@
               </a:defRPr>
             </a:lvl2pPr>
             <a:lvl3pPr>
+              <a:buNone/>
               <a:defRPr sz="3225" b="1">
                 <a:solidFill>
                   <a:srgbClr val="14213D"/>
@@ -15615,6 +16174,7 @@
               </a:defRPr>
             </a:lvl3pPr>
             <a:lvl4pPr>
+              <a:buNone/>
               <a:defRPr sz="3225" b="1">
                 <a:solidFill>
                   <a:srgbClr val="14213D"/>
@@ -15625,6 +16185,7 @@
               </a:defRPr>
             </a:lvl4pPr>
             <a:lvl5pPr>
+              <a:buNone/>
               <a:defRPr sz="3225" b="1">
                 <a:solidFill>
                   <a:srgbClr val="14213D"/>
@@ -15635,6 +16196,7 @@
               </a:defRPr>
             </a:lvl5pPr>
             <a:lvl6pPr>
+              <a:buNone/>
               <a:defRPr sz="3225" b="1">
                 <a:solidFill>
                   <a:srgbClr val="14213D"/>
@@ -15645,6 +16207,7 @@
               </a:defRPr>
             </a:lvl6pPr>
             <a:lvl7pPr>
+              <a:buNone/>
               <a:defRPr sz="3225" b="1">
                 <a:solidFill>
                   <a:srgbClr val="14213D"/>
@@ -15655,6 +16218,7 @@
               </a:defRPr>
             </a:lvl7pPr>
             <a:lvl8pPr>
+              <a:buNone/>
               <a:defRPr sz="3225" b="1">
                 <a:solidFill>
                   <a:srgbClr val="14213D"/>
@@ -15665,6 +16229,7 @@
               </a:defRPr>
             </a:lvl8pPr>
             <a:lvl9pPr>
+              <a:buNone/>
               <a:defRPr sz="3225" b="1">
                 <a:solidFill>
                   <a:srgbClr val="14213D"/>
@@ -15677,6 +16242,7 @@
           </a:lstStyle>
           <a:p xmlns:a="http://schemas.openxmlformats.org/drawingml/2006/main">
             <a:pPr>
+              <a:buNone/>
               <a:defRPr sz="3225" b="1">
                 <a:solidFill>
                   <a:srgbClr val="14213D"/>
@@ -15775,6 +16341,7 @@
               </a:defRPr>
             </a:defPPr>
             <a:lvl1pPr>
+              <a:buNone/>
               <a:defRPr sz="2025">
                 <a:solidFill>
                   <a:srgbClr val="52627A"/>
@@ -15785,6 +16352,7 @@
               </a:defRPr>
             </a:lvl1pPr>
             <a:lvl2pPr>
+              <a:buNone/>
               <a:defRPr sz="2025">
                 <a:solidFill>
                   <a:srgbClr val="52627A"/>
@@ -15795,6 +16363,7 @@
               </a:defRPr>
             </a:lvl2pPr>
             <a:lvl3pPr>
+              <a:buNone/>
               <a:defRPr sz="2025">
                 <a:solidFill>
                   <a:srgbClr val="52627A"/>
@@ -15805,6 +16374,7 @@
               </a:defRPr>
             </a:lvl3pPr>
             <a:lvl4pPr>
+              <a:buNone/>
               <a:defRPr sz="2025">
                 <a:solidFill>
                   <a:srgbClr val="52627A"/>
@@ -15815,6 +16385,7 @@
               </a:defRPr>
             </a:lvl4pPr>
             <a:lvl5pPr>
+              <a:buNone/>
               <a:defRPr sz="2025">
                 <a:solidFill>
                   <a:srgbClr val="52627A"/>
@@ -15825,6 +16396,7 @@
               </a:defRPr>
             </a:lvl5pPr>
             <a:lvl6pPr>
+              <a:buNone/>
               <a:defRPr sz="2025">
                 <a:solidFill>
                   <a:srgbClr val="52627A"/>
@@ -15835,6 +16407,7 @@
               </a:defRPr>
             </a:lvl6pPr>
             <a:lvl7pPr>
+              <a:buNone/>
               <a:defRPr sz="2025">
                 <a:solidFill>
                   <a:srgbClr val="52627A"/>
@@ -15845,6 +16418,7 @@
               </a:defRPr>
             </a:lvl7pPr>
             <a:lvl8pPr>
+              <a:buNone/>
               <a:defRPr sz="2025">
                 <a:solidFill>
                   <a:srgbClr val="52627A"/>
@@ -15855,6 +16429,7 @@
               </a:defRPr>
             </a:lvl8pPr>
             <a:lvl9pPr>
+              <a:buNone/>
               <a:defRPr sz="2025">
                 <a:solidFill>
                   <a:srgbClr val="52627A"/>
@@ -15938,6 +16513,7 @@
               </a:defRPr>
             </a:defPPr>
             <a:lvl1pPr>
+              <a:buNone/>
               <a:defRPr sz="1875">
                 <a:solidFill>
                   <a:srgbClr val="14213D"/>
@@ -15948,6 +16524,7 @@
               </a:defRPr>
             </a:lvl1pPr>
             <a:lvl2pPr>
+              <a:buNone/>
               <a:defRPr sz="1875">
                 <a:solidFill>
                   <a:srgbClr val="14213D"/>
@@ -15958,6 +16535,7 @@
               </a:defRPr>
             </a:lvl2pPr>
             <a:lvl3pPr>
+              <a:buNone/>
               <a:defRPr sz="1875">
                 <a:solidFill>
                   <a:srgbClr val="14213D"/>
@@ -15968,6 +16546,7 @@
               </a:defRPr>
             </a:lvl3pPr>
             <a:lvl4pPr>
+              <a:buNone/>
               <a:defRPr sz="1875">
                 <a:solidFill>
                   <a:srgbClr val="14213D"/>
@@ -15978,6 +16557,7 @@
               </a:defRPr>
             </a:lvl4pPr>
             <a:lvl5pPr>
+              <a:buNone/>
               <a:defRPr sz="1875">
                 <a:solidFill>
                   <a:srgbClr val="14213D"/>
@@ -15988,6 +16568,7 @@
               </a:defRPr>
             </a:lvl5pPr>
             <a:lvl6pPr>
+              <a:buNone/>
               <a:defRPr sz="1875">
                 <a:solidFill>
                   <a:srgbClr val="14213D"/>
@@ -15998,6 +16579,7 @@
               </a:defRPr>
             </a:lvl6pPr>
             <a:lvl7pPr>
+              <a:buNone/>
               <a:defRPr sz="1875">
                 <a:solidFill>
                   <a:srgbClr val="14213D"/>
@@ -16008,6 +16590,7 @@
               </a:defRPr>
             </a:lvl7pPr>
             <a:lvl8pPr>
+              <a:buNone/>
               <a:defRPr sz="1875">
                 <a:solidFill>
                   <a:srgbClr val="14213D"/>
@@ -16018,6 +16601,7 @@
               </a:defRPr>
             </a:lvl8pPr>
             <a:lvl9pPr>
+              <a:buNone/>
               <a:defRPr sz="1875">
                 <a:solidFill>
                   <a:srgbClr val="14213D"/>
@@ -16240,6 +16824,7 @@
               </a:defRPr>
             </a:defPPr>
             <a:lvl1pPr>
+              <a:buNone/>
               <a:defRPr sz="1125">
                 <a:solidFill>
                   <a:srgbClr val="52627A"/>
@@ -16250,6 +16835,7 @@
               </a:defRPr>
             </a:lvl1pPr>
             <a:lvl2pPr>
+              <a:buNone/>
               <a:defRPr sz="1125">
                 <a:solidFill>
                   <a:srgbClr val="52627A"/>
@@ -16260,6 +16846,7 @@
               </a:defRPr>
             </a:lvl2pPr>
             <a:lvl3pPr>
+              <a:buNone/>
               <a:defRPr sz="1125">
                 <a:solidFill>
                   <a:srgbClr val="52627A"/>
@@ -16270,6 +16857,7 @@
               </a:defRPr>
             </a:lvl3pPr>
             <a:lvl4pPr>
+              <a:buNone/>
               <a:defRPr sz="1125">
                 <a:solidFill>
                   <a:srgbClr val="52627A"/>
@@ -16280,6 +16868,7 @@
               </a:defRPr>
             </a:lvl4pPr>
             <a:lvl5pPr>
+              <a:buNone/>
               <a:defRPr sz="1125">
                 <a:solidFill>
                   <a:srgbClr val="52627A"/>
@@ -16290,6 +16879,7 @@
               </a:defRPr>
             </a:lvl5pPr>
             <a:lvl6pPr>
+              <a:buNone/>
               <a:defRPr sz="1125">
                 <a:solidFill>
                   <a:srgbClr val="52627A"/>
@@ -16300,6 +16890,7 @@
               </a:defRPr>
             </a:lvl6pPr>
             <a:lvl7pPr>
+              <a:buNone/>
               <a:defRPr sz="1125">
                 <a:solidFill>
                   <a:srgbClr val="52627A"/>
@@ -16310,6 +16901,7 @@
               </a:defRPr>
             </a:lvl7pPr>
             <a:lvl8pPr>
+              <a:buNone/>
               <a:defRPr sz="1125">
                 <a:solidFill>
                   <a:srgbClr val="52627A"/>
@@ -16320,6 +16912,7 @@
               </a:defRPr>
             </a:lvl8pPr>
             <a:lvl9pPr>
+              <a:buNone/>
               <a:defRPr sz="1125">
                 <a:solidFill>
                   <a:srgbClr val="52627A"/>
@@ -16332,6 +16925,7 @@
           </a:lstStyle>
           <a:p xmlns:a="http://schemas.openxmlformats.org/drawingml/2006/main">
             <a:pPr>
+              <a:buNone/>
               <a:defRPr sz="1125">
                 <a:solidFill>
                   <a:srgbClr val="52627A"/>
@@ -16399,6 +16993,7 @@
               </a:defRPr>
             </a:defPPr>
             <a:lvl1pPr algn="r">
+              <a:buNone/>
               <a:defRPr sz="1125" b="1">
                 <a:solidFill>
                   <a:srgbClr val="162CD4"/>
@@ -16409,6 +17004,7 @@
               </a:defRPr>
             </a:lvl1pPr>
             <a:lvl2pPr algn="r">
+              <a:buNone/>
               <a:defRPr sz="1125" b="1">
                 <a:solidFill>
                   <a:srgbClr val="162CD4"/>
@@ -16419,6 +17015,7 @@
               </a:defRPr>
             </a:lvl2pPr>
             <a:lvl3pPr algn="r">
+              <a:buNone/>
               <a:defRPr sz="1125" b="1">
                 <a:solidFill>
                   <a:srgbClr val="162CD4"/>
@@ -16429,6 +17026,7 @@
               </a:defRPr>
             </a:lvl3pPr>
             <a:lvl4pPr algn="r">
+              <a:buNone/>
               <a:defRPr sz="1125" b="1">
                 <a:solidFill>
                   <a:srgbClr val="162CD4"/>
@@ -16439,6 +17037,7 @@
               </a:defRPr>
             </a:lvl4pPr>
             <a:lvl5pPr algn="r">
+              <a:buNone/>
               <a:defRPr sz="1125" b="1">
                 <a:solidFill>
                   <a:srgbClr val="162CD4"/>
@@ -16449,6 +17048,7 @@
               </a:defRPr>
             </a:lvl5pPr>
             <a:lvl6pPr algn="r">
+              <a:buNone/>
               <a:defRPr sz="1125" b="1">
                 <a:solidFill>
                   <a:srgbClr val="162CD4"/>
@@ -16459,6 +17059,7 @@
               </a:defRPr>
             </a:lvl6pPr>
             <a:lvl7pPr algn="r">
+              <a:buNone/>
               <a:defRPr sz="1125" b="1">
                 <a:solidFill>
                   <a:srgbClr val="162CD4"/>
@@ -16469,6 +17070,7 @@
               </a:defRPr>
             </a:lvl7pPr>
             <a:lvl8pPr algn="r">
+              <a:buNone/>
               <a:defRPr sz="1125" b="1">
                 <a:solidFill>
                   <a:srgbClr val="162CD4"/>
@@ -16479,6 +17081,7 @@
               </a:defRPr>
             </a:lvl8pPr>
             <a:lvl9pPr algn="r">
+              <a:buNone/>
               <a:defRPr sz="1125" b="1">
                 <a:solidFill>
                   <a:srgbClr val="162CD4"/>
@@ -16491,6 +17094,7 @@
           </a:lstStyle>
           <a:p xmlns:a="http://schemas.openxmlformats.org/drawingml/2006/main">
             <a:pPr algn="r">
+              <a:buNone/>
               <a:defRPr sz="1125" b="1">
                 <a:solidFill>
                   <a:srgbClr val="162CD4"/>
@@ -16618,6 +17222,7 @@
               </a:defRPr>
             </a:defPPr>
             <a:lvl1pPr>
+              <a:buNone/>
               <a:defRPr sz="3225" b="1">
                 <a:solidFill>
                   <a:srgbClr val="14213D"/>
@@ -16628,6 +17233,7 @@
               </a:defRPr>
             </a:lvl1pPr>
             <a:lvl2pPr>
+              <a:buNone/>
               <a:defRPr sz="3225" b="1">
                 <a:solidFill>
                   <a:srgbClr val="14213D"/>
@@ -16638,6 +17244,7 @@
               </a:defRPr>
             </a:lvl2pPr>
             <a:lvl3pPr>
+              <a:buNone/>
               <a:defRPr sz="3225" b="1">
                 <a:solidFill>
                   <a:srgbClr val="14213D"/>
@@ -16648,6 +17255,7 @@
               </a:defRPr>
             </a:lvl3pPr>
             <a:lvl4pPr>
+              <a:buNone/>
               <a:defRPr sz="3225" b="1">
                 <a:solidFill>
                   <a:srgbClr val="14213D"/>
@@ -16658,6 +17266,7 @@
               </a:defRPr>
             </a:lvl4pPr>
             <a:lvl5pPr>
+              <a:buNone/>
               <a:defRPr sz="3225" b="1">
                 <a:solidFill>
                   <a:srgbClr val="14213D"/>
@@ -16668,6 +17277,7 @@
               </a:defRPr>
             </a:lvl5pPr>
             <a:lvl6pPr>
+              <a:buNone/>
               <a:defRPr sz="3225" b="1">
                 <a:solidFill>
                   <a:srgbClr val="14213D"/>
@@ -16678,6 +17288,7 @@
               </a:defRPr>
             </a:lvl6pPr>
             <a:lvl7pPr>
+              <a:buNone/>
               <a:defRPr sz="3225" b="1">
                 <a:solidFill>
                   <a:srgbClr val="14213D"/>
@@ -16688,6 +17299,7 @@
               </a:defRPr>
             </a:lvl7pPr>
             <a:lvl8pPr>
+              <a:buNone/>
               <a:defRPr sz="3225" b="1">
                 <a:solidFill>
                   <a:srgbClr val="14213D"/>
@@ -16698,6 +17310,7 @@
               </a:defRPr>
             </a:lvl8pPr>
             <a:lvl9pPr>
+              <a:buNone/>
               <a:defRPr sz="3225" b="1">
                 <a:solidFill>
                   <a:srgbClr val="14213D"/>
@@ -16710,6 +17323,7 @@
           </a:lstStyle>
           <a:p xmlns:a="http://schemas.openxmlformats.org/drawingml/2006/main">
             <a:pPr>
+              <a:buNone/>
               <a:defRPr sz="3225" b="1">
                 <a:solidFill>
                   <a:srgbClr val="14213D"/>
@@ -16797,7 +17411,7 @@
             <a:normAutofit fontScale="100000"/>
           </a:bodyPr>
           <a:lstStyle xmlns:a="http://schemas.openxmlformats.org/drawingml/2006/main">
-            <a:defPPr>
+            <a:defPPr algn="l">
               <a:defRPr sz="2025">
                 <a:solidFill>
                   <a:srgbClr val="52627A"/>
@@ -16807,7 +17421,8 @@
                 <a:cs typeface="Arial"/>
               </a:defRPr>
             </a:defPPr>
-            <a:lvl1pPr>
+            <a:lvl1pPr algn="l">
+              <a:buNone/>
               <a:defRPr sz="2025">
                 <a:solidFill>
                   <a:srgbClr val="52627A"/>
@@ -16817,7 +17432,8 @@
                 <a:cs typeface="Arial"/>
               </a:defRPr>
             </a:lvl1pPr>
-            <a:lvl2pPr>
+            <a:lvl2pPr algn="l">
+              <a:buNone/>
               <a:defRPr sz="2025">
                 <a:solidFill>
                   <a:srgbClr val="52627A"/>
@@ -16827,7 +17443,8 @@
                 <a:cs typeface="Arial"/>
               </a:defRPr>
             </a:lvl2pPr>
-            <a:lvl3pPr>
+            <a:lvl3pPr algn="l">
+              <a:buNone/>
               <a:defRPr sz="2025">
                 <a:solidFill>
                   <a:srgbClr val="52627A"/>
@@ -16837,7 +17454,8 @@
                 <a:cs typeface="Arial"/>
               </a:defRPr>
             </a:lvl3pPr>
-            <a:lvl4pPr>
+            <a:lvl4pPr algn="l">
+              <a:buNone/>
               <a:defRPr sz="2025">
                 <a:solidFill>
                   <a:srgbClr val="52627A"/>
@@ -16847,7 +17465,8 @@
                 <a:cs typeface="Arial"/>
               </a:defRPr>
             </a:lvl4pPr>
-            <a:lvl5pPr>
+            <a:lvl5pPr algn="l">
+              <a:buNone/>
               <a:defRPr sz="2025">
                 <a:solidFill>
                   <a:srgbClr val="52627A"/>
@@ -16857,7 +17476,8 @@
                 <a:cs typeface="Arial"/>
               </a:defRPr>
             </a:lvl5pPr>
-            <a:lvl6pPr>
+            <a:lvl6pPr algn="l">
+              <a:buNone/>
               <a:defRPr sz="2025">
                 <a:solidFill>
                   <a:srgbClr val="52627A"/>
@@ -16867,7 +17487,8 @@
                 <a:cs typeface="Arial"/>
               </a:defRPr>
             </a:lvl6pPr>
-            <a:lvl7pPr>
+            <a:lvl7pPr algn="l">
+              <a:buNone/>
               <a:defRPr sz="2025">
                 <a:solidFill>
                   <a:srgbClr val="52627A"/>
@@ -16877,7 +17498,8 @@
                 <a:cs typeface="Arial"/>
               </a:defRPr>
             </a:lvl7pPr>
-            <a:lvl8pPr>
+            <a:lvl8pPr algn="l">
+              <a:buNone/>
               <a:defRPr sz="2025">
                 <a:solidFill>
                   <a:srgbClr val="52627A"/>
@@ -16887,7 +17509,8 @@
                 <a:cs typeface="Arial"/>
               </a:defRPr>
             </a:lvl8pPr>
-            <a:lvl9pPr>
+            <a:lvl9pPr algn="l">
+              <a:buNone/>
               <a:defRPr sz="2025">
                 <a:solidFill>
                   <a:srgbClr val="52627A"/>
@@ -16899,7 +17522,7 @@
             </a:lvl9pPr>
           </a:lstStyle>
           <a:p xmlns:a="http://schemas.openxmlformats.org/drawingml/2006/main">
-            <a:pPr>
+            <a:pPr algn="l">
               <a:lnSpc>
                 <a:spcPct val="112000"/>
               </a:lnSpc>
@@ -16922,7 +17545,7 @@
                 <a:ea typeface="Arial"/>
                 <a:cs typeface="Arial"/>
               </a:rPr>
-              <a:t>25 pytest functions are collected: 24 Flash regressions and one Pro exploration.</a:t>
+              <a:t>26 cases collected: 25 Flash regressions and one Pro exploration</a:t>
             </a:r>
           </a:p>
         </p:txBody>
@@ -16960,7 +17583,7 @@
             <a:normAutofit fontScale="100000"/>
           </a:bodyPr>
           <a:lstStyle xmlns:a="http://schemas.openxmlformats.org/drawingml/2006/main">
-            <a:defPPr>
+            <a:defPPr algn="l">
               <a:defRPr sz="1875">
                 <a:solidFill>
                   <a:srgbClr val="14213D"/>
@@ -16970,7 +17593,8 @@
                 <a:cs typeface="Arial"/>
               </a:defRPr>
             </a:defPPr>
-            <a:lvl1pPr>
+            <a:lvl1pPr algn="l">
+              <a:buNone/>
               <a:defRPr sz="1875">
                 <a:solidFill>
                   <a:srgbClr val="14213D"/>
@@ -16980,7 +17604,8 @@
                 <a:cs typeface="Arial"/>
               </a:defRPr>
             </a:lvl1pPr>
-            <a:lvl2pPr>
+            <a:lvl2pPr algn="l">
+              <a:buNone/>
               <a:defRPr sz="1875">
                 <a:solidFill>
                   <a:srgbClr val="14213D"/>
@@ -16990,7 +17615,8 @@
                 <a:cs typeface="Arial"/>
               </a:defRPr>
             </a:lvl2pPr>
-            <a:lvl3pPr>
+            <a:lvl3pPr algn="l">
+              <a:buNone/>
               <a:defRPr sz="1875">
                 <a:solidFill>
                   <a:srgbClr val="14213D"/>
@@ -17000,7 +17626,8 @@
                 <a:cs typeface="Arial"/>
               </a:defRPr>
             </a:lvl3pPr>
-            <a:lvl4pPr>
+            <a:lvl4pPr algn="l">
+              <a:buNone/>
               <a:defRPr sz="1875">
                 <a:solidFill>
                   <a:srgbClr val="14213D"/>
@@ -17010,7 +17637,8 @@
                 <a:cs typeface="Arial"/>
               </a:defRPr>
             </a:lvl4pPr>
-            <a:lvl5pPr>
+            <a:lvl5pPr algn="l">
+              <a:buNone/>
               <a:defRPr sz="1875">
                 <a:solidFill>
                   <a:srgbClr val="14213D"/>
@@ -17020,7 +17648,8 @@
                 <a:cs typeface="Arial"/>
               </a:defRPr>
             </a:lvl5pPr>
-            <a:lvl6pPr>
+            <a:lvl6pPr algn="l">
+              <a:buNone/>
               <a:defRPr sz="1875">
                 <a:solidFill>
                   <a:srgbClr val="14213D"/>
@@ -17030,7 +17659,8 @@
                 <a:cs typeface="Arial"/>
               </a:defRPr>
             </a:lvl6pPr>
-            <a:lvl7pPr>
+            <a:lvl7pPr algn="l">
+              <a:buNone/>
               <a:defRPr sz="1875">
                 <a:solidFill>
                   <a:srgbClr val="14213D"/>
@@ -17040,7 +17670,8 @@
                 <a:cs typeface="Arial"/>
               </a:defRPr>
             </a:lvl7pPr>
-            <a:lvl8pPr>
+            <a:lvl8pPr algn="l">
+              <a:buNone/>
               <a:defRPr sz="1875">
                 <a:solidFill>
                   <a:srgbClr val="14213D"/>
@@ -17050,7 +17681,8 @@
                 <a:cs typeface="Arial"/>
               </a:defRPr>
             </a:lvl8pPr>
-            <a:lvl9pPr>
+            <a:lvl9pPr algn="l">
+              <a:buNone/>
               <a:defRPr sz="1875">
                 <a:solidFill>
                   <a:srgbClr val="14213D"/>
@@ -17062,7 +17694,7 @@
             </a:lvl9pPr>
           </a:lstStyle>
           <a:p xmlns:a="http://schemas.openxmlformats.org/drawingml/2006/main">
-            <a:pPr>
+            <a:pPr algn="l">
               <a:lnSpc>
                 <a:spcPct val="120000"/>
               </a:lnSpc>
@@ -17089,7 +17721,7 @@
             </a:r>
           </a:p>
           <a:p xmlns:a="http://schemas.openxmlformats.org/drawingml/2006/main">
-            <a:pPr>
+            <a:pPr algn="l">
               <a:lnSpc>
                 <a:spcPct val="120000"/>
               </a:lnSpc>
@@ -17116,7 +17748,7 @@
             </a:r>
           </a:p>
           <a:p xmlns:a="http://schemas.openxmlformats.org/drawingml/2006/main">
-            <a:pPr>
+            <a:pPr algn="l">
               <a:lnSpc>
                 <a:spcPct val="120000"/>
               </a:lnSpc>
@@ -17139,11 +17771,11 @@
                 <a:ea typeface="Arial"/>
                 <a:cs typeface="Arial"/>
               </a:rPr>
-              <a:t>03   TC-18 to TC-24: connection and consultant workflow</a:t>
+              <a:t>03   TC-18 to TC-24: connection and trusted workflow</a:t>
             </a:r>
           </a:p>
           <a:p xmlns:a="http://schemas.openxmlformats.org/drawingml/2006/main">
-            <a:pPr>
+            <a:pPr algn="l">
               <a:lnSpc>
                 <a:spcPct val="120000"/>
               </a:lnSpc>
@@ -17166,11 +17798,11 @@
                 <a:ea typeface="Arial"/>
                 <a:cs typeface="Arial"/>
               </a:rPr>
-              <a:t>04   21 cases run in the automated Flash suite x 3</a:t>
+              <a:t>04   21 automatic Flash cases x3; TC-10/14/15/26 manual x3</a:t>
             </a:r>
           </a:p>
           <a:p xmlns:a="http://schemas.openxmlformats.org/drawingml/2006/main">
-            <a:pPr>
+            <a:pPr algn="l">
               <a:lnSpc>
                 <a:spcPct val="120000"/>
               </a:lnSpc>
@@ -17193,7 +17825,7 @@
                 <a:ea typeface="Arial"/>
                 <a:cs typeface="Arial"/>
               </a:rPr>
-              <a:t>05   TC-10/14/15 need a fresh operator push per run; TC-25 is a 20-minute Pro session</a:t>
+              <a:t>05   TC-25: separate Pro session; no mobile case executed</a:t>
             </a:r>
           </a:p>
         </p:txBody>
@@ -17273,6 +17905,7 @@
               </a:defRPr>
             </a:defPPr>
             <a:lvl1pPr>
+              <a:buNone/>
               <a:defRPr sz="1125">
                 <a:solidFill>
                   <a:srgbClr val="52627A"/>
@@ -17283,6 +17916,7 @@
               </a:defRPr>
             </a:lvl1pPr>
             <a:lvl2pPr>
+              <a:buNone/>
               <a:defRPr sz="1125">
                 <a:solidFill>
                   <a:srgbClr val="52627A"/>
@@ -17293,6 +17927,7 @@
               </a:defRPr>
             </a:lvl2pPr>
             <a:lvl3pPr>
+              <a:buNone/>
               <a:defRPr sz="1125">
                 <a:solidFill>
                   <a:srgbClr val="52627A"/>
@@ -17303,6 +17938,7 @@
               </a:defRPr>
             </a:lvl3pPr>
             <a:lvl4pPr>
+              <a:buNone/>
               <a:defRPr sz="1125">
                 <a:solidFill>
                   <a:srgbClr val="52627A"/>
@@ -17313,6 +17949,7 @@
               </a:defRPr>
             </a:lvl4pPr>
             <a:lvl5pPr>
+              <a:buNone/>
               <a:defRPr sz="1125">
                 <a:solidFill>
                   <a:srgbClr val="52627A"/>
@@ -17323,6 +17960,7 @@
               </a:defRPr>
             </a:lvl5pPr>
             <a:lvl6pPr>
+              <a:buNone/>
               <a:defRPr sz="1125">
                 <a:solidFill>
                   <a:srgbClr val="52627A"/>
@@ -17333,6 +17971,7 @@
               </a:defRPr>
             </a:lvl6pPr>
             <a:lvl7pPr>
+              <a:buNone/>
               <a:defRPr sz="1125">
                 <a:solidFill>
                   <a:srgbClr val="52627A"/>
@@ -17343,6 +17982,7 @@
               </a:defRPr>
             </a:lvl7pPr>
             <a:lvl8pPr>
+              <a:buNone/>
               <a:defRPr sz="1125">
                 <a:solidFill>
                   <a:srgbClr val="52627A"/>
@@ -17353,6 +17993,7 @@
               </a:defRPr>
             </a:lvl8pPr>
             <a:lvl9pPr>
+              <a:buNone/>
               <a:defRPr sz="1125">
                 <a:solidFill>
                   <a:srgbClr val="52627A"/>
@@ -17365,6 +18006,7 @@
           </a:lstStyle>
           <a:p xmlns:a="http://schemas.openxmlformats.org/drawingml/2006/main">
             <a:pPr>
+              <a:buNone/>
               <a:defRPr sz="1125">
                 <a:solidFill>
                   <a:srgbClr val="52627A"/>
@@ -17432,6 +18074,7 @@
               </a:defRPr>
             </a:defPPr>
             <a:lvl1pPr algn="r">
+              <a:buNone/>
               <a:defRPr sz="1125" b="1">
                 <a:solidFill>
                   <a:srgbClr val="162CD4"/>
@@ -17442,6 +18085,7 @@
               </a:defRPr>
             </a:lvl1pPr>
             <a:lvl2pPr algn="r">
+              <a:buNone/>
               <a:defRPr sz="1125" b="1">
                 <a:solidFill>
                   <a:srgbClr val="162CD4"/>
@@ -17452,6 +18096,7 @@
               </a:defRPr>
             </a:lvl2pPr>
             <a:lvl3pPr algn="r">
+              <a:buNone/>
               <a:defRPr sz="1125" b="1">
                 <a:solidFill>
                   <a:srgbClr val="162CD4"/>
@@ -17462,6 +18107,7 @@
               </a:defRPr>
             </a:lvl3pPr>
             <a:lvl4pPr algn="r">
+              <a:buNone/>
               <a:defRPr sz="1125" b="1">
                 <a:solidFill>
                   <a:srgbClr val="162CD4"/>
@@ -17472,6 +18118,7 @@
               </a:defRPr>
             </a:lvl4pPr>
             <a:lvl5pPr algn="r">
+              <a:buNone/>
               <a:defRPr sz="1125" b="1">
                 <a:solidFill>
                   <a:srgbClr val="162CD4"/>
@@ -17482,6 +18129,7 @@
               </a:defRPr>
             </a:lvl5pPr>
             <a:lvl6pPr algn="r">
+              <a:buNone/>
               <a:defRPr sz="1125" b="1">
                 <a:solidFill>
                   <a:srgbClr val="162CD4"/>
@@ -17492,6 +18140,7 @@
               </a:defRPr>
             </a:lvl6pPr>
             <a:lvl7pPr algn="r">
+              <a:buNone/>
               <a:defRPr sz="1125" b="1">
                 <a:solidFill>
                   <a:srgbClr val="162CD4"/>
@@ -17502,6 +18151,7 @@
               </a:defRPr>
             </a:lvl7pPr>
             <a:lvl8pPr algn="r">
+              <a:buNone/>
               <a:defRPr sz="1125" b="1">
                 <a:solidFill>
                   <a:srgbClr val="162CD4"/>
@@ -17512,6 +18162,7 @@
               </a:defRPr>
             </a:lvl8pPr>
             <a:lvl9pPr algn="r">
+              <a:buNone/>
               <a:defRPr sz="1125" b="1">
                 <a:solidFill>
                   <a:srgbClr val="162CD4"/>
@@ -17524,6 +18175,7 @@
           </a:lstStyle>
           <a:p xmlns:a="http://schemas.openxmlformats.org/drawingml/2006/main">
             <a:pPr algn="r">
+              <a:buNone/>
               <a:defRPr sz="1125" b="1">
                 <a:solidFill>
                   <a:srgbClr val="162CD4"/>
